--- a/docs/Healthcare RAG-Powered presentation.pptx
+++ b/docs/Healthcare RAG-Powered presentation.pptx
@@ -5,18 +5,18 @@
     <p:sldMasterId id="2147483648" r:id="rId1"/>
   </p:sldMasterIdLst>
   <p:sldIdLst>
-    <p:sldId id="256" r:id="rId6"/>
-    <p:sldId id="257" r:id="rId7"/>
-    <p:sldId id="258" r:id="rId8"/>
-    <p:sldId id="259" r:id="rId9"/>
-    <p:sldId id="260" r:id="rId10"/>
-    <p:sldId id="261" r:id="rId11"/>
-    <p:sldId id="262" r:id="rId12"/>
-    <p:sldId id="263" r:id="rId13"/>
-    <p:sldId id="264" r:id="rId14"/>
-    <p:sldId id="265" r:id="rId15"/>
-    <p:sldId id="266" r:id="rId16"/>
-    <p:sldId id="267" r:id="rId17"/>
+    <p:sldId id="256" r:id="rId2"/>
+    <p:sldId id="257" r:id="rId3"/>
+    <p:sldId id="258" r:id="rId4"/>
+    <p:sldId id="259" r:id="rId5"/>
+    <p:sldId id="260" r:id="rId6"/>
+    <p:sldId id="261" r:id="rId7"/>
+    <p:sldId id="262" r:id="rId8"/>
+    <p:sldId id="263" r:id="rId9"/>
+    <p:sldId id="264" r:id="rId10"/>
+    <p:sldId id="265" r:id="rId11"/>
+    <p:sldId id="266" r:id="rId12"/>
+    <p:sldId id="267" r:id="rId13"/>
   </p:sldIdLst>
   <p:sldSz cx="18288000" cy="10287000"/>
   <p:notesSz cx="18288000" cy="10287000"/>
@@ -25,11 +25,27 @@
       <a:defRPr kern="0"/>
     </a:defPPr>
   </p:defaultTextStyle>
+  <p:extLst>
+    <p:ext uri="{EFAFB233-063F-42B5-8137-9DF3F51BA10A}">
+      <p15:sldGuideLst xmlns:p15="http://schemas.microsoft.com/office/powerpoint/2012/main">
+        <p15:guide id="1" orient="horz" pos="2880">
+          <p15:clr>
+            <a:srgbClr val="A4A3A4"/>
+          </p15:clr>
+        </p15:guide>
+        <p15:guide id="2" pos="2160">
+          <p15:clr>
+            <a:srgbClr val="A4A3A4"/>
+          </p15:clr>
+        </p15:guide>
+      </p15:sldGuideLst>
+    </p:ext>
+  </p:extLst>
 </p:presentation>
 </file>
 
 <file path=ppt/slideLayouts/slideLayout1.xml><?xml version="1.0" encoding="utf-8"?>
-<p:sldLayout xmlns:a="http://schemas.openxmlformats.org/drawingml/2006/main" xmlns:r="http://schemas.openxmlformats.org/officeDocument/2006/relationships" xmlns:p="http://schemas.openxmlformats.org/presentationml/2006/main" preserve="1" type="obj" showMasterSp="0">
+<p:sldLayout xmlns:a="http://schemas.openxmlformats.org/drawingml/2006/main" xmlns:r="http://schemas.openxmlformats.org/officeDocument/2006/relationships" xmlns:p="http://schemas.openxmlformats.org/presentationml/2006/main" showMasterSp="0" type="obj" preserve="1">
   <p:cSld name="Title Slide">
     <p:bg>
       <p:bgPr>
@@ -725,7 +741,9 @@
         <p:txBody>
           <a:bodyPr wrap="square" lIns="0" tIns="0" rIns="0" bIns="0" rtlCol="0"/>
           <a:lstStyle/>
-          <a:p/>
+          <a:p>
+            <a:endParaRPr/>
+          </a:p>
         </p:txBody>
       </p:sp>
       <p:sp>
@@ -762,7 +780,9 @@
               </a:defRPr>
             </a:lvl1pPr>
           </a:lstStyle>
-          <a:p/>
+          <a:p>
+            <a:endParaRPr/>
+          </a:p>
         </p:txBody>
       </p:sp>
       <p:sp>
@@ -799,7 +819,9 @@
               </a:defRPr>
             </a:lvl1pPr>
           </a:lstStyle>
-          <a:p/>
+          <a:p>
+            <a:endParaRPr/>
+          </a:p>
         </p:txBody>
       </p:sp>
       <p:sp>
@@ -809,7 +831,7 @@
             <a:spLocks noGrp="1"/>
           </p:cNvSpPr>
           <p:nvPr>
-            <p:ph type="ftr" idx="5" sz="quarter"/>
+            <p:ph type="ftr" sz="quarter" idx="5"/>
           </p:nvPr>
         </p:nvSpPr>
         <p:spPr/>
@@ -826,7 +848,9 @@
               </a:defRPr>
             </a:lvl1pPr>
           </a:lstStyle>
-          <a:p/>
+          <a:p>
+            <a:endParaRPr/>
+          </a:p>
         </p:txBody>
       </p:sp>
       <p:sp>
@@ -836,7 +860,7 @@
             <a:spLocks noGrp="1"/>
           </p:cNvSpPr>
           <p:nvPr>
-            <p:ph type="dt" idx="6" sz="half"/>
+            <p:ph type="dt" sz="half" idx="6"/>
           </p:nvPr>
         </p:nvSpPr>
         <p:spPr/>
@@ -856,7 +880,9 @@
           <a:p>
             <a:fld id="{1D8BD707-D9CF-40AE-B4C6-C98DA3205C09}" type="datetimeFigureOut">
               <a:rPr lang="en-US"/>
+              <a:t>7/9/2026</a:t>
             </a:fld>
+            <a:endParaRPr lang="en-US"/>
           </a:p>
         </p:txBody>
       </p:sp>
@@ -867,7 +893,7 @@
             <a:spLocks noGrp="1"/>
           </p:cNvSpPr>
           <p:nvPr>
-            <p:ph type="sldNum" idx="7" sz="quarter"/>
+            <p:ph type="sldNum" sz="quarter" idx="7"/>
           </p:nvPr>
         </p:nvSpPr>
         <p:spPr/>
@@ -886,8 +912,9 @@
           </a:lstStyle>
           <a:p>
             <a:fld id="{B6F15528-21DE-4FAA-801E-634DDDAF4B2B}" type="slidenum">
-              <a:t>#</a:t>
+              <a:t>‹#›</a:t>
             </a:fld>
+            <a:endParaRPr/>
           </a:p>
         </p:txBody>
       </p:sp>
@@ -900,7 +927,7 @@
 </file>
 
 <file path=ppt/slideLayouts/slideLayout2.xml><?xml version="1.0" encoding="utf-8"?>
-<p:sldLayout xmlns:a="http://schemas.openxmlformats.org/drawingml/2006/main" xmlns:r="http://schemas.openxmlformats.org/officeDocument/2006/relationships" xmlns:p="http://schemas.openxmlformats.org/presentationml/2006/main" preserve="1" type="obj">
+<p:sldLayout xmlns:a="http://schemas.openxmlformats.org/drawingml/2006/main" xmlns:r="http://schemas.openxmlformats.org/officeDocument/2006/relationships" xmlns:p="http://schemas.openxmlformats.org/presentationml/2006/main" type="obj" preserve="1">
   <p:cSld name="Title and Content">
     <p:spTree>
       <p:nvGrpSpPr>
@@ -940,7 +967,9 @@
               </a:defRPr>
             </a:lvl1pPr>
           </a:lstStyle>
-          <a:p/>
+          <a:p>
+            <a:endParaRPr/>
+          </a:p>
         </p:txBody>
       </p:sp>
       <p:sp>
@@ -967,7 +996,9 @@
               </a:defRPr>
             </a:lvl1pPr>
           </a:lstStyle>
-          <a:p/>
+          <a:p>
+            <a:endParaRPr/>
+          </a:p>
         </p:txBody>
       </p:sp>
       <p:sp>
@@ -977,7 +1008,7 @@
             <a:spLocks noGrp="1"/>
           </p:cNvSpPr>
           <p:nvPr>
-            <p:ph type="ftr" idx="5" sz="quarter"/>
+            <p:ph type="ftr" sz="quarter" idx="5"/>
           </p:nvPr>
         </p:nvSpPr>
         <p:spPr/>
@@ -994,7 +1025,9 @@
               </a:defRPr>
             </a:lvl1pPr>
           </a:lstStyle>
-          <a:p/>
+          <a:p>
+            <a:endParaRPr/>
+          </a:p>
         </p:txBody>
       </p:sp>
       <p:sp>
@@ -1004,7 +1037,7 @@
             <a:spLocks noGrp="1"/>
           </p:cNvSpPr>
           <p:nvPr>
-            <p:ph type="dt" idx="6" sz="half"/>
+            <p:ph type="dt" sz="half" idx="6"/>
           </p:nvPr>
         </p:nvSpPr>
         <p:spPr/>
@@ -1024,7 +1057,9 @@
           <a:p>
             <a:fld id="{1D8BD707-D9CF-40AE-B4C6-C98DA3205C09}" type="datetimeFigureOut">
               <a:rPr lang="en-US"/>
+              <a:t>7/9/2026</a:t>
             </a:fld>
+            <a:endParaRPr lang="en-US"/>
           </a:p>
         </p:txBody>
       </p:sp>
@@ -1035,7 +1070,7 @@
             <a:spLocks noGrp="1"/>
           </p:cNvSpPr>
           <p:nvPr>
-            <p:ph type="sldNum" idx="7" sz="quarter"/>
+            <p:ph type="sldNum" sz="quarter" idx="7"/>
           </p:nvPr>
         </p:nvSpPr>
         <p:spPr/>
@@ -1054,8 +1089,9 @@
           </a:lstStyle>
           <a:p>
             <a:fld id="{B6F15528-21DE-4FAA-801E-634DDDAF4B2B}" type="slidenum">
-              <a:t>#</a:t>
+              <a:t>‹#›</a:t>
             </a:fld>
+            <a:endParaRPr/>
           </a:p>
         </p:txBody>
       </p:sp>
@@ -1068,7 +1104,7 @@
 </file>
 
 <file path=ppt/slideLayouts/slideLayout3.xml><?xml version="1.0" encoding="utf-8"?>
-<p:sldLayout xmlns:a="http://schemas.openxmlformats.org/drawingml/2006/main" xmlns:r="http://schemas.openxmlformats.org/officeDocument/2006/relationships" xmlns:p="http://schemas.openxmlformats.org/presentationml/2006/main" preserve="1" type="obj">
+<p:sldLayout xmlns:a="http://schemas.openxmlformats.org/drawingml/2006/main" xmlns:r="http://schemas.openxmlformats.org/officeDocument/2006/relationships" xmlns:p="http://schemas.openxmlformats.org/presentationml/2006/main" type="obj" preserve="1">
   <p:cSld name="Two Content">
     <p:spTree>
       <p:nvGrpSpPr>
@@ -1108,7 +1144,9 @@
               </a:defRPr>
             </a:lvl1pPr>
           </a:lstStyle>
-          <a:p/>
+          <a:p>
+            <a:endParaRPr/>
+          </a:p>
         </p:txBody>
       </p:sp>
       <p:sp>
@@ -1118,7 +1156,7 @@
             <a:spLocks noGrp="1"/>
           </p:cNvSpPr>
           <p:nvPr>
-            <p:ph idx="2" sz="half"/>
+            <p:ph sz="half" idx="2"/>
           </p:nvPr>
         </p:nvSpPr>
         <p:spPr>
@@ -1139,7 +1177,9 @@
               <a:defRPr/>
             </a:lvl1pPr>
           </a:lstStyle>
-          <a:p/>
+          <a:p>
+            <a:endParaRPr/>
+          </a:p>
         </p:txBody>
       </p:sp>
       <p:sp>
@@ -1149,7 +1189,7 @@
             <a:spLocks noGrp="1"/>
           </p:cNvSpPr>
           <p:nvPr>
-            <p:ph idx="3" sz="half"/>
+            <p:ph sz="half" idx="3"/>
           </p:nvPr>
         </p:nvSpPr>
         <p:spPr>
@@ -1170,7 +1210,9 @@
               <a:defRPr/>
             </a:lvl1pPr>
           </a:lstStyle>
-          <a:p/>
+          <a:p>
+            <a:endParaRPr/>
+          </a:p>
         </p:txBody>
       </p:sp>
       <p:sp>
@@ -1180,7 +1222,7 @@
             <a:spLocks noGrp="1"/>
           </p:cNvSpPr>
           <p:nvPr>
-            <p:ph type="ftr" idx="5" sz="quarter"/>
+            <p:ph type="ftr" sz="quarter" idx="5"/>
           </p:nvPr>
         </p:nvSpPr>
         <p:spPr/>
@@ -1197,7 +1239,9 @@
               </a:defRPr>
             </a:lvl1pPr>
           </a:lstStyle>
-          <a:p/>
+          <a:p>
+            <a:endParaRPr/>
+          </a:p>
         </p:txBody>
       </p:sp>
       <p:sp>
@@ -1207,7 +1251,7 @@
             <a:spLocks noGrp="1"/>
           </p:cNvSpPr>
           <p:nvPr>
-            <p:ph type="dt" idx="6" sz="half"/>
+            <p:ph type="dt" sz="half" idx="6"/>
           </p:nvPr>
         </p:nvSpPr>
         <p:spPr/>
@@ -1227,7 +1271,9 @@
           <a:p>
             <a:fld id="{1D8BD707-D9CF-40AE-B4C6-C98DA3205C09}" type="datetimeFigureOut">
               <a:rPr lang="en-US"/>
+              <a:t>7/9/2026</a:t>
             </a:fld>
+            <a:endParaRPr lang="en-US"/>
           </a:p>
         </p:txBody>
       </p:sp>
@@ -1238,7 +1284,7 @@
             <a:spLocks noGrp="1"/>
           </p:cNvSpPr>
           <p:nvPr>
-            <p:ph type="sldNum" idx="7" sz="quarter"/>
+            <p:ph type="sldNum" sz="quarter" idx="7"/>
           </p:nvPr>
         </p:nvSpPr>
         <p:spPr/>
@@ -1257,8 +1303,9 @@
           </a:lstStyle>
           <a:p>
             <a:fld id="{B6F15528-21DE-4FAA-801E-634DDDAF4B2B}" type="slidenum">
-              <a:t>#</a:t>
+              <a:t>‹#›</a:t>
             </a:fld>
+            <a:endParaRPr/>
           </a:p>
         </p:txBody>
       </p:sp>
@@ -1271,7 +1318,7 @@
 </file>
 
 <file path=ppt/slideLayouts/slideLayout4.xml><?xml version="1.0" encoding="utf-8"?>
-<p:sldLayout xmlns:a="http://schemas.openxmlformats.org/drawingml/2006/main" xmlns:r="http://schemas.openxmlformats.org/officeDocument/2006/relationships" xmlns:p="http://schemas.openxmlformats.org/presentationml/2006/main" preserve="1" type="obj" showMasterSp="0">
+<p:sldLayout xmlns:a="http://schemas.openxmlformats.org/drawingml/2006/main" xmlns:r="http://schemas.openxmlformats.org/officeDocument/2006/relationships" xmlns:p="http://schemas.openxmlformats.org/presentationml/2006/main" showMasterSp="0" type="obj" preserve="1">
   <p:cSld name="Title Only">
     <p:bg>
       <p:bgPr>
@@ -1429,7 +1476,9 @@
               </a:defRPr>
             </a:lvl1pPr>
           </a:lstStyle>
-          <a:p/>
+          <a:p>
+            <a:endParaRPr/>
+          </a:p>
         </p:txBody>
       </p:sp>
       <p:sp>
@@ -1439,7 +1488,7 @@
             <a:spLocks noGrp="1"/>
           </p:cNvSpPr>
           <p:nvPr>
-            <p:ph type="ftr" idx="5" sz="quarter"/>
+            <p:ph type="ftr" sz="quarter" idx="5"/>
           </p:nvPr>
         </p:nvSpPr>
         <p:spPr/>
@@ -1456,7 +1505,9 @@
               </a:defRPr>
             </a:lvl1pPr>
           </a:lstStyle>
-          <a:p/>
+          <a:p>
+            <a:endParaRPr/>
+          </a:p>
         </p:txBody>
       </p:sp>
       <p:sp>
@@ -1466,7 +1517,7 @@
             <a:spLocks noGrp="1"/>
           </p:cNvSpPr>
           <p:nvPr>
-            <p:ph type="dt" idx="6" sz="half"/>
+            <p:ph type="dt" sz="half" idx="6"/>
           </p:nvPr>
         </p:nvSpPr>
         <p:spPr/>
@@ -1486,7 +1537,9 @@
           <a:p>
             <a:fld id="{1D8BD707-D9CF-40AE-B4C6-C98DA3205C09}" type="datetimeFigureOut">
               <a:rPr lang="en-US"/>
+              <a:t>7/9/2026</a:t>
             </a:fld>
+            <a:endParaRPr lang="en-US"/>
           </a:p>
         </p:txBody>
       </p:sp>
@@ -1497,7 +1550,7 @@
             <a:spLocks noGrp="1"/>
           </p:cNvSpPr>
           <p:nvPr>
-            <p:ph type="sldNum" idx="7" sz="quarter"/>
+            <p:ph type="sldNum" sz="quarter" idx="7"/>
           </p:nvPr>
         </p:nvSpPr>
         <p:spPr/>
@@ -1516,8 +1569,9 @@
           </a:lstStyle>
           <a:p>
             <a:fld id="{B6F15528-21DE-4FAA-801E-634DDDAF4B2B}" type="slidenum">
-              <a:t>#</a:t>
+              <a:t>‹#›</a:t>
             </a:fld>
+            <a:endParaRPr/>
           </a:p>
         </p:txBody>
       </p:sp>
@@ -1530,7 +1584,7 @@
 </file>
 
 <file path=ppt/slideLayouts/slideLayout5.xml><?xml version="1.0" encoding="utf-8"?>
-<p:sldLayout xmlns:a="http://schemas.openxmlformats.org/drawingml/2006/main" xmlns:r="http://schemas.openxmlformats.org/officeDocument/2006/relationships" xmlns:p="http://schemas.openxmlformats.org/presentationml/2006/main" preserve="1" type="obj">
+<p:sldLayout xmlns:a="http://schemas.openxmlformats.org/drawingml/2006/main" xmlns:r="http://schemas.openxmlformats.org/officeDocument/2006/relationships" xmlns:p="http://schemas.openxmlformats.org/presentationml/2006/main" type="obj" preserve="1">
   <p:cSld name="Blank">
     <p:spTree>
       <p:nvGrpSpPr>
@@ -1553,7 +1607,7 @@
             <a:spLocks noGrp="1"/>
           </p:cNvSpPr>
           <p:nvPr>
-            <p:ph type="ftr" idx="5" sz="quarter"/>
+            <p:ph type="ftr" sz="quarter" idx="5"/>
           </p:nvPr>
         </p:nvSpPr>
         <p:spPr/>
@@ -1570,7 +1624,9 @@
               </a:defRPr>
             </a:lvl1pPr>
           </a:lstStyle>
-          <a:p/>
+          <a:p>
+            <a:endParaRPr/>
+          </a:p>
         </p:txBody>
       </p:sp>
       <p:sp>
@@ -1580,7 +1636,7 @@
             <a:spLocks noGrp="1"/>
           </p:cNvSpPr>
           <p:nvPr>
-            <p:ph type="dt" idx="6" sz="half"/>
+            <p:ph type="dt" sz="half" idx="6"/>
           </p:nvPr>
         </p:nvSpPr>
         <p:spPr/>
@@ -1600,7 +1656,9 @@
           <a:p>
             <a:fld id="{1D8BD707-D9CF-40AE-B4C6-C98DA3205C09}" type="datetimeFigureOut">
               <a:rPr lang="en-US"/>
+              <a:t>7/9/2026</a:t>
             </a:fld>
+            <a:endParaRPr lang="en-US"/>
           </a:p>
         </p:txBody>
       </p:sp>
@@ -1611,7 +1669,7 @@
             <a:spLocks noGrp="1"/>
           </p:cNvSpPr>
           <p:nvPr>
-            <p:ph type="sldNum" idx="7" sz="quarter"/>
+            <p:ph type="sldNum" sz="quarter" idx="7"/>
           </p:nvPr>
         </p:nvSpPr>
         <p:spPr/>
@@ -1630,8 +1688,9 @@
           </a:lstStyle>
           <a:p>
             <a:fld id="{B6F15528-21DE-4FAA-801E-634DDDAF4B2B}" type="slidenum">
-              <a:t>#</a:t>
+              <a:t>‹#›</a:t>
             </a:fld>
+            <a:endParaRPr/>
           </a:p>
         </p:txBody>
       </p:sp>
@@ -1702,7 +1761,9 @@
               </a:defRPr>
             </a:lvl1pPr>
           </a:lstStyle>
-          <a:p/>
+          <a:p>
+            <a:endParaRPr/>
+          </a:p>
         </p:txBody>
       </p:sp>
       <p:sp>
@@ -1739,7 +1800,9 @@
               </a:defRPr>
             </a:lvl1pPr>
           </a:lstStyle>
-          <a:p/>
+          <a:p>
+            <a:endParaRPr/>
+          </a:p>
         </p:txBody>
       </p:sp>
       <p:sp>
@@ -1749,7 +1812,7 @@
             <a:spLocks noGrp="1"/>
           </p:cNvSpPr>
           <p:nvPr>
-            <p:ph type="ftr" idx="5" sz="quarter"/>
+            <p:ph type="ftr" sz="quarter" idx="5"/>
           </p:nvPr>
         </p:nvSpPr>
         <p:spPr>
@@ -1776,7 +1839,9 @@
               </a:defRPr>
             </a:lvl1pPr>
           </a:lstStyle>
-          <a:p/>
+          <a:p>
+            <a:endParaRPr/>
+          </a:p>
         </p:txBody>
       </p:sp>
       <p:sp>
@@ -1786,7 +1851,7 @@
             <a:spLocks noGrp="1"/>
           </p:cNvSpPr>
           <p:nvPr>
-            <p:ph type="dt" idx="6" sz="half"/>
+            <p:ph type="dt" sz="half" idx="6"/>
           </p:nvPr>
         </p:nvSpPr>
         <p:spPr>
@@ -1816,7 +1881,9 @@
           <a:p>
             <a:fld id="{1D8BD707-D9CF-40AE-B4C6-C98DA3205C09}" type="datetimeFigureOut">
               <a:rPr lang="en-US"/>
+              <a:t>7/9/2026</a:t>
             </a:fld>
+            <a:endParaRPr lang="en-US"/>
           </a:p>
         </p:txBody>
       </p:sp>
@@ -1827,7 +1894,7 @@
             <a:spLocks noGrp="1"/>
           </p:cNvSpPr>
           <p:nvPr>
-            <p:ph type="sldNum" idx="7" sz="quarter"/>
+            <p:ph type="sldNum" sz="quarter" idx="7"/>
           </p:nvPr>
         </p:nvSpPr>
         <p:spPr>
@@ -1856,14 +1923,15 @@
           </a:lstStyle>
           <a:p>
             <a:fld id="{B6F15528-21DE-4FAA-801E-634DDDAF4B2B}" type="slidenum">
-              <a:t>#</a:t>
+              <a:t>‹#›</a:t>
             </a:fld>
+            <a:endParaRPr/>
           </a:p>
         </p:txBody>
       </p:sp>
     </p:spTree>
   </p:cSld>
-  <p:clrMap folHlink="folHlink" hlink="hlink" accent1="accent1" accent2="accent2" accent3="accent3" accent4="accent4" accent5="accent5" accent6="accent6" tx2="dk2" bg2="lt2" tx1="dk1" bg1="lt1"/>
+  <p:clrMap bg1="lt1" tx1="dk1" bg2="lt2" tx2="dk2" accent1="accent1" accent2="accent2" accent3="accent3" accent4="accent4" accent5="accent5" accent6="accent6" hlink="hlink" folHlink="folHlink"/>
   <p:sldLayoutIdLst>
     <p:sldLayoutId id="2147483661" r:id="rId1"/>
     <p:sldLayoutId id="2147483662" r:id="rId2"/>
@@ -2039,7 +2107,7 @@
           <p:nvPr/>
         </p:nvPicPr>
         <p:blipFill>
-          <a:blip r:embed="rId3" cstate="print"/>
+          <a:blip r:embed="rId2" cstate="print"/>
           <a:stretch>
             <a:fillRect/>
           </a:stretch>
@@ -2065,10 +2133,12 @@
           </p:nvPr>
         </p:nvSpPr>
         <p:spPr>
-          <a:prstGeom prst="rect"/>
+          <a:prstGeom prst="rect">
+            <a:avLst/>
+          </a:prstGeom>
         </p:spPr>
         <p:txBody>
-          <a:bodyPr wrap="square" lIns="0" tIns="12700" rIns="0" bIns="0" rtlCol="0" vert="horz">
+          <a:bodyPr vert="horz" wrap="square" lIns="0" tIns="12700" rIns="0" bIns="0" rtlCol="0">
             <a:spAutoFit/>
           </a:bodyPr>
           <a:lstStyle/>
@@ -2082,47 +2152,47 @@
               </a:spcBef>
             </a:pPr>
             <a:r>
-              <a:rPr dirty="0" spc="-305"/>
+              <a:rPr spc="-305" dirty="0"/>
               <a:t>Healthcare</a:t>
             </a:r>
             <a:r>
-              <a:rPr dirty="0" spc="-409"/>
+              <a:rPr spc="-409" dirty="0"/>
               <a:t> </a:t>
             </a:r>
             <a:r>
-              <a:rPr dirty="0" spc="-295"/>
+              <a:rPr spc="-295" dirty="0"/>
               <a:t>RAG-</a:t>
             </a:r>
             <a:r>
-              <a:rPr dirty="0" spc="-355"/>
+              <a:rPr spc="-355" dirty="0"/>
               <a:t>Powered</a:t>
             </a:r>
             <a:r>
-              <a:rPr dirty="0" spc="-409"/>
+              <a:rPr spc="-409" dirty="0"/>
               <a:t> </a:t>
             </a:r>
             <a:r>
-              <a:rPr dirty="0" spc="-290"/>
+              <a:rPr spc="-290" dirty="0"/>
               <a:t>Medical </a:t>
             </a:r>
             <a:r>
-              <a:rPr dirty="0" spc="-265"/>
+              <a:rPr spc="-265" dirty="0"/>
               <a:t>Question</a:t>
             </a:r>
             <a:r>
-              <a:rPr dirty="0" spc="-425"/>
+              <a:rPr spc="-425" dirty="0"/>
               <a:t> </a:t>
             </a:r>
             <a:r>
-              <a:rPr dirty="0" spc="-360"/>
+              <a:rPr spc="-360" dirty="0"/>
               <a:t>Answering</a:t>
             </a:r>
             <a:r>
-              <a:rPr dirty="0" spc="-425"/>
+              <a:rPr spc="-425" dirty="0"/>
               <a:t> </a:t>
             </a:r>
             <a:r>
-              <a:rPr dirty="0" spc="-350"/>
+              <a:rPr spc="-350" dirty="0"/>
               <a:t>Assistant</a:t>
             </a:r>
           </a:p>
@@ -2135,7 +2205,7 @@
           <p:nvPr/>
         </p:nvPicPr>
         <p:blipFill>
-          <a:blip r:embed="rId2" cstate="print"/>
+          <a:blip r:embed="rId3" cstate="print"/>
           <a:stretch>
             <a:fillRect/>
           </a:stretch>
@@ -2276,12 +2346,12 @@
           </a:prstGeom>
         </p:spPr>
         <p:txBody>
-          <a:bodyPr wrap="square" lIns="0" tIns="262255" rIns="0" bIns="0" rtlCol="0" vert="horz">
+          <a:bodyPr vert="horz" wrap="square" lIns="0" tIns="262255" rIns="0" bIns="0" rtlCol="0">
             <a:spAutoFit/>
           </a:bodyPr>
           <a:lstStyle/>
           <a:p>
-            <a:pPr algn="ctr" marR="3153410">
+            <a:pPr marR="3153410" algn="ctr">
               <a:lnSpc>
                 <a:spcPct val="100000"/>
               </a:lnSpc>
@@ -2290,105 +2360,105 @@
               </a:spcBef>
             </a:pPr>
             <a:r>
-              <a:rPr dirty="0" sz="2800" spc="-65">
+              <a:rPr sz="2800" spc="-65" dirty="0">
                 <a:latin typeface="Tahoma"/>
                 <a:cs typeface="Tahoma"/>
               </a:rPr>
               <a:t>Retrieval-</a:t>
             </a:r>
             <a:r>
-              <a:rPr dirty="0" sz="2800" spc="-125">
+              <a:rPr sz="2800" spc="-125" dirty="0">
                 <a:latin typeface="Tahoma"/>
                 <a:cs typeface="Tahoma"/>
               </a:rPr>
               <a:t>Augmented</a:t>
             </a:r>
             <a:r>
-              <a:rPr dirty="0" sz="2800" spc="-380">
+              <a:rPr sz="2800" spc="-380" dirty="0">
                 <a:latin typeface="Tahoma"/>
                 <a:cs typeface="Tahoma"/>
               </a:rPr>
               <a:t> </a:t>
             </a:r>
             <a:r>
-              <a:rPr dirty="0" sz="2800" spc="-100">
+              <a:rPr sz="2800" spc="-100" dirty="0">
                 <a:latin typeface="Tahoma"/>
                 <a:cs typeface="Tahoma"/>
               </a:rPr>
               <a:t>Generation</a:t>
             </a:r>
             <a:r>
-              <a:rPr dirty="0" sz="2800" spc="-380">
+              <a:rPr sz="2800" spc="-380" dirty="0">
                 <a:latin typeface="Tahoma"/>
                 <a:cs typeface="Tahoma"/>
               </a:rPr>
               <a:t> </a:t>
             </a:r>
             <a:r>
-              <a:rPr dirty="0" sz="2800" spc="-85">
+              <a:rPr sz="2800" spc="-85" dirty="0">
                 <a:latin typeface="Tahoma"/>
                 <a:cs typeface="Tahoma"/>
               </a:rPr>
               <a:t>for</a:t>
             </a:r>
             <a:r>
-              <a:rPr dirty="0" sz="2800" spc="-380">
+              <a:rPr sz="2800" spc="-380" dirty="0">
                 <a:latin typeface="Tahoma"/>
                 <a:cs typeface="Tahoma"/>
               </a:rPr>
               <a:t> </a:t>
             </a:r>
             <a:r>
-              <a:rPr dirty="0" sz="2800" spc="-114">
+              <a:rPr sz="2800" spc="-114" dirty="0">
                 <a:latin typeface="Tahoma"/>
                 <a:cs typeface="Tahoma"/>
               </a:rPr>
               <a:t>Evidence-</a:t>
             </a:r>
             <a:r>
-              <a:rPr dirty="0" sz="2800" spc="-175">
+              <a:rPr sz="2800" spc="-175" dirty="0">
                 <a:latin typeface="Tahoma"/>
                 <a:cs typeface="Tahoma"/>
               </a:rPr>
               <a:t>Based</a:t>
             </a:r>
             <a:r>
-              <a:rPr dirty="0" sz="2800" spc="-380">
+              <a:rPr sz="2800" spc="-380" dirty="0">
                 <a:latin typeface="Tahoma"/>
                 <a:cs typeface="Tahoma"/>
               </a:rPr>
               <a:t> </a:t>
             </a:r>
             <a:r>
-              <a:rPr dirty="0" sz="2800" spc="-50">
+              <a:rPr sz="2800" spc="-50" dirty="0">
                 <a:latin typeface="Tahoma"/>
                 <a:cs typeface="Tahoma"/>
               </a:rPr>
               <a:t>Medical</a:t>
             </a:r>
             <a:r>
-              <a:rPr dirty="0" sz="2800" spc="-375">
+              <a:rPr sz="2800" spc="-375" dirty="0">
                 <a:latin typeface="Tahoma"/>
                 <a:cs typeface="Tahoma"/>
               </a:rPr>
               <a:t> </a:t>
             </a:r>
             <a:r>
-              <a:rPr dirty="0" sz="2800" spc="-120">
+              <a:rPr sz="2800" spc="-120" dirty="0">
                 <a:latin typeface="Tahoma"/>
                 <a:cs typeface="Tahoma"/>
               </a:rPr>
               <a:t>Question</a:t>
             </a:r>
             <a:r>
-              <a:rPr dirty="0" sz="2800" spc="-380">
+              <a:rPr sz="2800" spc="-380" dirty="0">
                 <a:latin typeface="Tahoma"/>
                 <a:cs typeface="Tahoma"/>
               </a:rPr>
               <a:t> </a:t>
             </a:r>
             <a:r>
-              <a:rPr dirty="0" sz="2800" spc="-10">
+              <a:rPr sz="2800" spc="-10" dirty="0">
                 <a:latin typeface="Tahoma"/>
                 <a:cs typeface="Tahoma"/>
               </a:rPr>
@@ -2400,7 +2470,7 @@
             </a:endParaRPr>
           </a:p>
           <a:p>
-            <a:pPr algn="ctr" marR="3082925">
+            <a:pPr marR="3082925" algn="ctr">
               <a:lnSpc>
                 <a:spcPct val="100000"/>
               </a:lnSpc>
@@ -2409,7 +2479,7 @@
               </a:spcBef>
             </a:pPr>
             <a:r>
-              <a:rPr dirty="0" sz="4450" spc="-305">
+              <a:rPr sz="4450" spc="-305" dirty="0">
                 <a:solidFill>
                   <a:srgbClr val="003CF4"/>
                 </a:solidFill>
@@ -2419,7 +2489,7 @@
               <a:t>Presented</a:t>
             </a:r>
             <a:r>
-              <a:rPr dirty="0" sz="4450" spc="-405">
+              <a:rPr sz="4450" spc="-405" dirty="0">
                 <a:solidFill>
                   <a:srgbClr val="003CF4"/>
                 </a:solidFill>
@@ -2429,7 +2499,7 @@
               <a:t> </a:t>
             </a:r>
             <a:r>
-              <a:rPr dirty="0" sz="4450" spc="-35">
+              <a:rPr sz="4450" spc="-35" dirty="0">
                 <a:solidFill>
                   <a:srgbClr val="003CF4"/>
                 </a:solidFill>
@@ -2453,63 +2523,63 @@
               </a:spcBef>
             </a:pPr>
             <a:r>
-              <a:rPr dirty="0" sz="3500" spc="-175">
+              <a:rPr sz="3500" spc="-175" dirty="0">
                 <a:latin typeface="Arial Black"/>
                 <a:cs typeface="Arial Black"/>
               </a:rPr>
               <a:t>Abd</a:t>
             </a:r>
             <a:r>
-              <a:rPr dirty="0" sz="3500" spc="-330">
+              <a:rPr sz="3500" spc="-330" dirty="0">
                 <a:latin typeface="Arial Black"/>
                 <a:cs typeface="Arial Black"/>
               </a:rPr>
               <a:t> </a:t>
             </a:r>
             <a:r>
-              <a:rPr dirty="0" sz="3500" spc="-130">
+              <a:rPr sz="3500" spc="-130" dirty="0">
                 <a:latin typeface="Arial Black"/>
                 <a:cs typeface="Arial Black"/>
               </a:rPr>
               <a:t>El-</a:t>
             </a:r>
             <a:r>
-              <a:rPr dirty="0" sz="3500" spc="-285">
+              <a:rPr sz="3500" spc="-285" dirty="0">
                 <a:latin typeface="Arial Black"/>
                 <a:cs typeface="Arial Black"/>
               </a:rPr>
               <a:t>Rahman</a:t>
             </a:r>
             <a:r>
-              <a:rPr dirty="0" sz="3500" spc="-315">
+              <a:rPr sz="3500" spc="-315" dirty="0">
                 <a:latin typeface="Arial Black"/>
                 <a:cs typeface="Arial Black"/>
               </a:rPr>
               <a:t> </a:t>
             </a:r>
             <a:r>
-              <a:rPr dirty="0" sz="3500" spc="-180">
+              <a:rPr sz="3500" spc="-180" dirty="0">
                 <a:latin typeface="Arial Black"/>
                 <a:cs typeface="Arial Black"/>
               </a:rPr>
               <a:t>Moustafa </a:t>
             </a:r>
             <a:r>
-              <a:rPr dirty="0" sz="3500" spc="-320">
+              <a:rPr sz="3500" spc="-320" dirty="0">
                 <a:latin typeface="Arial Black"/>
                 <a:cs typeface="Arial Black"/>
               </a:rPr>
               <a:t>Youssef</a:t>
             </a:r>
             <a:r>
-              <a:rPr dirty="0" sz="3500" spc="-325">
+              <a:rPr sz="3500" spc="-325" dirty="0">
                 <a:latin typeface="Arial Black"/>
                 <a:cs typeface="Arial Black"/>
               </a:rPr>
               <a:t> </a:t>
             </a:r>
             <a:r>
-              <a:rPr dirty="0" sz="3500" spc="-290">
+              <a:rPr sz="3500" spc="-290" dirty="0">
                 <a:latin typeface="Arial Black"/>
                 <a:cs typeface="Arial Black"/>
               </a:rPr>
@@ -2530,77 +2600,77 @@
               </a:spcBef>
             </a:pPr>
             <a:r>
-              <a:rPr dirty="0" sz="3500" spc="-200">
+              <a:rPr sz="3500" spc="-200" dirty="0">
                 <a:latin typeface="Arial Black"/>
                 <a:cs typeface="Arial Black"/>
               </a:rPr>
               <a:t>Doha</a:t>
             </a:r>
             <a:r>
-              <a:rPr dirty="0" sz="3500" spc="-320">
+              <a:rPr sz="3500" spc="-320" dirty="0">
                 <a:latin typeface="Arial Black"/>
                 <a:cs typeface="Arial Black"/>
               </a:rPr>
               <a:t> </a:t>
             </a:r>
             <a:r>
-              <a:rPr dirty="0" sz="3500" spc="-285">
+              <a:rPr sz="3500" spc="-285" dirty="0">
                 <a:latin typeface="Arial Black"/>
                 <a:cs typeface="Arial Black"/>
               </a:rPr>
               <a:t>Khaled </a:t>
             </a:r>
             <a:r>
-              <a:rPr dirty="0" sz="3500" spc="-295">
+              <a:rPr sz="3500" spc="-295" dirty="0">
                 <a:latin typeface="Arial Black"/>
                 <a:cs typeface="Arial Black"/>
               </a:rPr>
               <a:t>Eman</a:t>
             </a:r>
             <a:r>
-              <a:rPr dirty="0" sz="3500" spc="-320">
+              <a:rPr sz="3500" spc="-320" dirty="0">
                 <a:latin typeface="Arial Black"/>
                 <a:cs typeface="Arial Black"/>
               </a:rPr>
               <a:t> </a:t>
             </a:r>
             <a:r>
-              <a:rPr dirty="0" sz="3500" spc="-130">
+              <a:rPr sz="3500" spc="-130" dirty="0">
                 <a:latin typeface="Arial Black"/>
                 <a:cs typeface="Arial Black"/>
               </a:rPr>
               <a:t>El-</a:t>
             </a:r>
             <a:r>
-              <a:rPr dirty="0" sz="3500" spc="-375">
+              <a:rPr sz="3500" spc="-375" dirty="0">
                 <a:latin typeface="Arial Black"/>
                 <a:cs typeface="Arial Black"/>
               </a:rPr>
               <a:t>Kalawy </a:t>
             </a:r>
             <a:r>
-              <a:rPr dirty="0" sz="3500" spc="-285">
+              <a:rPr sz="3500" spc="-285" dirty="0">
                 <a:latin typeface="Arial Black"/>
                 <a:cs typeface="Arial Black"/>
               </a:rPr>
               <a:t>Ziad</a:t>
             </a:r>
             <a:r>
-              <a:rPr dirty="0" sz="3500" spc="-320">
+              <a:rPr sz="3500" spc="-320" dirty="0">
                 <a:latin typeface="Arial Black"/>
                 <a:cs typeface="Arial Black"/>
               </a:rPr>
               <a:t> </a:t>
             </a:r>
             <a:r>
-              <a:rPr dirty="0" sz="3500" spc="-130">
+              <a:rPr sz="3500" spc="-130" dirty="0">
                 <a:latin typeface="Arial Black"/>
                 <a:cs typeface="Arial Black"/>
               </a:rPr>
               <a:t>El-</a:t>
             </a:r>
             <a:r>
-              <a:rPr dirty="0" sz="3500" spc="-20">
+              <a:rPr sz="3500" spc="-20" dirty="0">
                 <a:latin typeface="Arial Black"/>
                 <a:cs typeface="Arial Black"/>
               </a:rPr>
@@ -2612,7 +2682,7 @@
             </a:endParaRPr>
           </a:p>
           <a:p>
-            <a:pPr algn="ctr" marR="3082925">
+            <a:pPr marR="3082925" algn="ctr">
               <a:lnSpc>
                 <a:spcPct val="100000"/>
               </a:lnSpc>
@@ -2621,7 +2691,7 @@
               </a:spcBef>
             </a:pPr>
             <a:r>
-              <a:rPr dirty="0" sz="4450" spc="-265">
+              <a:rPr sz="4450" spc="-265" dirty="0">
                 <a:solidFill>
                   <a:srgbClr val="003CF4"/>
                 </a:solidFill>
@@ -2645,42 +2715,42 @@
               </a:spcBef>
             </a:pPr>
             <a:r>
-              <a:rPr dirty="0" sz="3500" spc="-160">
+              <a:rPr sz="3500" spc="-160" dirty="0">
                 <a:latin typeface="Arial Black"/>
                 <a:cs typeface="Arial Black"/>
               </a:rPr>
               <a:t>ENG/Abd</a:t>
             </a:r>
             <a:r>
-              <a:rPr dirty="0" sz="3500" spc="-315">
+              <a:rPr sz="3500" spc="-315" dirty="0">
                 <a:latin typeface="Arial Black"/>
                 <a:cs typeface="Arial Black"/>
               </a:rPr>
               <a:t> </a:t>
             </a:r>
             <a:r>
-              <a:rPr dirty="0" sz="3500" spc="-130">
+              <a:rPr sz="3500" spc="-130" dirty="0">
                 <a:latin typeface="Arial Black"/>
                 <a:cs typeface="Arial Black"/>
               </a:rPr>
               <a:t>El-</a:t>
             </a:r>
             <a:r>
-              <a:rPr dirty="0" sz="3500" spc="-285">
+              <a:rPr sz="3500" spc="-285" dirty="0">
                 <a:latin typeface="Arial Black"/>
                 <a:cs typeface="Arial Black"/>
               </a:rPr>
               <a:t>Rahman</a:t>
             </a:r>
             <a:r>
-              <a:rPr dirty="0" sz="3500" spc="-310">
+              <a:rPr sz="3500" spc="-310" dirty="0">
                 <a:latin typeface="Arial Black"/>
                 <a:cs typeface="Arial Black"/>
               </a:rPr>
               <a:t> </a:t>
             </a:r>
             <a:r>
-              <a:rPr dirty="0" sz="3500" spc="-425">
+              <a:rPr sz="3500" spc="-425" dirty="0">
                 <a:latin typeface="Arial Black"/>
                 <a:cs typeface="Arial Black"/>
               </a:rPr>
@@ -2706,27 +2776,27 @@
             </a:endParaRPr>
           </a:p>
           <a:p>
-            <a:pPr algn="r" marR="5080">
+            <a:pPr marR="5080" algn="r">
               <a:lnSpc>
                 <a:spcPct val="100000"/>
               </a:lnSpc>
             </a:pPr>
             <a:r>
-              <a:rPr dirty="0" sz="2800" spc="-10">
+              <a:rPr sz="2800" spc="-10" dirty="0">
                 <a:latin typeface="Tahoma"/>
                 <a:cs typeface="Tahoma"/>
               </a:rPr>
               <a:t>July</a:t>
             </a:r>
             <a:r>
-              <a:rPr dirty="0" sz="2800" spc="-445">
+              <a:rPr sz="2800" spc="-445" dirty="0">
                 <a:latin typeface="Tahoma"/>
                 <a:cs typeface="Tahoma"/>
               </a:rPr>
               <a:t> </a:t>
             </a:r>
             <a:r>
-              <a:rPr dirty="0" sz="2800" spc="-20">
+              <a:rPr sz="2800" spc="-20" dirty="0">
                 <a:latin typeface="Tahoma"/>
                 <a:cs typeface="Tahoma"/>
               </a:rPr>
@@ -2770,11 +2840,17 @@
           <p:cNvGraphicFramePr>
             <a:graphicFrameLocks noGrp="1"/>
           </p:cNvGraphicFramePr>
-          <p:nvPr/>
+          <p:nvPr>
+            <p:extLst>
+              <p:ext uri="{D42A27DB-BD31-4B8C-83A1-F6EECF244321}">
+                <p14:modId xmlns:p14="http://schemas.microsoft.com/office/powerpoint/2010/main" val="4096364628"/>
+              </p:ext>
+            </p:extLst>
+          </p:nvPr>
         </p:nvGraphicFramePr>
         <p:xfrm>
           <a:off x="2130869" y="3180761"/>
-          <a:ext cx="14102715" cy="3573779"/>
+          <a:ext cx="14016990" cy="3423871"/>
         </p:xfrm>
         <a:graphic>
           <a:graphicData uri="http://schemas.openxmlformats.org/drawingml/2006/table">
@@ -2783,62 +2859,72 @@
                 <a:tableStyleId>{2D5ABB26-0587-4C30-8999-92F81FD0307C}</a:tableStyleId>
               </a:tblPr>
               <a:tblGrid>
-                <a:gridCol w="7008495"/>
-                <a:gridCol w="7008495"/>
+                <a:gridCol w="7008495">
+                  <a:extLst>
+                    <a:ext uri="{9D8B030D-6E8A-4147-A177-3AD203B41FA5}">
+                      <a16:colId xmlns:a16="http://schemas.microsoft.com/office/drawing/2014/main" val="20000"/>
+                    </a:ext>
+                  </a:extLst>
+                </a:gridCol>
+                <a:gridCol w="7008495">
+                  <a:extLst>
+                    <a:ext uri="{9D8B030D-6E8A-4147-A177-3AD203B41FA5}">
+                      <a16:colId xmlns:a16="http://schemas.microsoft.com/office/drawing/2014/main" val="20001"/>
+                    </a:ext>
+                  </a:extLst>
+                </a:gridCol>
               </a:tblGrid>
-              <a:tr h="893444">
+              <a:tr h="743539">
                 <a:tc>
                   <a:txBody>
                     <a:bodyPr/>
                     <a:lstStyle/>
                     <a:p>
-                      <a:pPr>
-                        <a:lnSpc>
-                          <a:spcPct val="100000"/>
-                        </a:lnSpc>
-                        <a:spcBef>
-                          <a:spcPts val="825"/>
-                        </a:spcBef>
-                      </a:pPr>
-                      <a:endParaRPr sz="1500">
-                        <a:latin typeface="Times New Roman"/>
-                        <a:cs typeface="Times New Roman"/>
-                      </a:endParaRPr>
-                    </a:p>
-                    <a:p>
-                      <a:pPr marL="75565">
+                      <a:pPr marL="75565" algn="ctr">
                         <a:lnSpc>
                           <a:spcPct val="100000"/>
                         </a:lnSpc>
                       </a:pPr>
                       <a:r>
-                        <a:rPr dirty="0" sz="1500" spc="-20">
-                          <a:latin typeface="Verdana"/>
-                          <a:cs typeface="Verdana"/>
+                        <a:rPr sz="2800" b="1" spc="-20" dirty="0">
+                          <a:solidFill>
+                            <a:schemeClr val="bg1"/>
+                          </a:solidFill>
+                          <a:latin typeface="Arial" panose="020B0604020202020204" pitchFamily="34" charset="0"/>
+                          <a:cs typeface="Arial" panose="020B0604020202020204" pitchFamily="34" charset="0"/>
                         </a:rPr>
                         <a:t>Traditional</a:t>
                       </a:r>
                       <a:r>
-                        <a:rPr dirty="0" sz="1500" spc="-100">
-                          <a:latin typeface="Verdana"/>
-                          <a:cs typeface="Verdana"/>
+                        <a:rPr sz="2800" b="1" spc="-100" dirty="0">
+                          <a:solidFill>
+                            <a:schemeClr val="bg1"/>
+                          </a:solidFill>
+                          <a:latin typeface="Arial" panose="020B0604020202020204" pitchFamily="34" charset="0"/>
+                          <a:cs typeface="Arial" panose="020B0604020202020204" pitchFamily="34" charset="0"/>
                         </a:rPr>
                         <a:t> </a:t>
                       </a:r>
                       <a:r>
-                        <a:rPr dirty="0" sz="1500" spc="-25">
-                          <a:latin typeface="Verdana"/>
-                          <a:cs typeface="Verdana"/>
+                        <a:rPr sz="2800" b="1" spc="-25" dirty="0">
+                          <a:solidFill>
+                            <a:schemeClr val="bg1"/>
+                          </a:solidFill>
+                          <a:latin typeface="Arial" panose="020B0604020202020204" pitchFamily="34" charset="0"/>
+                          <a:cs typeface="Arial" panose="020B0604020202020204" pitchFamily="34" charset="0"/>
                         </a:rPr>
                         <a:t>LLM</a:t>
                       </a:r>
-                      <a:endParaRPr sz="1500">
-                        <a:latin typeface="Verdana"/>
-                        <a:cs typeface="Verdana"/>
+                      <a:endParaRPr sz="2800" b="1" dirty="0">
+                        <a:solidFill>
+                          <a:schemeClr val="bg1"/>
+                        </a:solidFill>
+                        <a:latin typeface="Arial" panose="020B0604020202020204" pitchFamily="34" charset="0"/>
+                        <a:cs typeface="Arial" panose="020B0604020202020204" pitchFamily="34" charset="0"/>
                       </a:endParaRPr>
                     </a:p>
                   </a:txBody>
-                  <a:tcPr marL="0" marR="0" marB="0" marT="104775">
+                  <a:tcPr marL="0" marR="0" marT="104775" marB="0">
                     <a:lnL w="9525">
                       <a:solidFill>
                         <a:srgbClr val="D9D9D9"/>
@@ -2873,53 +2959,51 @@
                     <a:bodyPr/>
                     <a:lstStyle/>
                     <a:p>
-                      <a:pPr>
-                        <a:lnSpc>
-                          <a:spcPct val="100000"/>
-                        </a:lnSpc>
-                        <a:spcBef>
-                          <a:spcPts val="825"/>
-                        </a:spcBef>
-                      </a:pPr>
-                      <a:endParaRPr sz="1500">
-                        <a:latin typeface="Times New Roman"/>
-                        <a:cs typeface="Times New Roman"/>
-                      </a:endParaRPr>
-                    </a:p>
-                    <a:p>
-                      <a:pPr marL="76200">
+                      <a:pPr marL="76200" algn="ctr">
                         <a:lnSpc>
                           <a:spcPct val="100000"/>
                         </a:lnSpc>
                       </a:pPr>
                       <a:r>
-                        <a:rPr dirty="0" sz="1500" spc="-25">
-                          <a:latin typeface="Verdana"/>
-                          <a:cs typeface="Verdana"/>
+                        <a:rPr sz="2800" b="1" spc="-25" dirty="0">
+                          <a:solidFill>
+                            <a:schemeClr val="bg1"/>
+                          </a:solidFill>
+                          <a:latin typeface="Arial" panose="020B0604020202020204" pitchFamily="34" charset="0"/>
+                          <a:cs typeface="Arial" panose="020B0604020202020204" pitchFamily="34" charset="0"/>
                         </a:rPr>
                         <a:t>Our</a:t>
                       </a:r>
                       <a:r>
-                        <a:rPr dirty="0" sz="1500" spc="-145">
-                          <a:latin typeface="Verdana"/>
-                          <a:cs typeface="Verdana"/>
+                        <a:rPr sz="2800" b="1" spc="-145" dirty="0">
+                          <a:solidFill>
+                            <a:schemeClr val="bg1"/>
+                          </a:solidFill>
+                          <a:latin typeface="Arial" panose="020B0604020202020204" pitchFamily="34" charset="0"/>
+                          <a:cs typeface="Arial" panose="020B0604020202020204" pitchFamily="34" charset="0"/>
                         </a:rPr>
                         <a:t> </a:t>
                       </a:r>
                       <a:r>
-                        <a:rPr dirty="0" sz="1500" spc="-25">
-                          <a:latin typeface="Verdana"/>
-                          <a:cs typeface="Verdana"/>
+                        <a:rPr sz="2800" b="1" spc="-25" dirty="0">
+                          <a:solidFill>
+                            <a:schemeClr val="bg1"/>
+                          </a:solidFill>
+                          <a:latin typeface="Arial" panose="020B0604020202020204" pitchFamily="34" charset="0"/>
+                          <a:cs typeface="Arial" panose="020B0604020202020204" pitchFamily="34" charset="0"/>
                         </a:rPr>
                         <a:t>RAG</a:t>
                       </a:r>
-                      <a:endParaRPr sz="1500">
-                        <a:latin typeface="Verdana"/>
-                        <a:cs typeface="Verdana"/>
+                      <a:endParaRPr sz="2800" b="1" dirty="0">
+                        <a:solidFill>
+                          <a:schemeClr val="bg1"/>
+                        </a:solidFill>
+                        <a:latin typeface="Arial" panose="020B0604020202020204" pitchFamily="34" charset="0"/>
+                        <a:cs typeface="Arial" panose="020B0604020202020204" pitchFamily="34" charset="0"/>
                       </a:endParaRPr>
                     </a:p>
                   </a:txBody>
-                  <a:tcPr marL="0" marR="0" marB="0" marT="104775">
+                  <a:tcPr marL="0" marR="0" marT="104775" marB="0">
                     <a:lnL w="9525">
                       <a:solidFill>
                         <a:srgbClr val="D9D9D9"/>
@@ -2949,6 +3033,11 @@
                     </a:solidFill>
                   </a:tcPr>
                 </a:tc>
+                <a:extLst>
+                  <a:ext uri="{0D108BD9-81ED-4DB2-BD59-A6C34878D82A}">
+                    <a16:rowId xmlns:a16="http://schemas.microsoft.com/office/drawing/2014/main" val="10000"/>
+                  </a:ext>
+                </a:extLst>
               </a:tr>
               <a:tr h="893444">
                 <a:tc>
@@ -2956,53 +3045,51 @@
                     <a:bodyPr/>
                     <a:lstStyle/>
                     <a:p>
-                      <a:pPr>
+                      <a:pPr marL="75565" algn="ctr">
                         <a:lnSpc>
-                          <a:spcPct val="100000"/>
-                        </a:lnSpc>
-                        <a:spcBef>
-                          <a:spcPts val="825"/>
-                        </a:spcBef>
-                      </a:pPr>
-                      <a:endParaRPr sz="1500">
-                        <a:latin typeface="Times New Roman"/>
-                        <a:cs typeface="Times New Roman"/>
-                      </a:endParaRPr>
-                    </a:p>
-                    <a:p>
-                      <a:pPr marL="75565">
-                        <a:lnSpc>
-                          <a:spcPct val="100000"/>
+                          <a:spcPct val="200000"/>
                         </a:lnSpc>
                       </a:pPr>
                       <a:r>
-                        <a:rPr dirty="0" sz="1500" spc="-20">
-                          <a:latin typeface="Verdana"/>
-                          <a:cs typeface="Verdana"/>
+                        <a:rPr sz="2000" b="1" spc="-20" dirty="0">
+                          <a:solidFill>
+                            <a:schemeClr val="tx1"/>
+                          </a:solidFill>
+                          <a:latin typeface="Arial" panose="020B0604020202020204" pitchFamily="34" charset="0"/>
+                          <a:cs typeface="Arial" panose="020B0604020202020204" pitchFamily="34" charset="0"/>
                         </a:rPr>
                         <a:t>May</a:t>
                       </a:r>
                       <a:r>
-                        <a:rPr dirty="0" sz="1500" spc="-135">
-                          <a:latin typeface="Verdana"/>
-                          <a:cs typeface="Verdana"/>
+                        <a:rPr sz="2000" b="1" spc="-135" dirty="0">
+                          <a:solidFill>
+                            <a:schemeClr val="tx1"/>
+                          </a:solidFill>
+                          <a:latin typeface="Arial" panose="020B0604020202020204" pitchFamily="34" charset="0"/>
+                          <a:cs typeface="Arial" panose="020B0604020202020204" pitchFamily="34" charset="0"/>
                         </a:rPr>
                         <a:t> </a:t>
                       </a:r>
                       <a:r>
-                        <a:rPr dirty="0" sz="1500" spc="-10">
-                          <a:latin typeface="Verdana"/>
-                          <a:cs typeface="Verdana"/>
+                        <a:rPr sz="2000" b="1" spc="-10" dirty="0">
+                          <a:solidFill>
+                            <a:schemeClr val="tx1"/>
+                          </a:solidFill>
+                          <a:latin typeface="Arial" panose="020B0604020202020204" pitchFamily="34" charset="0"/>
+                          <a:cs typeface="Arial" panose="020B0604020202020204" pitchFamily="34" charset="0"/>
                         </a:rPr>
                         <a:t>Hallucinate</a:t>
                       </a:r>
-                      <a:endParaRPr sz="1500">
-                        <a:latin typeface="Verdana"/>
-                        <a:cs typeface="Verdana"/>
+                      <a:endParaRPr sz="2000" b="1" dirty="0">
+                        <a:solidFill>
+                          <a:schemeClr val="tx1"/>
+                        </a:solidFill>
+                        <a:latin typeface="Arial" panose="020B0604020202020204" pitchFamily="34" charset="0"/>
+                        <a:cs typeface="Arial" panose="020B0604020202020204" pitchFamily="34" charset="0"/>
                       </a:endParaRPr>
                     </a:p>
                   </a:txBody>
-                  <a:tcPr marL="0" marR="0" marB="0" marT="104775">
+                  <a:tcPr marL="0" marR="0" marT="104775" marB="0">
                     <a:lnL w="9525">
                       <a:solidFill>
                         <a:srgbClr val="D9D9D9"/>
@@ -3028,7 +3115,7 @@
                       <a:prstDash val="solid"/>
                     </a:lnB>
                     <a:solidFill>
-                      <a:srgbClr val="3762E3"/>
+                      <a:schemeClr val="bg1"/>
                     </a:solidFill>
                   </a:tcPr>
                 </a:tc>
@@ -3037,46 +3124,41 @@
                     <a:bodyPr/>
                     <a:lstStyle/>
                     <a:p>
-                      <a:pPr>
+                      <a:pPr marL="76200" algn="ctr">
                         <a:lnSpc>
-                          <a:spcPct val="100000"/>
-                        </a:lnSpc>
-                        <a:spcBef>
-                          <a:spcPts val="825"/>
-                        </a:spcBef>
-                      </a:pPr>
-                      <a:endParaRPr sz="1500">
-                        <a:latin typeface="Times New Roman"/>
-                        <a:cs typeface="Times New Roman"/>
-                      </a:endParaRPr>
-                    </a:p>
-                    <a:p>
-                      <a:pPr marL="76200">
-                        <a:lnSpc>
-                          <a:spcPct val="100000"/>
+                          <a:spcPct val="200000"/>
                         </a:lnSpc>
                       </a:pPr>
                       <a:r>
-                        <a:rPr dirty="0" sz="1500" spc="-30">
-                          <a:latin typeface="Verdana"/>
-                          <a:cs typeface="Verdana"/>
+                        <a:rPr sz="2000" b="1" spc="-30" dirty="0">
+                          <a:solidFill>
+                            <a:schemeClr val="tx1"/>
+                          </a:solidFill>
+                          <a:latin typeface="Arial" panose="020B0604020202020204" pitchFamily="34" charset="0"/>
+                          <a:cs typeface="Arial" panose="020B0604020202020204" pitchFamily="34" charset="0"/>
                         </a:rPr>
                         <a:t>Evidence-</a:t>
                       </a:r>
                       <a:r>
-                        <a:rPr dirty="0" sz="1500" spc="-10">
-                          <a:latin typeface="Verdana"/>
-                          <a:cs typeface="Verdana"/>
+                        <a:rPr sz="2000" b="1" spc="-10" dirty="0">
+                          <a:solidFill>
+                            <a:schemeClr val="tx1"/>
+                          </a:solidFill>
+                          <a:latin typeface="Arial" panose="020B0604020202020204" pitchFamily="34" charset="0"/>
+                          <a:cs typeface="Arial" panose="020B0604020202020204" pitchFamily="34" charset="0"/>
                         </a:rPr>
                         <a:t>Based</a:t>
                       </a:r>
-                      <a:endParaRPr sz="1500">
-                        <a:latin typeface="Verdana"/>
-                        <a:cs typeface="Verdana"/>
+                      <a:endParaRPr sz="2000" b="1" dirty="0">
+                        <a:solidFill>
+                          <a:schemeClr val="tx1"/>
+                        </a:solidFill>
+                        <a:latin typeface="Arial" panose="020B0604020202020204" pitchFamily="34" charset="0"/>
+                        <a:cs typeface="Arial" panose="020B0604020202020204" pitchFamily="34" charset="0"/>
                       </a:endParaRPr>
                     </a:p>
                   </a:txBody>
-                  <a:tcPr marL="0" marR="0" marB="0" marT="104775">
+                  <a:tcPr marL="0" marR="0" marT="104775" marB="0">
                     <a:lnL w="9525">
                       <a:solidFill>
                         <a:srgbClr val="D9D9D9"/>
@@ -3102,10 +3184,15 @@
                       <a:prstDash val="solid"/>
                     </a:lnB>
                     <a:solidFill>
-                      <a:srgbClr val="3762E3"/>
+                      <a:schemeClr val="bg1"/>
                     </a:solidFill>
                   </a:tcPr>
                 </a:tc>
+                <a:extLst>
+                  <a:ext uri="{0D108BD9-81ED-4DB2-BD59-A6C34878D82A}">
+                    <a16:rowId xmlns:a16="http://schemas.microsoft.com/office/drawing/2014/main" val="10001"/>
+                  </a:ext>
+                </a:extLst>
               </a:tr>
               <a:tr h="893444">
                 <a:tc>
@@ -3113,53 +3200,51 @@
                     <a:bodyPr/>
                     <a:lstStyle/>
                     <a:p>
-                      <a:pPr>
+                      <a:pPr marL="75565" algn="ctr">
                         <a:lnSpc>
-                          <a:spcPct val="100000"/>
-                        </a:lnSpc>
-                        <a:spcBef>
-                          <a:spcPts val="825"/>
-                        </a:spcBef>
-                      </a:pPr>
-                      <a:endParaRPr sz="1500">
-                        <a:latin typeface="Times New Roman"/>
-                        <a:cs typeface="Times New Roman"/>
-                      </a:endParaRPr>
-                    </a:p>
-                    <a:p>
-                      <a:pPr marL="75565">
-                        <a:lnSpc>
-                          <a:spcPct val="100000"/>
+                          <a:spcPct val="200000"/>
                         </a:lnSpc>
                       </a:pPr>
                       <a:r>
-                        <a:rPr dirty="0" sz="1500">
-                          <a:latin typeface="Verdana"/>
-                          <a:cs typeface="Verdana"/>
+                        <a:rPr sz="2000" b="1" dirty="0">
+                          <a:solidFill>
+                            <a:schemeClr val="tx1"/>
+                          </a:solidFill>
+                          <a:latin typeface="Arial" panose="020B0604020202020204" pitchFamily="34" charset="0"/>
+                          <a:cs typeface="Arial" panose="020B0604020202020204" pitchFamily="34" charset="0"/>
                         </a:rPr>
                         <a:t>No</a:t>
                       </a:r>
                       <a:r>
-                        <a:rPr dirty="0" sz="1500" spc="-140">
-                          <a:latin typeface="Verdana"/>
-                          <a:cs typeface="Verdana"/>
+                        <a:rPr sz="2000" b="1" spc="-140" dirty="0">
+                          <a:solidFill>
+                            <a:schemeClr val="tx1"/>
+                          </a:solidFill>
+                          <a:latin typeface="Arial" panose="020B0604020202020204" pitchFamily="34" charset="0"/>
+                          <a:cs typeface="Arial" panose="020B0604020202020204" pitchFamily="34" charset="0"/>
                         </a:rPr>
                         <a:t> </a:t>
                       </a:r>
                       <a:r>
-                        <a:rPr dirty="0" sz="1500" spc="-10">
-                          <a:latin typeface="Verdana"/>
-                          <a:cs typeface="Verdana"/>
+                        <a:rPr sz="2000" b="1" spc="-10" dirty="0">
+                          <a:solidFill>
+                            <a:schemeClr val="tx1"/>
+                          </a:solidFill>
+                          <a:latin typeface="Arial" panose="020B0604020202020204" pitchFamily="34" charset="0"/>
+                          <a:cs typeface="Arial" panose="020B0604020202020204" pitchFamily="34" charset="0"/>
                         </a:rPr>
                         <a:t>Sources</a:t>
                       </a:r>
-                      <a:endParaRPr sz="1500">
-                        <a:latin typeface="Verdana"/>
-                        <a:cs typeface="Verdana"/>
+                      <a:endParaRPr sz="2000" b="1" dirty="0">
+                        <a:solidFill>
+                          <a:schemeClr val="tx1"/>
+                        </a:solidFill>
+                        <a:latin typeface="Arial" panose="020B0604020202020204" pitchFamily="34" charset="0"/>
+                        <a:cs typeface="Arial" panose="020B0604020202020204" pitchFamily="34" charset="0"/>
                       </a:endParaRPr>
                     </a:p>
                   </a:txBody>
-                  <a:tcPr marL="0" marR="0" marB="0" marT="104775">
+                  <a:tcPr marL="0" marR="0" marT="104775" marB="0">
                     <a:lnL w="9525">
                       <a:solidFill>
                         <a:srgbClr val="D9D9D9"/>
@@ -3185,7 +3270,7 @@
                       <a:prstDash val="solid"/>
                     </a:lnB>
                     <a:solidFill>
-                      <a:srgbClr val="3762E3"/>
+                      <a:schemeClr val="bg1"/>
                     </a:solidFill>
                   </a:tcPr>
                 </a:tc>
@@ -3194,53 +3279,51 @@
                     <a:bodyPr/>
                     <a:lstStyle/>
                     <a:p>
-                      <a:pPr>
+                      <a:pPr marL="76200" algn="ctr">
                         <a:lnSpc>
-                          <a:spcPct val="100000"/>
-                        </a:lnSpc>
-                        <a:spcBef>
-                          <a:spcPts val="825"/>
-                        </a:spcBef>
-                      </a:pPr>
-                      <a:endParaRPr sz="1500">
-                        <a:latin typeface="Times New Roman"/>
-                        <a:cs typeface="Times New Roman"/>
-                      </a:endParaRPr>
-                    </a:p>
-                    <a:p>
-                      <a:pPr marL="76200">
-                        <a:lnSpc>
-                          <a:spcPct val="100000"/>
+                          <a:spcPct val="200000"/>
                         </a:lnSpc>
                       </a:pPr>
                       <a:r>
-                        <a:rPr dirty="0" sz="1500" spc="-35">
-                          <a:latin typeface="Verdana"/>
-                          <a:cs typeface="Verdana"/>
+                        <a:rPr sz="2000" b="1" spc="-35" dirty="0">
+                          <a:solidFill>
+                            <a:schemeClr val="tx1"/>
+                          </a:solidFill>
+                          <a:latin typeface="Arial" panose="020B0604020202020204" pitchFamily="34" charset="0"/>
+                          <a:cs typeface="Arial" panose="020B0604020202020204" pitchFamily="34" charset="0"/>
                         </a:rPr>
                         <a:t>Source</a:t>
                       </a:r>
                       <a:r>
-                        <a:rPr dirty="0" sz="1500" spc="-110">
-                          <a:latin typeface="Verdana"/>
-                          <a:cs typeface="Verdana"/>
+                        <a:rPr sz="2000" b="1" spc="-110" dirty="0">
+                          <a:solidFill>
+                            <a:schemeClr val="tx1"/>
+                          </a:solidFill>
+                          <a:latin typeface="Arial" panose="020B0604020202020204" pitchFamily="34" charset="0"/>
+                          <a:cs typeface="Arial" panose="020B0604020202020204" pitchFamily="34" charset="0"/>
                         </a:rPr>
                         <a:t> </a:t>
                       </a:r>
                       <a:r>
-                        <a:rPr dirty="0" sz="1500" spc="-10">
-                          <a:latin typeface="Verdana"/>
-                          <a:cs typeface="Verdana"/>
+                        <a:rPr sz="2000" b="1" spc="-10" dirty="0">
+                          <a:solidFill>
+                            <a:schemeClr val="tx1"/>
+                          </a:solidFill>
+                          <a:latin typeface="Arial" panose="020B0604020202020204" pitchFamily="34" charset="0"/>
+                          <a:cs typeface="Arial" panose="020B0604020202020204" pitchFamily="34" charset="0"/>
                         </a:rPr>
                         <a:t>Citations</a:t>
                       </a:r>
-                      <a:endParaRPr sz="1500">
-                        <a:latin typeface="Verdana"/>
-                        <a:cs typeface="Verdana"/>
+                      <a:endParaRPr sz="2000" b="1" dirty="0">
+                        <a:solidFill>
+                          <a:schemeClr val="tx1"/>
+                        </a:solidFill>
+                        <a:latin typeface="Arial" panose="020B0604020202020204" pitchFamily="34" charset="0"/>
+                        <a:cs typeface="Arial" panose="020B0604020202020204" pitchFamily="34" charset="0"/>
                       </a:endParaRPr>
                     </a:p>
                   </a:txBody>
-                  <a:tcPr marL="0" marR="0" marB="0" marT="104775">
+                  <a:tcPr marL="0" marR="0" marT="104775" marB="0">
                     <a:lnL w="9525">
                       <a:solidFill>
                         <a:srgbClr val="D9D9D9"/>
@@ -3266,10 +3349,15 @@
                       <a:prstDash val="solid"/>
                     </a:lnB>
                     <a:solidFill>
-                      <a:srgbClr val="3762E3"/>
+                      <a:schemeClr val="bg1"/>
                     </a:solidFill>
                   </a:tcPr>
                 </a:tc>
+                <a:extLst>
+                  <a:ext uri="{0D108BD9-81ED-4DB2-BD59-A6C34878D82A}">
+                    <a16:rowId xmlns:a16="http://schemas.microsoft.com/office/drawing/2014/main" val="10002"/>
+                  </a:ext>
+                </a:extLst>
               </a:tr>
               <a:tr h="893444">
                 <a:tc>
@@ -3277,53 +3365,51 @@
                     <a:bodyPr/>
                     <a:lstStyle/>
                     <a:p>
-                      <a:pPr>
+                      <a:pPr marL="75565" algn="ctr">
                         <a:lnSpc>
-                          <a:spcPct val="100000"/>
-                        </a:lnSpc>
-                        <a:spcBef>
-                          <a:spcPts val="825"/>
-                        </a:spcBef>
-                      </a:pPr>
-                      <a:endParaRPr sz="1500">
-                        <a:latin typeface="Times New Roman"/>
-                        <a:cs typeface="Times New Roman"/>
-                      </a:endParaRPr>
-                    </a:p>
-                    <a:p>
-                      <a:pPr marL="75565">
-                        <a:lnSpc>
-                          <a:spcPct val="100000"/>
+                          <a:spcPct val="200000"/>
                         </a:lnSpc>
                       </a:pPr>
                       <a:r>
-                        <a:rPr dirty="0" sz="1500" spc="-35">
-                          <a:latin typeface="Verdana"/>
-                          <a:cs typeface="Verdana"/>
+                        <a:rPr sz="2000" b="1" spc="-35" dirty="0">
+                          <a:solidFill>
+                            <a:schemeClr val="tx1"/>
+                          </a:solidFill>
+                          <a:latin typeface="Arial" panose="020B0604020202020204" pitchFamily="34" charset="0"/>
+                          <a:cs typeface="Arial" panose="020B0604020202020204" pitchFamily="34" charset="0"/>
                         </a:rPr>
                         <a:t>General</a:t>
                       </a:r>
                       <a:r>
-                        <a:rPr dirty="0" sz="1500" spc="-95">
-                          <a:latin typeface="Verdana"/>
-                          <a:cs typeface="Verdana"/>
+                        <a:rPr sz="2000" b="1" spc="-95" dirty="0">
+                          <a:solidFill>
+                            <a:schemeClr val="tx1"/>
+                          </a:solidFill>
+                          <a:latin typeface="Arial" panose="020B0604020202020204" pitchFamily="34" charset="0"/>
+                          <a:cs typeface="Arial" panose="020B0604020202020204" pitchFamily="34" charset="0"/>
                         </a:rPr>
                         <a:t> </a:t>
                       </a:r>
                       <a:r>
-                        <a:rPr dirty="0" sz="1500" spc="-10">
-                          <a:latin typeface="Verdana"/>
-                          <a:cs typeface="Verdana"/>
+                        <a:rPr sz="2000" b="1" spc="-10" dirty="0">
+                          <a:solidFill>
+                            <a:schemeClr val="tx1"/>
+                          </a:solidFill>
+                          <a:latin typeface="Arial" panose="020B0604020202020204" pitchFamily="34" charset="0"/>
+                          <a:cs typeface="Arial" panose="020B0604020202020204" pitchFamily="34" charset="0"/>
                         </a:rPr>
                         <a:t>Knowledge</a:t>
                       </a:r>
-                      <a:endParaRPr sz="1500">
-                        <a:latin typeface="Verdana"/>
-                        <a:cs typeface="Verdana"/>
+                      <a:endParaRPr sz="2000" b="1" dirty="0">
+                        <a:solidFill>
+                          <a:schemeClr val="tx1"/>
+                        </a:solidFill>
+                        <a:latin typeface="Arial" panose="020B0604020202020204" pitchFamily="34" charset="0"/>
+                        <a:cs typeface="Arial" panose="020B0604020202020204" pitchFamily="34" charset="0"/>
                       </a:endParaRPr>
                     </a:p>
                   </a:txBody>
-                  <a:tcPr marL="0" marR="0" marB="0" marT="104775">
+                  <a:tcPr marL="0" marR="0" marT="104775" marB="0">
                     <a:lnL w="9525">
                       <a:solidFill>
                         <a:srgbClr val="D9D9D9"/>
@@ -3349,7 +3435,7 @@
                       <a:prstDash val="solid"/>
                     </a:lnB>
                     <a:solidFill>
-                      <a:srgbClr val="3762E3"/>
+                      <a:schemeClr val="bg1"/>
                     </a:solidFill>
                   </a:tcPr>
                 </a:tc>
@@ -3358,53 +3444,51 @@
                     <a:bodyPr/>
                     <a:lstStyle/>
                     <a:p>
-                      <a:pPr>
+                      <a:pPr marL="76200" algn="ctr">
                         <a:lnSpc>
-                          <a:spcPct val="100000"/>
-                        </a:lnSpc>
-                        <a:spcBef>
-                          <a:spcPts val="825"/>
-                        </a:spcBef>
-                      </a:pPr>
-                      <a:endParaRPr sz="1500">
-                        <a:latin typeface="Times New Roman"/>
-                        <a:cs typeface="Times New Roman"/>
-                      </a:endParaRPr>
-                    </a:p>
-                    <a:p>
-                      <a:pPr marL="76200">
-                        <a:lnSpc>
-                          <a:spcPct val="100000"/>
+                          <a:spcPct val="200000"/>
                         </a:lnSpc>
                       </a:pPr>
                       <a:r>
-                        <a:rPr dirty="0" sz="1500">
-                          <a:latin typeface="Verdana"/>
-                          <a:cs typeface="Verdana"/>
+                        <a:rPr sz="2000" b="1" dirty="0">
+                          <a:solidFill>
+                            <a:schemeClr val="tx1"/>
+                          </a:solidFill>
+                          <a:latin typeface="Arial" panose="020B0604020202020204" pitchFamily="34" charset="0"/>
+                          <a:cs typeface="Arial" panose="020B0604020202020204" pitchFamily="34" charset="0"/>
                         </a:rPr>
                         <a:t>Medical</a:t>
                       </a:r>
                       <a:r>
-                        <a:rPr dirty="0" sz="1500" spc="-105">
-                          <a:latin typeface="Verdana"/>
-                          <a:cs typeface="Verdana"/>
+                        <a:rPr sz="2000" b="1" spc="-105" dirty="0">
+                          <a:solidFill>
+                            <a:schemeClr val="tx1"/>
+                          </a:solidFill>
+                          <a:latin typeface="Arial" panose="020B0604020202020204" pitchFamily="34" charset="0"/>
+                          <a:cs typeface="Arial" panose="020B0604020202020204" pitchFamily="34" charset="0"/>
                         </a:rPr>
                         <a:t> </a:t>
                       </a:r>
                       <a:r>
-                        <a:rPr dirty="0" sz="1500" spc="-10">
-                          <a:latin typeface="Verdana"/>
-                          <a:cs typeface="Verdana"/>
+                        <a:rPr sz="2000" b="1" spc="-10" dirty="0">
+                          <a:solidFill>
+                            <a:schemeClr val="tx1"/>
+                          </a:solidFill>
+                          <a:latin typeface="Arial" panose="020B0604020202020204" pitchFamily="34" charset="0"/>
+                          <a:cs typeface="Arial" panose="020B0604020202020204" pitchFamily="34" charset="0"/>
                         </a:rPr>
                         <a:t>Literature</a:t>
                       </a:r>
-                      <a:endParaRPr sz="1500">
-                        <a:latin typeface="Verdana"/>
-                        <a:cs typeface="Verdana"/>
+                      <a:endParaRPr sz="2000" b="1" dirty="0">
+                        <a:solidFill>
+                          <a:schemeClr val="tx1"/>
+                        </a:solidFill>
+                        <a:latin typeface="Arial" panose="020B0604020202020204" pitchFamily="34" charset="0"/>
+                        <a:cs typeface="Arial" panose="020B0604020202020204" pitchFamily="34" charset="0"/>
                       </a:endParaRPr>
                     </a:p>
                   </a:txBody>
-                  <a:tcPr marL="0" marR="0" marB="0" marT="104775">
+                  <a:tcPr marL="0" marR="0" marT="104775" marB="0">
                     <a:lnL w="9525">
                       <a:solidFill>
                         <a:srgbClr val="D9D9D9"/>
@@ -3430,10 +3514,15 @@
                       <a:prstDash val="solid"/>
                     </a:lnB>
                     <a:solidFill>
-                      <a:srgbClr val="3762E3"/>
+                      <a:schemeClr val="bg1"/>
                     </a:solidFill>
                   </a:tcPr>
                 </a:tc>
+                <a:extLst>
+                  <a:ext uri="{0D108BD9-81ED-4DB2-BD59-A6C34878D82A}">
+                    <a16:rowId xmlns:a16="http://schemas.microsoft.com/office/drawing/2014/main" val="10003"/>
+                  </a:ext>
+                </a:extLst>
               </a:tr>
             </a:tbl>
           </a:graphicData>
@@ -3475,10 +3564,12 @@
           </p:nvPr>
         </p:nvSpPr>
         <p:spPr>
-          <a:prstGeom prst="rect"/>
+          <a:prstGeom prst="rect">
+            <a:avLst/>
+          </a:prstGeom>
         </p:spPr>
         <p:txBody>
-          <a:bodyPr wrap="square" lIns="0" tIns="249389" rIns="0" bIns="0" rtlCol="0" vert="horz">
+          <a:bodyPr vert="horz" wrap="square" lIns="0" tIns="249389" rIns="0" bIns="0" rtlCol="0">
             <a:spAutoFit/>
           </a:bodyPr>
           <a:lstStyle/>
@@ -3492,15 +3583,15 @@
               </a:spcBef>
             </a:pPr>
             <a:r>
-              <a:rPr dirty="0" spc="-265"/>
+              <a:rPr spc="-265" dirty="0"/>
               <a:t>Future</a:t>
             </a:r>
             <a:r>
-              <a:rPr dirty="0" spc="-415"/>
+              <a:rPr spc="-415" dirty="0"/>
               <a:t> </a:t>
             </a:r>
             <a:r>
-              <a:rPr dirty="0" spc="-290"/>
+              <a:rPr spc="-290" dirty="0"/>
               <a:t>Improvements</a:t>
             </a:r>
           </a:p>
@@ -3627,10 +3718,12 @@
           </p:nvPr>
         </p:nvSpPr>
         <p:spPr>
-          <a:prstGeom prst="rect"/>
+          <a:prstGeom prst="rect">
+            <a:avLst/>
+          </a:prstGeom>
         </p:spPr>
         <p:txBody>
-          <a:bodyPr wrap="square" lIns="0" tIns="52705" rIns="0" bIns="0" rtlCol="0" vert="horz">
+          <a:bodyPr vert="horz" wrap="square" lIns="0" tIns="52705" rIns="0" bIns="0" rtlCol="0">
             <a:spAutoFit/>
           </a:bodyPr>
           <a:lstStyle/>
@@ -3644,27 +3737,27 @@
               </a:spcBef>
             </a:pPr>
             <a:r>
-              <a:rPr dirty="0" spc="465"/>
+              <a:rPr spc="465" dirty="0"/>
               <a:t>Automatic</a:t>
             </a:r>
             <a:r>
-              <a:rPr dirty="0" spc="790"/>
+              <a:rPr spc="790" dirty="0"/>
               <a:t> </a:t>
             </a:r>
             <a:r>
-              <a:rPr dirty="0" spc="455"/>
+              <a:rPr spc="455" dirty="0"/>
               <a:t>Classification </a:t>
             </a:r>
             <a:r>
-              <a:rPr dirty="0" spc="610"/>
+              <a:rPr spc="610" dirty="0"/>
               <a:t>Hybrid</a:t>
             </a:r>
             <a:r>
-              <a:rPr dirty="0" spc="785"/>
+              <a:rPr spc="785" dirty="0"/>
               <a:t> </a:t>
             </a:r>
             <a:r>
-              <a:rPr dirty="0" spc="400"/>
+              <a:rPr spc="400" dirty="0"/>
               <a:t>Search</a:t>
             </a:r>
           </a:p>
@@ -3678,35 +3771,35 @@
               </a:spcBef>
             </a:pPr>
             <a:r>
-              <a:rPr dirty="0" spc="490"/>
+              <a:rPr spc="490" dirty="0"/>
               <a:t>Larger</a:t>
             </a:r>
             <a:r>
-              <a:rPr dirty="0" spc="790"/>
+              <a:rPr spc="790" dirty="0"/>
               <a:t> </a:t>
             </a:r>
             <a:r>
-              <a:rPr dirty="0" spc="525"/>
+              <a:rPr spc="525" dirty="0"/>
               <a:t>Medical</a:t>
             </a:r>
             <a:r>
-              <a:rPr dirty="0" spc="795"/>
+              <a:rPr spc="795" dirty="0"/>
               <a:t> </a:t>
             </a:r>
             <a:r>
-              <a:rPr dirty="0" spc="459"/>
+              <a:rPr spc="459" dirty="0"/>
               <a:t>Corpus </a:t>
             </a:r>
             <a:r>
-              <a:rPr dirty="0" spc="540"/>
+              <a:rPr spc="540" dirty="0"/>
               <a:t>Multilingual</a:t>
             </a:r>
             <a:r>
-              <a:rPr dirty="0" spc="830"/>
+              <a:rPr spc="830" dirty="0"/>
               <a:t> </a:t>
             </a:r>
             <a:r>
-              <a:rPr dirty="0" spc="420"/>
+              <a:rPr spc="420" dirty="0"/>
               <a:t>Support</a:t>
             </a:r>
           </a:p>
@@ -3717,15 +3810,15 @@
               </a:lnSpc>
             </a:pPr>
             <a:r>
-              <a:rPr dirty="0" spc="459"/>
+              <a:rPr spc="459" dirty="0"/>
               <a:t>Production</a:t>
             </a:r>
             <a:r>
-              <a:rPr dirty="0" spc="819"/>
+              <a:rPr spc="819" dirty="0"/>
               <a:t> </a:t>
             </a:r>
             <a:r>
-              <a:rPr dirty="0" spc="450"/>
+              <a:rPr spc="450" dirty="0"/>
               <a:t>Deployment</a:t>
             </a:r>
           </a:p>
@@ -3818,10 +3911,12 @@
             <a:off x="6441231" y="163094"/>
             <a:ext cx="5405755" cy="702945"/>
           </a:xfrm>
-          <a:prstGeom prst="rect"/>
+          <a:prstGeom prst="rect">
+            <a:avLst/>
+          </a:prstGeom>
         </p:spPr>
         <p:txBody>
-          <a:bodyPr wrap="square" lIns="0" tIns="12065" rIns="0" bIns="0" rtlCol="0" vert="horz">
+          <a:bodyPr vert="horz" wrap="square" lIns="0" tIns="12065" rIns="0" bIns="0" rtlCol="0">
             <a:spAutoFit/>
           </a:bodyPr>
           <a:lstStyle/>
@@ -3835,15 +3930,15 @@
               </a:spcBef>
             </a:pPr>
             <a:r>
-              <a:rPr dirty="0" spc="-250"/>
+              <a:rPr spc="-250" dirty="0"/>
               <a:t>Problem</a:t>
             </a:r>
             <a:r>
-              <a:rPr dirty="0" spc="-405"/>
+              <a:rPr spc="-405" dirty="0"/>
               <a:t> </a:t>
             </a:r>
             <a:r>
-              <a:rPr dirty="0" spc="-310"/>
+              <a:rPr spc="-310" dirty="0"/>
               <a:t>Statement</a:t>
             </a:r>
           </a:p>
@@ -3865,7 +3960,7 @@
           </a:prstGeom>
         </p:spPr>
         <p:txBody>
-          <a:bodyPr wrap="square" lIns="0" tIns="12065" rIns="0" bIns="0" rtlCol="0" vert="horz">
+          <a:bodyPr vert="horz" wrap="square" lIns="0" tIns="12065" rIns="0" bIns="0" rtlCol="0">
             <a:spAutoFit/>
           </a:bodyPr>
           <a:lstStyle/>
@@ -3879,91 +3974,91 @@
               </a:spcBef>
             </a:pPr>
             <a:r>
-              <a:rPr dirty="0" sz="4050" spc="480" i="1">
+              <a:rPr sz="4050" i="1" spc="480" dirty="0">
                 <a:latin typeface="Cambria"/>
                 <a:cs typeface="Cambria"/>
               </a:rPr>
               <a:t>Every</a:t>
             </a:r>
             <a:r>
-              <a:rPr dirty="0" sz="4050" spc="650" i="1">
+              <a:rPr sz="4050" i="1" spc="650" dirty="0">
                 <a:latin typeface="Cambria"/>
                 <a:cs typeface="Cambria"/>
               </a:rPr>
               <a:t> </a:t>
             </a:r>
             <a:r>
-              <a:rPr dirty="0" sz="4050" spc="434" i="1">
+              <a:rPr sz="4050" i="1" spc="434" dirty="0">
                 <a:latin typeface="Cambria"/>
                 <a:cs typeface="Cambria"/>
               </a:rPr>
               <a:t>Great</a:t>
             </a:r>
             <a:r>
-              <a:rPr dirty="0" sz="4050" spc="660" i="1">
+              <a:rPr sz="4050" i="1" spc="660" dirty="0">
                 <a:latin typeface="Cambria"/>
                 <a:cs typeface="Cambria"/>
               </a:rPr>
               <a:t> </a:t>
             </a:r>
             <a:r>
-              <a:rPr dirty="0" sz="4050" spc="310" i="1">
+              <a:rPr sz="4050" i="1" spc="310" dirty="0">
                 <a:latin typeface="Cambria"/>
                 <a:cs typeface="Cambria"/>
               </a:rPr>
               <a:t>Project</a:t>
             </a:r>
             <a:r>
-              <a:rPr dirty="0" sz="4050" spc="655" i="1">
+              <a:rPr sz="4050" i="1" spc="655" dirty="0">
                 <a:latin typeface="Cambria"/>
                 <a:cs typeface="Cambria"/>
               </a:rPr>
               <a:t> </a:t>
             </a:r>
             <a:r>
-              <a:rPr dirty="0" sz="4050" spc="340" i="1">
+              <a:rPr sz="4050" i="1" spc="340" dirty="0">
                 <a:latin typeface="Cambria"/>
                 <a:cs typeface="Cambria"/>
               </a:rPr>
               <a:t>Starts</a:t>
             </a:r>
             <a:r>
-              <a:rPr dirty="0" sz="4050" spc="660" i="1">
+              <a:rPr sz="4050" i="1" spc="660" dirty="0">
                 <a:latin typeface="Cambria"/>
                 <a:cs typeface="Cambria"/>
               </a:rPr>
               <a:t> </a:t>
             </a:r>
             <a:r>
-              <a:rPr dirty="0" sz="4050" spc="409" i="1">
+              <a:rPr sz="4050" i="1" spc="409" dirty="0">
                 <a:latin typeface="Cambria"/>
                 <a:cs typeface="Cambria"/>
               </a:rPr>
               <a:t>with</a:t>
             </a:r>
             <a:r>
-              <a:rPr dirty="0" sz="4050" spc="660" i="1">
+              <a:rPr sz="4050" i="1" spc="660" dirty="0">
                 <a:latin typeface="Cambria"/>
                 <a:cs typeface="Cambria"/>
               </a:rPr>
               <a:t> </a:t>
             </a:r>
             <a:r>
-              <a:rPr dirty="0" sz="4050" spc="170" i="1">
+              <a:rPr sz="4050" i="1" spc="170" dirty="0">
                 <a:latin typeface="Cambria"/>
                 <a:cs typeface="Cambria"/>
               </a:rPr>
               <a:t>a</a:t>
             </a:r>
             <a:r>
-              <a:rPr dirty="0" sz="4050" spc="660" i="1">
+              <a:rPr sz="4050" i="1" spc="660" dirty="0">
                 <a:latin typeface="Cambria"/>
                 <a:cs typeface="Cambria"/>
               </a:rPr>
               <a:t> </a:t>
             </a:r>
             <a:r>
-              <a:rPr dirty="0" sz="4050" spc="415" i="1">
+              <a:rPr sz="4050" i="1" spc="415" dirty="0">
                 <a:latin typeface="Cambria"/>
                 <a:cs typeface="Cambria"/>
               </a:rPr>
@@ -4014,7 +4109,7 @@
           </a:prstGeom>
         </p:spPr>
         <p:txBody>
-          <a:bodyPr wrap="square" lIns="0" tIns="13970" rIns="0" bIns="0" rtlCol="0" vert="horz">
+          <a:bodyPr vert="horz" wrap="square" lIns="0" tIns="13970" rIns="0" bIns="0" rtlCol="0">
             <a:spAutoFit/>
           </a:bodyPr>
           <a:lstStyle/>
@@ -4028,63 +4123,63 @@
               </a:spcBef>
             </a:pPr>
             <a:r>
-              <a:rPr dirty="0" sz="5700" spc="635" i="1">
+              <a:rPr sz="5700" i="1" spc="635" dirty="0">
                 <a:latin typeface="Cambria"/>
                 <a:cs typeface="Cambria"/>
               </a:rPr>
               <a:t>But...</a:t>
             </a:r>
             <a:r>
-              <a:rPr dirty="0" sz="5700" spc="935" i="1">
+              <a:rPr sz="5700" i="1" spc="935" dirty="0">
                 <a:latin typeface="Cambria"/>
                 <a:cs typeface="Cambria"/>
               </a:rPr>
               <a:t> </a:t>
             </a:r>
             <a:r>
-              <a:rPr dirty="0" sz="5700" spc="810" i="1">
+              <a:rPr sz="5700" i="1" spc="810" dirty="0">
                 <a:latin typeface="Cambria"/>
                 <a:cs typeface="Cambria"/>
               </a:rPr>
               <a:t>Can</a:t>
             </a:r>
             <a:r>
-              <a:rPr dirty="0" sz="5700" spc="935" i="1">
+              <a:rPr sz="5700" i="1" spc="935" dirty="0">
                 <a:latin typeface="Cambria"/>
                 <a:cs typeface="Cambria"/>
               </a:rPr>
               <a:t> </a:t>
             </a:r>
             <a:r>
-              <a:rPr dirty="0" sz="5700" spc="505" i="1">
+              <a:rPr sz="5700" i="1" spc="505" dirty="0">
                 <a:latin typeface="Cambria"/>
                 <a:cs typeface="Cambria"/>
               </a:rPr>
               <a:t>we</a:t>
             </a:r>
             <a:r>
-              <a:rPr dirty="0" sz="5700" spc="935" i="1">
+              <a:rPr sz="5700" i="1" spc="935" dirty="0">
                 <a:latin typeface="Cambria"/>
                 <a:cs typeface="Cambria"/>
               </a:rPr>
               <a:t> </a:t>
             </a:r>
             <a:r>
-              <a:rPr dirty="0" sz="5700" spc="415" i="1">
+              <a:rPr sz="5700" i="1" spc="415" dirty="0">
                 <a:latin typeface="Cambria"/>
                 <a:cs typeface="Cambria"/>
               </a:rPr>
               <a:t>trust</a:t>
             </a:r>
             <a:r>
-              <a:rPr dirty="0" sz="5700" spc="935" i="1">
+              <a:rPr sz="5700" i="1" spc="935" dirty="0">
                 <a:latin typeface="Cambria"/>
                 <a:cs typeface="Cambria"/>
               </a:rPr>
               <a:t> </a:t>
             </a:r>
             <a:r>
-              <a:rPr dirty="0" sz="5700" spc="459" i="1">
+              <a:rPr sz="5700" i="1" spc="459" dirty="0">
                 <a:latin typeface="Cambria"/>
                 <a:cs typeface="Cambria"/>
               </a:rPr>
@@ -4113,7 +4208,7 @@
           </a:prstGeom>
         </p:spPr>
         <p:txBody>
-          <a:bodyPr wrap="square" lIns="0" tIns="37465" rIns="0" bIns="0" rtlCol="0" vert="horz">
+          <a:bodyPr vert="horz" wrap="square" lIns="0" tIns="37465" rIns="0" bIns="0" rtlCol="0">
             <a:spAutoFit/>
           </a:bodyPr>
           <a:lstStyle/>
@@ -4127,98 +4222,98 @@
               </a:spcBef>
             </a:pPr>
             <a:r>
-              <a:rPr dirty="0" sz="3150" spc="335" i="1">
+              <a:rPr sz="3150" i="1" spc="335" dirty="0">
                 <a:latin typeface="Cambria"/>
                 <a:cs typeface="Cambria"/>
               </a:rPr>
               <a:t>What</a:t>
             </a:r>
             <a:r>
-              <a:rPr dirty="0" sz="3150" spc="500" i="1">
+              <a:rPr sz="3150" i="1" spc="500" dirty="0">
                 <a:latin typeface="Cambria"/>
                 <a:cs typeface="Cambria"/>
               </a:rPr>
               <a:t> </a:t>
             </a:r>
             <a:r>
-              <a:rPr dirty="0" sz="3150" spc="210" i="1">
+              <a:rPr sz="3150" i="1" spc="210" dirty="0">
                 <a:latin typeface="Cambria"/>
                 <a:cs typeface="Cambria"/>
               </a:rPr>
               <a:t>are</a:t>
             </a:r>
             <a:r>
-              <a:rPr dirty="0" sz="3150" spc="509" i="1">
+              <a:rPr sz="3150" i="1" spc="509" dirty="0">
                 <a:latin typeface="Cambria"/>
                 <a:cs typeface="Cambria"/>
               </a:rPr>
               <a:t> </a:t>
             </a:r>
             <a:r>
-              <a:rPr dirty="0" sz="3150" spc="175" i="1">
+              <a:rPr sz="3150" i="1" spc="175" dirty="0">
                 <a:latin typeface="Cambria"/>
                 <a:cs typeface="Cambria"/>
               </a:rPr>
               <a:t>the</a:t>
             </a:r>
             <a:r>
-              <a:rPr dirty="0" sz="3150" spc="509" i="1">
+              <a:rPr sz="3150" i="1" spc="509" dirty="0">
                 <a:latin typeface="Cambria"/>
                 <a:cs typeface="Cambria"/>
               </a:rPr>
               <a:t> </a:t>
             </a:r>
             <a:r>
-              <a:rPr dirty="0" sz="3150" spc="240" i="1">
+              <a:rPr sz="3150" i="1" spc="240" dirty="0">
                 <a:latin typeface="Cambria"/>
                 <a:cs typeface="Cambria"/>
               </a:rPr>
               <a:t>symptoms </a:t>
             </a:r>
             <a:r>
-              <a:rPr dirty="0" sz="3150" spc="170" i="1">
+              <a:rPr sz="3150" i="1" spc="170" dirty="0">
                 <a:latin typeface="Cambria"/>
                 <a:cs typeface="Cambria"/>
               </a:rPr>
               <a:t>of</a:t>
             </a:r>
             <a:r>
-              <a:rPr dirty="0" sz="3150" spc="505" i="1">
+              <a:rPr sz="3150" i="1" spc="505" dirty="0">
                 <a:latin typeface="Cambria"/>
                 <a:cs typeface="Cambria"/>
               </a:rPr>
               <a:t> </a:t>
             </a:r>
             <a:r>
-              <a:rPr dirty="0" sz="3150" spc="350" i="1">
+              <a:rPr sz="3150" i="1" spc="350" dirty="0">
                 <a:latin typeface="Cambria"/>
                 <a:cs typeface="Cambria"/>
               </a:rPr>
               <a:t>Type</a:t>
             </a:r>
             <a:r>
-              <a:rPr dirty="0" sz="3150" spc="515" i="1">
+              <a:rPr sz="3150" i="1" spc="515" dirty="0">
                 <a:latin typeface="Cambria"/>
                 <a:cs typeface="Cambria"/>
               </a:rPr>
               <a:t> </a:t>
             </a:r>
             <a:r>
-              <a:rPr dirty="0" sz="3150" spc="295" i="1">
+              <a:rPr sz="3150" i="1" spc="295" dirty="0">
                 <a:latin typeface="Cambria"/>
                 <a:cs typeface="Cambria"/>
               </a:rPr>
               <a:t>2</a:t>
             </a:r>
             <a:r>
-              <a:rPr dirty="0" sz="3150" spc="515" i="1">
+              <a:rPr sz="3150" i="1" spc="515" dirty="0">
                 <a:latin typeface="Cambria"/>
                 <a:cs typeface="Cambria"/>
               </a:rPr>
               <a:t> </a:t>
             </a:r>
             <a:r>
-              <a:rPr dirty="0" sz="3150" spc="275" i="1">
+              <a:rPr sz="3150" i="1" spc="275" dirty="0">
                 <a:latin typeface="Cambria"/>
                 <a:cs typeface="Cambria"/>
               </a:rPr>
@@ -4288,7 +4383,9 @@
         <p:txBody>
           <a:bodyPr wrap="square" lIns="0" tIns="0" rIns="0" bIns="0" rtlCol="0"/>
           <a:lstStyle/>
-          <a:p/>
+          <a:p>
+            <a:endParaRPr/>
+          </a:p>
         </p:txBody>
       </p:sp>
       <p:pic>
@@ -4329,7 +4426,7 @@
           </a:prstGeom>
         </p:spPr>
         <p:txBody>
-          <a:bodyPr wrap="square" lIns="0" tIns="16510" rIns="0" bIns="0" rtlCol="0" vert="horz">
+          <a:bodyPr vert="horz" wrap="square" lIns="0" tIns="16510" rIns="0" bIns="0" rtlCol="0">
             <a:spAutoFit/>
           </a:bodyPr>
           <a:lstStyle/>
@@ -4343,63 +4440,63 @@
               </a:spcBef>
             </a:pPr>
             <a:r>
-              <a:rPr dirty="0" sz="3450" spc="580" i="1">
+              <a:rPr sz="3450" i="1" spc="580" dirty="0">
                 <a:latin typeface="Cambria"/>
                 <a:cs typeface="Cambria"/>
               </a:rPr>
               <a:t>AI</a:t>
             </a:r>
             <a:r>
-              <a:rPr dirty="0" sz="3450" spc="575" i="1">
+              <a:rPr sz="3450" i="1" spc="575" dirty="0">
                 <a:latin typeface="Cambria"/>
                 <a:cs typeface="Cambria"/>
               </a:rPr>
               <a:t> </a:t>
             </a:r>
             <a:r>
-              <a:rPr dirty="0" sz="3450" spc="305" i="1">
+              <a:rPr sz="3450" i="1" spc="305" dirty="0">
                 <a:latin typeface="Cambria"/>
                 <a:cs typeface="Cambria"/>
               </a:rPr>
               <a:t>gives</a:t>
             </a:r>
             <a:r>
-              <a:rPr dirty="0" sz="3450" spc="575" i="1">
+              <a:rPr sz="3450" i="1" spc="575" dirty="0">
                 <a:latin typeface="Cambria"/>
                 <a:cs typeface="Cambria"/>
               </a:rPr>
               <a:t> </a:t>
             </a:r>
             <a:r>
-              <a:rPr dirty="0" sz="3450" spc="330" i="1">
+              <a:rPr sz="3450" i="1" spc="330" dirty="0">
                 <a:latin typeface="Cambria"/>
                 <a:cs typeface="Cambria"/>
               </a:rPr>
               <a:t>an</a:t>
             </a:r>
             <a:r>
-              <a:rPr dirty="0" sz="3450" spc="575" i="1">
+              <a:rPr sz="3450" i="1" spc="575" dirty="0">
                 <a:latin typeface="Cambria"/>
                 <a:cs typeface="Cambria"/>
               </a:rPr>
               <a:t> </a:t>
             </a:r>
             <a:r>
-              <a:rPr dirty="0" sz="3450" spc="340" i="1">
+              <a:rPr sz="3450" i="1" spc="340" dirty="0">
                 <a:latin typeface="Cambria"/>
                 <a:cs typeface="Cambria"/>
               </a:rPr>
               <a:t>answer</a:t>
             </a:r>
             <a:r>
-              <a:rPr dirty="0" sz="3450" spc="575" i="1">
+              <a:rPr sz="3450" i="1" spc="575" dirty="0">
                 <a:latin typeface="Cambria"/>
                 <a:cs typeface="Cambria"/>
               </a:rPr>
               <a:t> </a:t>
             </a:r>
             <a:r>
-              <a:rPr dirty="0" sz="3450" spc="340" i="1">
+              <a:rPr sz="3450" i="1" spc="340" dirty="0">
                 <a:latin typeface="Cambria"/>
                 <a:cs typeface="Cambria"/>
               </a:rPr>
@@ -4518,10 +4615,12 @@
             <a:off x="7382792" y="243085"/>
             <a:ext cx="3522979" cy="702945"/>
           </a:xfrm>
-          <a:prstGeom prst="rect"/>
+          <a:prstGeom prst="rect">
+            <a:avLst/>
+          </a:prstGeom>
         </p:spPr>
         <p:txBody>
-          <a:bodyPr wrap="square" lIns="0" tIns="12065" rIns="0" bIns="0" rtlCol="0" vert="horz">
+          <a:bodyPr vert="horz" wrap="square" lIns="0" tIns="12065" rIns="0" bIns="0" rtlCol="0">
             <a:spAutoFit/>
           </a:bodyPr>
           <a:lstStyle/>
@@ -4535,15 +4634,15 @@
               </a:spcBef>
             </a:pPr>
             <a:r>
-              <a:rPr dirty="0" spc="-200"/>
+              <a:rPr spc="-200" dirty="0"/>
               <a:t>Our</a:t>
             </a:r>
             <a:r>
-              <a:rPr dirty="0" spc="-420"/>
+              <a:rPr spc="-420" dirty="0"/>
               <a:t> </a:t>
             </a:r>
             <a:r>
-              <a:rPr dirty="0" spc="-200"/>
+              <a:rPr spc="-200" dirty="0"/>
               <a:t>Solution</a:t>
             </a:r>
           </a:p>
@@ -4565,7 +4664,7 @@
           </a:prstGeom>
         </p:spPr>
         <p:txBody>
-          <a:bodyPr wrap="square" lIns="0" tIns="12065" rIns="0" bIns="0" rtlCol="0" vert="horz">
+          <a:bodyPr vert="horz" wrap="square" lIns="0" tIns="12065" rIns="0" bIns="0" rtlCol="0">
             <a:spAutoFit/>
           </a:bodyPr>
           <a:lstStyle/>
@@ -4579,42 +4678,42 @@
               </a:spcBef>
             </a:pPr>
             <a:r>
-              <a:rPr dirty="0" sz="4050" spc="475" i="1">
+              <a:rPr sz="4050" i="1" spc="475" dirty="0">
                 <a:latin typeface="Cambria"/>
                 <a:cs typeface="Cambria"/>
               </a:rPr>
               <a:t>Retrieval-</a:t>
             </a:r>
             <a:r>
-              <a:rPr dirty="0" sz="4050" spc="405" i="1">
+              <a:rPr sz="4050" i="1" spc="405" dirty="0">
                 <a:latin typeface="Cambria"/>
                 <a:cs typeface="Cambria"/>
               </a:rPr>
               <a:t>Augmented</a:t>
             </a:r>
             <a:r>
-              <a:rPr dirty="0" sz="4050" spc="690" i="1">
+              <a:rPr sz="4050" i="1" spc="690" dirty="0">
                 <a:latin typeface="Cambria"/>
                 <a:cs typeface="Cambria"/>
               </a:rPr>
               <a:t> </a:t>
             </a:r>
             <a:r>
-              <a:rPr dirty="0" sz="4050" spc="430" i="1">
+              <a:rPr sz="4050" i="1" spc="430" dirty="0">
                 <a:latin typeface="Cambria"/>
                 <a:cs typeface="Cambria"/>
               </a:rPr>
               <a:t>Generation</a:t>
             </a:r>
             <a:r>
-              <a:rPr dirty="0" sz="4050" spc="685" i="1">
+              <a:rPr sz="4050" i="1" spc="685" dirty="0">
                 <a:latin typeface="Cambria"/>
                 <a:cs typeface="Cambria"/>
               </a:rPr>
               <a:t> </a:t>
             </a:r>
             <a:r>
-              <a:rPr dirty="0" sz="4050" spc="550" i="1">
+              <a:rPr sz="4050" i="1" spc="550" dirty="0">
                 <a:latin typeface="Cambria"/>
                 <a:cs typeface="Cambria"/>
               </a:rPr>
@@ -4723,7 +4822,9 @@
         <p:txBody>
           <a:bodyPr wrap="square" lIns="0" tIns="0" rIns="0" bIns="0" rtlCol="0"/>
           <a:lstStyle/>
-          <a:p/>
+          <a:p>
+            <a:endParaRPr/>
+          </a:p>
         </p:txBody>
       </p:sp>
       <p:sp>
@@ -4742,7 +4843,7 @@
           </a:prstGeom>
         </p:spPr>
         <p:txBody>
-          <a:bodyPr wrap="square" lIns="0" tIns="14604" rIns="0" bIns="0" rtlCol="0" vert="horz">
+          <a:bodyPr vert="horz" wrap="square" lIns="0" tIns="14604" rIns="0" bIns="0" rtlCol="0">
             <a:spAutoFit/>
           </a:bodyPr>
           <a:lstStyle/>
@@ -4756,27 +4857,39 @@
               </a:spcBef>
             </a:pPr>
             <a:r>
-              <a:rPr dirty="0" sz="3050">
+              <a:rPr sz="3050" dirty="0">
+                <a:solidFill>
+                  <a:schemeClr val="bg1"/>
+                </a:solidFill>
                 <a:latin typeface="Segoe UI"/>
                 <a:cs typeface="Segoe UI"/>
               </a:rPr>
               <a:t>User</a:t>
             </a:r>
             <a:r>
-              <a:rPr dirty="0" sz="3050" spc="-15">
+              <a:rPr sz="3050" spc="-15" dirty="0">
+                <a:solidFill>
+                  <a:schemeClr val="bg1"/>
+                </a:solidFill>
                 <a:latin typeface="Segoe UI"/>
                 <a:cs typeface="Segoe UI"/>
               </a:rPr>
               <a:t> </a:t>
             </a:r>
             <a:r>
-              <a:rPr dirty="0" sz="3050" spc="-10">
+              <a:rPr sz="3050" spc="-10" dirty="0">
+                <a:solidFill>
+                  <a:schemeClr val="bg1"/>
+                </a:solidFill>
                 <a:latin typeface="Segoe UI"/>
                 <a:cs typeface="Segoe UI"/>
               </a:rPr>
               <a:t>Question</a:t>
             </a:r>
-            <a:endParaRPr sz="3050">
+            <a:endParaRPr sz="3050" dirty="0">
+              <a:solidFill>
+                <a:schemeClr val="bg1"/>
+              </a:solidFill>
               <a:latin typeface="Segoe UI"/>
               <a:cs typeface="Segoe UI"/>
             </a:endParaRPr>
@@ -4879,7 +4992,9 @@
         <p:txBody>
           <a:bodyPr wrap="square" lIns="0" tIns="0" rIns="0" bIns="0" rtlCol="0"/>
           <a:lstStyle/>
-          <a:p/>
+          <a:p>
+            <a:endParaRPr/>
+          </a:p>
         </p:txBody>
       </p:sp>
       <p:sp>
@@ -4891,14 +5006,14 @@
         <p:spPr>
           <a:xfrm>
             <a:off x="7085079" y="4379009"/>
-            <a:ext cx="4006215" cy="998219"/>
+            <a:ext cx="4006215" cy="951094"/>
           </a:xfrm>
           <a:prstGeom prst="rect">
             <a:avLst/>
           </a:prstGeom>
         </p:spPr>
         <p:txBody>
-          <a:bodyPr wrap="square" lIns="0" tIns="12065" rIns="0" bIns="0" rtlCol="0" vert="horz">
+          <a:bodyPr vert="horz" wrap="square" lIns="0" tIns="12065" rIns="0" bIns="0" rtlCol="0">
             <a:spAutoFit/>
           </a:bodyPr>
           <a:lstStyle/>
@@ -4912,20 +5027,29 @@
               </a:spcBef>
             </a:pPr>
             <a:r>
-              <a:rPr dirty="0" sz="2750">
+              <a:rPr sz="2750" dirty="0">
+                <a:solidFill>
+                  <a:schemeClr val="bg1"/>
+                </a:solidFill>
                 <a:latin typeface="Segoe UI"/>
                 <a:cs typeface="Segoe UI"/>
               </a:rPr>
               <a:t>Retrieve </a:t>
             </a:r>
             <a:r>
-              <a:rPr dirty="0" sz="2750" spc="-10">
+              <a:rPr sz="2750" spc="-10" dirty="0">
+                <a:solidFill>
+                  <a:schemeClr val="bg1"/>
+                </a:solidFill>
                 <a:latin typeface="Segoe UI"/>
                 <a:cs typeface="Segoe UI"/>
               </a:rPr>
               <a:t>EvidenceRetrieve Evidence</a:t>
             </a:r>
-            <a:endParaRPr sz="2750">
+            <a:endParaRPr sz="2750" dirty="0">
+              <a:solidFill>
+                <a:schemeClr val="bg1"/>
+              </a:solidFill>
               <a:latin typeface="Segoe UI"/>
               <a:cs typeface="Segoe UI"/>
             </a:endParaRPr>
@@ -5000,7 +5124,9 @@
           <p:txBody>
             <a:bodyPr wrap="square" lIns="0" tIns="0" rIns="0" bIns="0" rtlCol="0"/>
             <a:lstStyle/>
-            <a:p/>
+            <a:p>
+              <a:endParaRPr/>
+            </a:p>
           </p:txBody>
         </p:sp>
         <p:sp>
@@ -5099,7 +5225,9 @@
           <p:txBody>
             <a:bodyPr wrap="square" lIns="0" tIns="0" rIns="0" bIns="0" rtlCol="0"/>
             <a:lstStyle/>
-            <a:p/>
+            <a:p>
+              <a:endParaRPr/>
+            </a:p>
           </p:txBody>
         </p:sp>
       </p:grpSp>
@@ -5157,7 +5285,9 @@
         <p:txBody>
           <a:bodyPr wrap="square" lIns="0" tIns="0" rIns="0" bIns="0" rtlCol="0"/>
           <a:lstStyle/>
-          <a:p/>
+          <a:p>
+            <a:endParaRPr/>
+          </a:p>
         </p:txBody>
       </p:sp>
       <p:sp>
@@ -5176,7 +5306,7 @@
           </a:prstGeom>
         </p:spPr>
         <p:txBody>
-          <a:bodyPr wrap="square" lIns="0" tIns="14605" rIns="0" bIns="0" rtlCol="0" vert="horz">
+          <a:bodyPr vert="horz" wrap="square" lIns="0" tIns="14605" rIns="0" bIns="0" rtlCol="0">
             <a:spAutoFit/>
           </a:bodyPr>
           <a:lstStyle/>
@@ -5190,20 +5320,29 @@
               </a:spcBef>
             </a:pPr>
             <a:r>
-              <a:rPr dirty="0" sz="3500">
+              <a:rPr sz="3500" dirty="0">
+                <a:solidFill>
+                  <a:schemeClr val="bg1"/>
+                </a:solidFill>
                 <a:latin typeface="Segoe UI"/>
                 <a:cs typeface="Segoe UI"/>
               </a:rPr>
               <a:t>Generate </a:t>
             </a:r>
             <a:r>
-              <a:rPr dirty="0" sz="3500" spc="-10">
+              <a:rPr sz="3500" spc="-10" dirty="0">
+                <a:solidFill>
+                  <a:schemeClr val="bg1"/>
+                </a:solidFill>
                 <a:latin typeface="Segoe UI"/>
                 <a:cs typeface="Segoe UI"/>
               </a:rPr>
               <a:t>Answer</a:t>
             </a:r>
-            <a:endParaRPr sz="3500">
+            <a:endParaRPr sz="3500" dirty="0">
+              <a:solidFill>
+                <a:schemeClr val="bg1"/>
+              </a:solidFill>
               <a:latin typeface="Segoe UI"/>
               <a:cs typeface="Segoe UI"/>
             </a:endParaRPr>
@@ -5331,7 +5470,9 @@
         <p:txBody>
           <a:bodyPr wrap="square" lIns="0" tIns="0" rIns="0" bIns="0" rtlCol="0"/>
           <a:lstStyle/>
-          <a:p/>
+          <a:p>
+            <a:endParaRPr/>
+          </a:p>
         </p:txBody>
       </p:sp>
       <p:grpSp>
@@ -5444,7 +5585,9 @@
           <p:txBody>
             <a:bodyPr wrap="square" lIns="0" tIns="0" rIns="0" bIns="0" rtlCol="0"/>
             <a:lstStyle/>
-            <a:p/>
+            <a:p>
+              <a:endParaRPr/>
+            </a:p>
           </p:txBody>
         </p:sp>
         <p:sp>
@@ -5501,7 +5644,9 @@
           <p:txBody>
             <a:bodyPr wrap="square" lIns="0" tIns="0" rIns="0" bIns="0" rtlCol="0"/>
             <a:lstStyle/>
-            <a:p/>
+            <a:p>
+              <a:endParaRPr/>
+            </a:p>
           </p:txBody>
         </p:sp>
       </p:grpSp>
@@ -5615,7 +5760,9 @@
           <p:txBody>
             <a:bodyPr wrap="square" lIns="0" tIns="0" rIns="0" bIns="0" rtlCol="0"/>
             <a:lstStyle/>
-            <a:p/>
+            <a:p>
+              <a:endParaRPr/>
+            </a:p>
           </p:txBody>
         </p:sp>
         <p:sp>
@@ -5702,7 +5849,9 @@
           <p:txBody>
             <a:bodyPr wrap="square" lIns="0" tIns="0" rIns="0" bIns="0" rtlCol="0"/>
             <a:lstStyle/>
-            <a:p/>
+            <a:p>
+              <a:endParaRPr/>
+            </a:p>
           </p:txBody>
         </p:sp>
         <p:sp>
@@ -5801,7 +5950,9 @@
           <p:txBody>
             <a:bodyPr wrap="square" lIns="0" tIns="0" rIns="0" bIns="0" rtlCol="0"/>
             <a:lstStyle/>
-            <a:p/>
+            <a:p>
+              <a:endParaRPr/>
+            </a:p>
           </p:txBody>
         </p:sp>
         <p:sp>
@@ -5858,7 +6009,9 @@
           <p:txBody>
             <a:bodyPr wrap="square" lIns="0" tIns="0" rIns="0" bIns="0" rtlCol="0"/>
             <a:lstStyle/>
-            <a:p/>
+            <a:p>
+              <a:endParaRPr/>
+            </a:p>
           </p:txBody>
         </p:sp>
         <p:sp>
@@ -5957,7 +6110,9 @@
           <p:txBody>
             <a:bodyPr wrap="square" lIns="0" tIns="0" rIns="0" bIns="0" rtlCol="0"/>
             <a:lstStyle/>
-            <a:p/>
+            <a:p>
+              <a:endParaRPr/>
+            </a:p>
           </p:txBody>
         </p:sp>
         <p:sp>
@@ -6185,7 +6340,9 @@
           <p:txBody>
             <a:bodyPr wrap="square" lIns="0" tIns="0" rIns="0" bIns="0" rtlCol="0"/>
             <a:lstStyle/>
-            <a:p/>
+            <a:p>
+              <a:endParaRPr/>
+            </a:p>
           </p:txBody>
         </p:sp>
         <p:pic>
@@ -6303,7 +6460,9 @@
           <p:txBody>
             <a:bodyPr wrap="square" lIns="0" tIns="0" rIns="0" bIns="0" rtlCol="0"/>
             <a:lstStyle/>
-            <a:p/>
+            <a:p>
+              <a:endParaRPr/>
+            </a:p>
           </p:txBody>
         </p:sp>
         <p:pic>
@@ -6421,7 +6580,9 @@
           <p:txBody>
             <a:bodyPr wrap="square" lIns="0" tIns="0" rIns="0" bIns="0" rtlCol="0"/>
             <a:lstStyle/>
-            <a:p/>
+            <a:p>
+              <a:endParaRPr/>
+            </a:p>
           </p:txBody>
         </p:sp>
         <p:pic>
@@ -6593,7 +6754,9 @@
           <p:txBody>
             <a:bodyPr wrap="square" lIns="0" tIns="0" rIns="0" bIns="0" rtlCol="0"/>
             <a:lstStyle/>
-            <a:p/>
+            <a:p>
+              <a:endParaRPr/>
+            </a:p>
           </p:txBody>
         </p:sp>
         <p:pic>
@@ -6865,7 +7028,9 @@
           <p:txBody>
             <a:bodyPr wrap="square" lIns="0" tIns="0" rIns="0" bIns="0" rtlCol="0"/>
             <a:lstStyle/>
-            <a:p/>
+            <a:p>
+              <a:endParaRPr/>
+            </a:p>
           </p:txBody>
         </p:sp>
         <p:pic>
@@ -7008,7 +7173,9 @@
           <p:txBody>
             <a:bodyPr wrap="square" lIns="0" tIns="0" rIns="0" bIns="0" rtlCol="0"/>
             <a:lstStyle/>
-            <a:p/>
+            <a:p>
+              <a:endParaRPr/>
+            </a:p>
           </p:txBody>
         </p:sp>
         <p:pic>
@@ -7306,7 +7473,9 @@
           <p:txBody>
             <a:bodyPr wrap="square" lIns="0" tIns="0" rIns="0" bIns="0" rtlCol="0"/>
             <a:lstStyle/>
-            <a:p/>
+            <a:p>
+              <a:endParaRPr/>
+            </a:p>
           </p:txBody>
         </p:sp>
         <p:pic>
@@ -7431,7 +7600,9 @@
           <p:txBody>
             <a:bodyPr wrap="square" lIns="0" tIns="0" rIns="0" bIns="0" rtlCol="0"/>
             <a:lstStyle/>
-            <a:p/>
+            <a:p>
+              <a:endParaRPr/>
+            </a:p>
           </p:txBody>
         </p:sp>
       </p:grpSp>
@@ -7446,10 +7617,12 @@
           </p:nvPr>
         </p:nvSpPr>
         <p:spPr>
-          <a:prstGeom prst="rect"/>
+          <a:prstGeom prst="rect">
+            <a:avLst/>
+          </a:prstGeom>
         </p:spPr>
         <p:txBody>
-          <a:bodyPr wrap="square" lIns="0" tIns="12065" rIns="0" bIns="0" rtlCol="0" vert="horz">
+          <a:bodyPr vert="horz" wrap="square" lIns="0" tIns="12065" rIns="0" bIns="0" rtlCol="0">
             <a:spAutoFit/>
           </a:bodyPr>
           <a:lstStyle/>
@@ -7463,7 +7636,7 @@
               </a:spcBef>
             </a:pPr>
             <a:r>
-              <a:rPr dirty="0" sz="4050" spc="635" i="1">
+              <a:rPr sz="4050" i="1" spc="635" dirty="0">
                 <a:solidFill>
                   <a:srgbClr val="000000"/>
                 </a:solidFill>
@@ -7473,7 +7646,7 @@
               <a:t>How</a:t>
             </a:r>
             <a:r>
-              <a:rPr dirty="0" sz="4050" spc="650" i="1">
+              <a:rPr sz="4050" i="1" spc="650" dirty="0">
                 <a:solidFill>
                   <a:srgbClr val="000000"/>
                 </a:solidFill>
@@ -7483,7 +7656,7 @@
               <a:t> </a:t>
             </a:r>
             <a:r>
-              <a:rPr dirty="0" sz="4050" spc="355" i="1">
+              <a:rPr sz="4050" i="1" spc="355" dirty="0">
                 <a:solidFill>
                   <a:srgbClr val="000000"/>
                 </a:solidFill>
@@ -7493,7 +7666,7 @@
               <a:t>Does</a:t>
             </a:r>
             <a:r>
-              <a:rPr dirty="0" sz="4050" spc="655" i="1">
+              <a:rPr sz="4050" i="1" spc="655" dirty="0">
                 <a:solidFill>
                   <a:srgbClr val="000000"/>
                 </a:solidFill>
@@ -7503,7 +7676,7 @@
               <a:t> </a:t>
             </a:r>
             <a:r>
-              <a:rPr dirty="0" sz="4050" spc="335" i="1">
+              <a:rPr sz="4050" i="1" spc="335" dirty="0">
                 <a:solidFill>
                   <a:srgbClr val="000000"/>
                 </a:solidFill>
@@ -7513,7 +7686,7 @@
               <a:t>It</a:t>
             </a:r>
             <a:r>
-              <a:rPr dirty="0" sz="4050" spc="660" i="1">
+              <a:rPr sz="4050" i="1" spc="660" dirty="0">
                 <a:solidFill>
                   <a:srgbClr val="000000"/>
                 </a:solidFill>
@@ -7523,7 +7696,7 @@
               <a:t> </a:t>
             </a:r>
             <a:r>
-              <a:rPr dirty="0" sz="4050" spc="395" i="1">
+              <a:rPr sz="4050" i="1" spc="395" dirty="0">
                 <a:solidFill>
                   <a:srgbClr val="000000"/>
                 </a:solidFill>
@@ -7555,7 +7728,7 @@
           </a:prstGeom>
         </p:spPr>
         <p:txBody>
-          <a:bodyPr wrap="square" lIns="0" tIns="12700" rIns="0" bIns="0" rtlCol="0" vert="horz">
+          <a:bodyPr vert="horz" wrap="square" lIns="0" tIns="12700" rIns="0" bIns="0" rtlCol="0">
             <a:spAutoFit/>
           </a:bodyPr>
           <a:lstStyle/>
@@ -7569,27 +7742,39 @@
               </a:spcBef>
             </a:pPr>
             <a:r>
-              <a:rPr dirty="0" sz="3650">
+              <a:rPr sz="3650" dirty="0">
+                <a:solidFill>
+                  <a:schemeClr val="bg1"/>
+                </a:solidFill>
                 <a:latin typeface="Segoe UI"/>
                 <a:cs typeface="Segoe UI"/>
               </a:rPr>
               <a:t>User</a:t>
             </a:r>
             <a:r>
-              <a:rPr dirty="0" sz="3650" spc="-80">
+              <a:rPr sz="3650" spc="-80" dirty="0">
+                <a:solidFill>
+                  <a:schemeClr val="bg1"/>
+                </a:solidFill>
                 <a:latin typeface="Segoe UI"/>
                 <a:cs typeface="Segoe UI"/>
               </a:rPr>
               <a:t> </a:t>
             </a:r>
             <a:r>
-              <a:rPr dirty="0" sz="3650" spc="-10">
+              <a:rPr sz="3650" spc="-10" dirty="0">
+                <a:solidFill>
+                  <a:schemeClr val="bg1"/>
+                </a:solidFill>
                 <a:latin typeface="Segoe UI"/>
                 <a:cs typeface="Segoe UI"/>
               </a:rPr>
               <a:t>Question</a:t>
             </a:r>
-            <a:endParaRPr sz="3650">
+            <a:endParaRPr sz="3650" dirty="0">
+              <a:solidFill>
+                <a:schemeClr val="bg1"/>
+              </a:solidFill>
               <a:latin typeface="Segoe UI"/>
               <a:cs typeface="Segoe UI"/>
             </a:endParaRPr>
@@ -7612,7 +7797,7 @@
           </a:prstGeom>
         </p:spPr>
         <p:txBody>
-          <a:bodyPr wrap="square" lIns="0" tIns="11430" rIns="0" bIns="0" rtlCol="0" vert="horz">
+          <a:bodyPr vert="horz" wrap="square" lIns="0" tIns="11430" rIns="0" bIns="0" rtlCol="0">
             <a:spAutoFit/>
           </a:bodyPr>
           <a:lstStyle/>
@@ -7626,27 +7811,39 @@
               </a:spcBef>
             </a:pPr>
             <a:r>
-              <a:rPr dirty="0" sz="3800" spc="-20">
+              <a:rPr sz="3800" spc="-20" dirty="0">
+                <a:solidFill>
+                  <a:schemeClr val="bg1"/>
+                </a:solidFill>
                 <a:latin typeface="Segoe UI"/>
                 <a:cs typeface="Segoe UI"/>
               </a:rPr>
               <a:t>BioBERT</a:t>
             </a:r>
             <a:r>
-              <a:rPr dirty="0" sz="3800" spc="-204">
+              <a:rPr sz="3800" spc="-204" dirty="0">
+                <a:solidFill>
+                  <a:schemeClr val="bg1"/>
+                </a:solidFill>
                 <a:latin typeface="Segoe UI"/>
                 <a:cs typeface="Segoe UI"/>
               </a:rPr>
               <a:t> </a:t>
             </a:r>
             <a:r>
-              <a:rPr dirty="0" sz="3800" spc="-10">
+              <a:rPr sz="3800" spc="-10" dirty="0">
+                <a:solidFill>
+                  <a:schemeClr val="bg1"/>
+                </a:solidFill>
                 <a:latin typeface="Segoe UI"/>
                 <a:cs typeface="Segoe UI"/>
               </a:rPr>
               <a:t>Classifier</a:t>
             </a:r>
-            <a:endParaRPr sz="3800">
+            <a:endParaRPr sz="3800" dirty="0">
+              <a:solidFill>
+                <a:schemeClr val="bg1"/>
+              </a:solidFill>
               <a:latin typeface="Segoe UI"/>
               <a:cs typeface="Segoe UI"/>
             </a:endParaRPr>
@@ -7669,7 +7866,7 @@
           </a:prstGeom>
         </p:spPr>
         <p:txBody>
-          <a:bodyPr wrap="square" lIns="0" tIns="16510" rIns="0" bIns="0" rtlCol="0" vert="horz">
+          <a:bodyPr vert="horz" wrap="square" lIns="0" tIns="16510" rIns="0" bIns="0" rtlCol="0">
             <a:spAutoFit/>
           </a:bodyPr>
           <a:lstStyle/>
@@ -7683,27 +7880,39 @@
               </a:spcBef>
             </a:pPr>
             <a:r>
-              <a:rPr dirty="0" sz="3950">
+              <a:rPr sz="3950" dirty="0">
+                <a:solidFill>
+                  <a:schemeClr val="bg1"/>
+                </a:solidFill>
                 <a:latin typeface="Segoe UI"/>
                 <a:cs typeface="Segoe UI"/>
               </a:rPr>
               <a:t>FAISS</a:t>
             </a:r>
             <a:r>
-              <a:rPr dirty="0" sz="3950" spc="-215">
+              <a:rPr sz="3950" spc="-215" dirty="0">
+                <a:solidFill>
+                  <a:schemeClr val="bg1"/>
+                </a:solidFill>
                 <a:latin typeface="Segoe UI"/>
                 <a:cs typeface="Segoe UI"/>
               </a:rPr>
               <a:t> </a:t>
             </a:r>
             <a:r>
-              <a:rPr dirty="0" sz="3950" spc="-10">
+              <a:rPr sz="3950" spc="-10" dirty="0">
+                <a:solidFill>
+                  <a:schemeClr val="bg1"/>
+                </a:solidFill>
                 <a:latin typeface="Segoe UI"/>
                 <a:cs typeface="Segoe UI"/>
               </a:rPr>
               <a:t>Retrieval</a:t>
             </a:r>
-            <a:endParaRPr sz="3950">
+            <a:endParaRPr sz="3950" dirty="0">
+              <a:solidFill>
+                <a:schemeClr val="bg1"/>
+              </a:solidFill>
               <a:latin typeface="Segoe UI"/>
               <a:cs typeface="Segoe UI"/>
             </a:endParaRPr>
@@ -7726,7 +7935,7 @@
           </a:prstGeom>
         </p:spPr>
         <p:txBody>
-          <a:bodyPr wrap="square" lIns="0" tIns="12065" rIns="0" bIns="0" rtlCol="0" vert="horz">
+          <a:bodyPr vert="horz" wrap="square" lIns="0" tIns="12065" rIns="0" bIns="0" rtlCol="0">
             <a:spAutoFit/>
           </a:bodyPr>
           <a:lstStyle/>
@@ -7740,7 +7949,7 @@
               </a:spcBef>
             </a:pPr>
             <a:r>
-              <a:rPr dirty="0" sz="4050" spc="355" i="1">
+              <a:rPr sz="4050" i="1" spc="355" dirty="0">
                 <a:latin typeface="Cambria"/>
                 <a:cs typeface="Cambria"/>
               </a:rPr>
@@ -7769,7 +7978,7 @@
           </a:prstGeom>
         </p:spPr>
         <p:txBody>
-          <a:bodyPr wrap="square" lIns="0" tIns="12065" rIns="0" bIns="0" rtlCol="0" vert="horz">
+          <a:bodyPr vert="horz" wrap="square" lIns="0" tIns="12065" rIns="0" bIns="0" rtlCol="0">
             <a:spAutoFit/>
           </a:bodyPr>
           <a:lstStyle/>
@@ -7783,7 +7992,7 @@
               </a:spcBef>
             </a:pPr>
             <a:r>
-              <a:rPr dirty="0" sz="4050" spc="385" i="1">
+              <a:rPr sz="4050" i="1" spc="385" dirty="0">
                 <a:latin typeface="Cambria"/>
                 <a:cs typeface="Cambria"/>
               </a:rPr>
@@ -7812,7 +8021,7 @@
           </a:prstGeom>
         </p:spPr>
         <p:txBody>
-          <a:bodyPr wrap="square" lIns="0" tIns="12065" rIns="0" bIns="0" rtlCol="0" vert="horz">
+          <a:bodyPr vert="horz" wrap="square" lIns="0" tIns="12065" rIns="0" bIns="0" rtlCol="0">
             <a:spAutoFit/>
           </a:bodyPr>
           <a:lstStyle/>
@@ -7826,27 +8035,39 @@
               </a:spcBef>
             </a:pPr>
             <a:r>
-              <a:rPr dirty="0" sz="3600">
+              <a:rPr sz="3600" dirty="0">
+                <a:solidFill>
+                  <a:schemeClr val="bg1"/>
+                </a:solidFill>
                 <a:latin typeface="Segoe UI"/>
                 <a:cs typeface="Segoe UI"/>
               </a:rPr>
               <a:t>Medical</a:t>
             </a:r>
             <a:r>
-              <a:rPr dirty="0" sz="3600" spc="-160">
+              <a:rPr sz="3600" spc="-160" dirty="0">
+                <a:solidFill>
+                  <a:schemeClr val="bg1"/>
+                </a:solidFill>
                 <a:latin typeface="Segoe UI"/>
                 <a:cs typeface="Segoe UI"/>
               </a:rPr>
               <a:t> </a:t>
             </a:r>
             <a:r>
-              <a:rPr dirty="0" sz="3600" spc="-10">
+              <a:rPr sz="3600" spc="-10" dirty="0">
+                <a:solidFill>
+                  <a:schemeClr val="bg1"/>
+                </a:solidFill>
                 <a:latin typeface="Segoe UI"/>
                 <a:cs typeface="Segoe UI"/>
               </a:rPr>
               <a:t>Answer</a:t>
             </a:r>
-            <a:endParaRPr sz="3600">
+            <a:endParaRPr sz="3600" dirty="0">
+              <a:solidFill>
+                <a:schemeClr val="bg1"/>
+              </a:solidFill>
               <a:latin typeface="Segoe UI"/>
               <a:cs typeface="Segoe UI"/>
             </a:endParaRPr>
@@ -7869,7 +8090,7 @@
           </a:prstGeom>
         </p:spPr>
         <p:txBody>
-          <a:bodyPr wrap="square" lIns="0" tIns="11430" rIns="0" bIns="0" rtlCol="0" vert="horz">
+          <a:bodyPr vert="horz" wrap="square" lIns="0" tIns="11430" rIns="0" bIns="0" rtlCol="0">
             <a:spAutoFit/>
           </a:bodyPr>
           <a:lstStyle/>
@@ -7883,27 +8104,39 @@
               </a:spcBef>
             </a:pPr>
             <a:r>
-              <a:rPr dirty="0" sz="5350">
+              <a:rPr sz="5350" dirty="0">
+                <a:solidFill>
+                  <a:schemeClr val="bg1"/>
+                </a:solidFill>
                 <a:latin typeface="Segoe UI"/>
                 <a:cs typeface="Segoe UI"/>
               </a:rPr>
               <a:t>Groq</a:t>
             </a:r>
             <a:r>
-              <a:rPr dirty="0" sz="5350" spc="-125">
+              <a:rPr sz="5350" spc="-125" dirty="0">
+                <a:solidFill>
+                  <a:schemeClr val="bg1"/>
+                </a:solidFill>
                 <a:latin typeface="Segoe UI"/>
                 <a:cs typeface="Segoe UI"/>
               </a:rPr>
               <a:t> </a:t>
             </a:r>
             <a:r>
-              <a:rPr dirty="0" sz="5350" spc="-20">
+              <a:rPr sz="5350" spc="-20" dirty="0">
+                <a:solidFill>
+                  <a:schemeClr val="bg1"/>
+                </a:solidFill>
                 <a:latin typeface="Segoe UI"/>
                 <a:cs typeface="Segoe UI"/>
               </a:rPr>
               <a:t>Llama</a:t>
             </a:r>
-            <a:endParaRPr sz="5350">
+            <a:endParaRPr sz="5350" dirty="0">
+              <a:solidFill>
+                <a:schemeClr val="bg1"/>
+              </a:solidFill>
               <a:latin typeface="Segoe UI"/>
               <a:cs typeface="Segoe UI"/>
             </a:endParaRPr>
@@ -8149,7 +8382,9 @@
           <p:txBody>
             <a:bodyPr wrap="square" lIns="0" tIns="0" rIns="0" bIns="0" rtlCol="0"/>
             <a:lstStyle/>
-            <a:p/>
+            <a:p>
+              <a:endParaRPr/>
+            </a:p>
           </p:txBody>
         </p:sp>
         <p:pic>
@@ -8267,7 +8502,9 @@
           <p:txBody>
             <a:bodyPr wrap="square" lIns="0" tIns="0" rIns="0" bIns="0" rtlCol="0"/>
             <a:lstStyle/>
-            <a:p/>
+            <a:p>
+              <a:endParaRPr/>
+            </a:p>
           </p:txBody>
         </p:sp>
         <p:pic>
@@ -8385,7 +8622,9 @@
           <p:txBody>
             <a:bodyPr wrap="square" lIns="0" tIns="0" rIns="0" bIns="0" rtlCol="0"/>
             <a:lstStyle/>
-            <a:p/>
+            <a:p>
+              <a:endParaRPr/>
+            </a:p>
           </p:txBody>
         </p:sp>
         <p:pic>
@@ -8557,7 +8796,9 @@
           <p:txBody>
             <a:bodyPr wrap="square" lIns="0" tIns="0" rIns="0" bIns="0" rtlCol="0"/>
             <a:lstStyle/>
-            <a:p/>
+            <a:p>
+              <a:endParaRPr/>
+            </a:p>
           </p:txBody>
         </p:sp>
         <p:pic>
@@ -8829,7 +9070,9 @@
           <p:txBody>
             <a:bodyPr wrap="square" lIns="0" tIns="0" rIns="0" bIns="0" rtlCol="0"/>
             <a:lstStyle/>
-            <a:p/>
+            <a:p>
+              <a:endParaRPr/>
+            </a:p>
           </p:txBody>
         </p:sp>
         <p:pic>
@@ -8972,7 +9215,9 @@
           <p:txBody>
             <a:bodyPr wrap="square" lIns="0" tIns="0" rIns="0" bIns="0" rtlCol="0"/>
             <a:lstStyle/>
-            <a:p/>
+            <a:p>
+              <a:endParaRPr/>
+            </a:p>
           </p:txBody>
         </p:sp>
         <p:pic>
@@ -9270,7 +9515,9 @@
           <p:txBody>
             <a:bodyPr wrap="square" lIns="0" tIns="0" rIns="0" bIns="0" rtlCol="0"/>
             <a:lstStyle/>
-            <a:p/>
+            <a:p>
+              <a:endParaRPr/>
+            </a:p>
           </p:txBody>
         </p:sp>
         <p:pic>
@@ -9395,7 +9642,9 @@
           <p:txBody>
             <a:bodyPr wrap="square" lIns="0" tIns="0" rIns="0" bIns="0" rtlCol="0"/>
             <a:lstStyle/>
-            <a:p/>
+            <a:p>
+              <a:endParaRPr/>
+            </a:p>
           </p:txBody>
         </p:sp>
         <p:pic>
@@ -9577,7 +9826,9 @@
         <p:txBody>
           <a:bodyPr wrap="square" lIns="0" tIns="0" rIns="0" bIns="0" rtlCol="0"/>
           <a:lstStyle/>
-          <a:p/>
+          <a:p>
+            <a:endParaRPr/>
+          </a:p>
         </p:txBody>
       </p:sp>
       <p:sp>
@@ -9664,7 +9915,9 @@
         <p:txBody>
           <a:bodyPr wrap="square" lIns="0" tIns="0" rIns="0" bIns="0" rtlCol="0"/>
           <a:lstStyle/>
-          <a:p/>
+          <a:p>
+            <a:endParaRPr/>
+          </a:p>
         </p:txBody>
       </p:sp>
       <p:sp>
@@ -9760,7 +10013,9 @@
         <p:txBody>
           <a:bodyPr wrap="square" lIns="0" tIns="0" rIns="0" bIns="0" rtlCol="0"/>
           <a:lstStyle/>
-          <a:p/>
+          <a:p>
+            <a:endParaRPr/>
+          </a:p>
         </p:txBody>
       </p:sp>
       <p:pic>
@@ -9878,7 +10133,9 @@
         <p:txBody>
           <a:bodyPr wrap="square" lIns="0" tIns="0" rIns="0" bIns="0" rtlCol="0"/>
           <a:lstStyle/>
-          <a:p/>
+          <a:p>
+            <a:endParaRPr/>
+          </a:p>
         </p:txBody>
       </p:sp>
       <p:sp>
@@ -9974,7 +10231,9 @@
         <p:txBody>
           <a:bodyPr wrap="square" lIns="0" tIns="0" rIns="0" bIns="0" rtlCol="0"/>
           <a:lstStyle/>
-          <a:p/>
+          <a:p>
+            <a:endParaRPr/>
+          </a:p>
         </p:txBody>
       </p:sp>
       <p:grpSp>
@@ -10020,7 +10279,7 @@
             <p:nvPr/>
           </p:nvPicPr>
           <p:blipFill>
-            <a:blip r:embed="rId23" cstate="print"/>
+            <a:blip r:embed="rId21" cstate="print"/>
             <a:stretch>
               <a:fillRect/>
             </a:stretch>
@@ -10129,7 +10388,9 @@
         <p:txBody>
           <a:bodyPr wrap="square" lIns="0" tIns="0" rIns="0" bIns="0" rtlCol="0"/>
           <a:lstStyle/>
-          <a:p/>
+          <a:p>
+            <a:endParaRPr/>
+          </a:p>
         </p:txBody>
       </p:sp>
       <p:sp>
@@ -10216,7 +10477,9 @@
         <p:txBody>
           <a:bodyPr wrap="square" lIns="0" tIns="0" rIns="0" bIns="0" rtlCol="0"/>
           <a:lstStyle/>
-          <a:p/>
+          <a:p>
+            <a:endParaRPr/>
+          </a:p>
         </p:txBody>
       </p:sp>
       <p:grpSp>
@@ -10240,7 +10503,7 @@
             <p:nvPr/>
           </p:nvPicPr>
           <p:blipFill>
-            <a:blip r:embed="rId21" cstate="print"/>
+            <a:blip r:embed="rId22" cstate="print"/>
             <a:stretch>
               <a:fillRect/>
             </a:stretch>
@@ -10262,7 +10525,7 @@
             <p:nvPr/>
           </p:nvPicPr>
           <p:blipFill>
-            <a:blip r:embed="rId22" cstate="print"/>
+            <a:blip r:embed="rId23" cstate="print"/>
             <a:stretch>
               <a:fillRect/>
             </a:stretch>
@@ -10362,7 +10625,9 @@
         <p:txBody>
           <a:bodyPr wrap="square" lIns="0" tIns="0" rIns="0" bIns="0" rtlCol="0"/>
           <a:lstStyle/>
-          <a:p/>
+          <a:p>
+            <a:endParaRPr/>
+          </a:p>
         </p:txBody>
       </p:sp>
       <p:pic>
@@ -10372,7 +10637,7 @@
           <p:nvPr/>
         </p:nvPicPr>
         <p:blipFill>
-          <a:blip r:embed="rId27" cstate="print"/>
+          <a:blip r:embed="rId24" cstate="print"/>
           <a:stretch>
             <a:fillRect/>
           </a:stretch>
@@ -10477,7 +10742,9 @@
         <p:txBody>
           <a:bodyPr wrap="square" lIns="0" tIns="0" rIns="0" bIns="0" rtlCol="0"/>
           <a:lstStyle/>
-          <a:p/>
+          <a:p>
+            <a:endParaRPr/>
+          </a:p>
         </p:txBody>
       </p:sp>
       <p:grpSp>
@@ -10501,7 +10768,7 @@
             <p:nvPr/>
           </p:nvPicPr>
           <p:blipFill>
-            <a:blip r:embed="rId24" cstate="print"/>
+            <a:blip r:embed="rId25" cstate="print"/>
             <a:stretch>
               <a:fillRect/>
             </a:stretch>
@@ -10523,7 +10790,7 @@
             <p:nvPr/>
           </p:nvPicPr>
           <p:blipFill>
-            <a:blip r:embed="rId25" cstate="print"/>
+            <a:blip r:embed="rId26" cstate="print"/>
             <a:stretch>
               <a:fillRect/>
             </a:stretch>
@@ -10545,7 +10812,7 @@
             <p:nvPr/>
           </p:nvPicPr>
           <p:blipFill>
-            <a:blip r:embed="rId26" cstate="print"/>
+            <a:blip r:embed="rId27" cstate="print"/>
             <a:stretch>
               <a:fillRect/>
             </a:stretch>
@@ -10577,7 +10844,7 @@
           </a:prstGeom>
         </p:spPr>
         <p:txBody>
-          <a:bodyPr wrap="square" lIns="0" tIns="12065" rIns="0" bIns="0" rtlCol="0" vert="horz">
+          <a:bodyPr vert="horz" wrap="square" lIns="0" tIns="12065" rIns="0" bIns="0" rtlCol="0">
             <a:spAutoFit/>
           </a:bodyPr>
           <a:lstStyle/>
@@ -10591,7 +10858,7 @@
               </a:spcBef>
             </a:pPr>
             <a:r>
-              <a:rPr dirty="0" sz="4050" spc="380" i="1">
+              <a:rPr sz="4050" i="1" spc="380" dirty="0">
                 <a:latin typeface="Cambria"/>
                 <a:cs typeface="Cambria"/>
               </a:rPr>
@@ -10748,7 +11015,9 @@
         <p:txBody>
           <a:bodyPr wrap="square" lIns="0" tIns="0" rIns="0" bIns="0" rtlCol="0"/>
           <a:lstStyle/>
-          <a:p/>
+          <a:p>
+            <a:endParaRPr/>
+          </a:p>
         </p:txBody>
       </p:sp>
       <p:sp>
@@ -10844,7 +11113,9 @@
         <p:txBody>
           <a:bodyPr wrap="square" lIns="0" tIns="0" rIns="0" bIns="0" rtlCol="0"/>
           <a:lstStyle/>
-          <a:p/>
+          <a:p>
+            <a:endParaRPr/>
+          </a:p>
         </p:txBody>
       </p:sp>
       <p:sp>
@@ -10946,7 +11217,9 @@
         <p:txBody>
           <a:bodyPr wrap="square" lIns="0" tIns="0" rIns="0" bIns="0" rtlCol="0"/>
           <a:lstStyle/>
-          <a:p/>
+          <a:p>
+            <a:endParaRPr/>
+          </a:p>
         </p:txBody>
       </p:sp>
       <p:sp>
@@ -11045,7 +11318,9 @@
         <p:txBody>
           <a:bodyPr wrap="square" lIns="0" tIns="0" rIns="0" bIns="0" rtlCol="0"/>
           <a:lstStyle/>
-          <a:p/>
+          <a:p>
+            <a:endParaRPr/>
+          </a:p>
         </p:txBody>
       </p:sp>
       <p:sp>
@@ -11141,7 +11416,9 @@
         <p:txBody>
           <a:bodyPr wrap="square" lIns="0" tIns="0" rIns="0" bIns="0" rtlCol="0"/>
           <a:lstStyle/>
-          <a:p/>
+          <a:p>
+            <a:endParaRPr/>
+          </a:p>
         </p:txBody>
       </p:sp>
     </p:spTree>
@@ -11184,10 +11461,12 @@
             <a:off x="5001393" y="327022"/>
             <a:ext cx="8285480" cy="702945"/>
           </a:xfrm>
-          <a:prstGeom prst="rect"/>
+          <a:prstGeom prst="rect">
+            <a:avLst/>
+          </a:prstGeom>
         </p:spPr>
         <p:txBody>
-          <a:bodyPr wrap="square" lIns="0" tIns="12065" rIns="0" bIns="0" rtlCol="0" vert="horz">
+          <a:bodyPr vert="horz" wrap="square" lIns="0" tIns="12065" rIns="0" bIns="0" rtlCol="0">
             <a:spAutoFit/>
           </a:bodyPr>
           <a:lstStyle/>
@@ -11201,23 +11480,23 @@
               </a:spcBef>
             </a:pPr>
             <a:r>
-              <a:rPr dirty="0" spc="-390"/>
+              <a:rPr spc="-390" dirty="0"/>
               <a:t>Knowledge</a:t>
             </a:r>
             <a:r>
-              <a:rPr dirty="0" spc="-420"/>
+              <a:rPr spc="-420" dirty="0"/>
               <a:t> </a:t>
             </a:r>
             <a:r>
-              <a:rPr dirty="0" spc="-440"/>
+              <a:rPr spc="-440" dirty="0"/>
               <a:t>Base</a:t>
             </a:r>
             <a:r>
-              <a:rPr dirty="0" spc="-420"/>
+              <a:rPr spc="-420" dirty="0"/>
               <a:t> </a:t>
             </a:r>
             <a:r>
-              <a:rPr dirty="0" spc="-210"/>
+              <a:rPr spc="-210" dirty="0"/>
               <a:t>Construction</a:t>
             </a:r>
           </a:p>
@@ -11307,7 +11586,9 @@
         <p:txBody>
           <a:bodyPr wrap="square" lIns="0" tIns="0" rIns="0" bIns="0" rtlCol="0"/>
           <a:lstStyle/>
-          <a:p/>
+          <a:p>
+            <a:endParaRPr/>
+          </a:p>
         </p:txBody>
       </p:sp>
       <p:sp>
@@ -11391,7 +11672,9 @@
         <p:txBody>
           <a:bodyPr wrap="square" lIns="0" tIns="0" rIns="0" bIns="0" rtlCol="0"/>
           <a:lstStyle/>
-          <a:p/>
+          <a:p>
+            <a:endParaRPr/>
+          </a:p>
         </p:txBody>
       </p:sp>
       <p:sp>
@@ -11469,7 +11752,9 @@
         <p:txBody>
           <a:bodyPr wrap="square" lIns="0" tIns="0" rIns="0" bIns="0" rtlCol="0"/>
           <a:lstStyle/>
-          <a:p/>
+          <a:p>
+            <a:endParaRPr/>
+          </a:p>
         </p:txBody>
       </p:sp>
       <p:sp>
@@ -11556,7 +11841,9 @@
         <p:txBody>
           <a:bodyPr wrap="square" lIns="0" tIns="0" rIns="0" bIns="0" rtlCol="0"/>
           <a:lstStyle/>
-          <a:p/>
+          <a:p>
+            <a:endParaRPr/>
+          </a:p>
         </p:txBody>
       </p:sp>
       <p:grpSp>
@@ -11654,7 +11941,9 @@
           <p:txBody>
             <a:bodyPr wrap="square" lIns="0" tIns="0" rIns="0" bIns="0" rtlCol="0"/>
             <a:lstStyle/>
-            <a:p/>
+            <a:p>
+              <a:endParaRPr/>
+            </a:p>
           </p:txBody>
         </p:sp>
         <p:pic>
@@ -11763,7 +12052,9 @@
           <p:txBody>
             <a:bodyPr wrap="square" lIns="0" tIns="0" rIns="0" bIns="0" rtlCol="0"/>
             <a:lstStyle/>
-            <a:p/>
+            <a:p>
+              <a:endParaRPr/>
+            </a:p>
           </p:txBody>
         </p:sp>
       </p:grpSp>
@@ -11896,7 +12187,9 @@
         <p:txBody>
           <a:bodyPr wrap="square" lIns="0" tIns="0" rIns="0" bIns="0" rtlCol="0"/>
           <a:lstStyle/>
-          <a:p/>
+          <a:p>
+            <a:endParaRPr/>
+          </a:p>
         </p:txBody>
       </p:sp>
       <p:sp>
@@ -11980,7 +12273,9 @@
         <p:txBody>
           <a:bodyPr wrap="square" lIns="0" tIns="0" rIns="0" bIns="0" rtlCol="0"/>
           <a:lstStyle/>
-          <a:p/>
+          <a:p>
+            <a:endParaRPr/>
+          </a:p>
         </p:txBody>
       </p:sp>
       <p:grpSp>
@@ -12313,7 +12608,9 @@
           <p:txBody>
             <a:bodyPr wrap="square" lIns="0" tIns="0" rIns="0" bIns="0" rtlCol="0"/>
             <a:lstStyle/>
-            <a:p/>
+            <a:p>
+              <a:endParaRPr/>
+            </a:p>
           </p:txBody>
         </p:sp>
         <p:pic>
@@ -12422,7 +12719,9 @@
           <p:txBody>
             <a:bodyPr wrap="square" lIns="0" tIns="0" rIns="0" bIns="0" rtlCol="0"/>
             <a:lstStyle/>
-            <a:p/>
+            <a:p>
+              <a:endParaRPr/>
+            </a:p>
           </p:txBody>
         </p:sp>
         <p:pic>
@@ -12516,7 +12815,9 @@
           <p:txBody>
             <a:bodyPr wrap="square" lIns="0" tIns="0" rIns="0" bIns="0" rtlCol="0"/>
             <a:lstStyle/>
-            <a:p/>
+            <a:p>
+              <a:endParaRPr/>
+            </a:p>
           </p:txBody>
         </p:sp>
         <p:pic>
@@ -12759,7 +13060,9 @@
           <p:txBody>
             <a:bodyPr wrap="square" lIns="0" tIns="0" rIns="0" bIns="0" rtlCol="0"/>
             <a:lstStyle/>
-            <a:p/>
+            <a:p>
+              <a:endParaRPr/>
+            </a:p>
           </p:txBody>
         </p:sp>
         <p:sp>
@@ -12843,7 +13146,9 @@
           <p:txBody>
             <a:bodyPr wrap="square" lIns="0" tIns="0" rIns="0" bIns="0" rtlCol="0"/>
             <a:lstStyle/>
-            <a:p/>
+            <a:p>
+              <a:endParaRPr/>
+            </a:p>
           </p:txBody>
         </p:sp>
         <p:sp>
@@ -12945,7 +13250,9 @@
           <p:txBody>
             <a:bodyPr wrap="square" lIns="0" tIns="0" rIns="0" bIns="0" rtlCol="0"/>
             <a:lstStyle/>
-            <a:p/>
+            <a:p>
+              <a:endParaRPr/>
+            </a:p>
           </p:txBody>
         </p:sp>
         <p:sp>
@@ -13008,7 +13315,9 @@
           <p:txBody>
             <a:bodyPr wrap="square" lIns="0" tIns="0" rIns="0" bIns="0" rtlCol="0"/>
             <a:lstStyle/>
-            <a:p/>
+            <a:p>
+              <a:endParaRPr/>
+            </a:p>
           </p:txBody>
         </p:sp>
         <p:sp>
@@ -13107,7 +13416,9 @@
           <p:txBody>
             <a:bodyPr wrap="square" lIns="0" tIns="0" rIns="0" bIns="0" rtlCol="0"/>
             <a:lstStyle/>
-            <a:p/>
+            <a:p>
+              <a:endParaRPr/>
+            </a:p>
           </p:txBody>
         </p:sp>
         <p:sp>
@@ -13173,7 +13484,9 @@
           <p:txBody>
             <a:bodyPr wrap="square" lIns="0" tIns="0" rIns="0" bIns="0" rtlCol="0"/>
             <a:lstStyle/>
-            <a:p/>
+            <a:p>
+              <a:endParaRPr/>
+            </a:p>
           </p:txBody>
         </p:sp>
         <p:sp>
@@ -13272,7 +13585,9 @@
           <p:txBody>
             <a:bodyPr wrap="square" lIns="0" tIns="0" rIns="0" bIns="0" rtlCol="0"/>
             <a:lstStyle/>
-            <a:p/>
+            <a:p>
+              <a:endParaRPr/>
+            </a:p>
           </p:txBody>
         </p:sp>
       </p:grpSp>
@@ -13292,7 +13607,7 @@
           </a:prstGeom>
         </p:spPr>
         <p:txBody>
-          <a:bodyPr wrap="square" lIns="0" tIns="15875" rIns="0" bIns="0" rtlCol="0" vert="horz">
+          <a:bodyPr vert="horz" wrap="square" lIns="0" tIns="15875" rIns="0" bIns="0" rtlCol="0">
             <a:spAutoFit/>
           </a:bodyPr>
           <a:lstStyle/>
@@ -13306,41 +13621,41 @@
               </a:spcBef>
             </a:pPr>
             <a:r>
-              <a:rPr dirty="0" sz="3300" spc="390" i="1">
+              <a:rPr sz="3300" i="1" spc="390" dirty="0">
                 <a:latin typeface="Cambria"/>
                 <a:cs typeface="Cambria"/>
               </a:rPr>
               <a:t>Offline</a:t>
             </a:r>
             <a:r>
-              <a:rPr dirty="0" sz="3300" spc="550" i="1">
+              <a:rPr sz="3300" i="1" spc="550" dirty="0">
                 <a:latin typeface="Cambria"/>
                 <a:cs typeface="Cambria"/>
               </a:rPr>
               <a:t> </a:t>
             </a:r>
             <a:r>
-              <a:rPr dirty="0" sz="3300" spc="385" i="1">
+              <a:rPr sz="3300" i="1" spc="385" dirty="0">
                 <a:latin typeface="Cambria"/>
                 <a:cs typeface="Cambria"/>
               </a:rPr>
               <a:t>Data</a:t>
             </a:r>
             <a:r>
-              <a:rPr dirty="0" sz="3300" spc="555" i="1">
+              <a:rPr sz="3300" i="1" spc="555" dirty="0">
                 <a:latin typeface="Cambria"/>
                 <a:cs typeface="Cambria"/>
               </a:rPr>
               <a:t> </a:t>
             </a:r>
             <a:r>
-              <a:rPr dirty="0" sz="3300" spc="325" i="1">
+              <a:rPr sz="3300" i="1" spc="325" dirty="0">
                 <a:latin typeface="Cambria"/>
                 <a:cs typeface="Cambria"/>
               </a:rPr>
               <a:t>Pipeline</a:t>
             </a:r>
-            <a:endParaRPr sz="3300">
+            <a:endParaRPr lang="en-US" sz="3300" dirty="0">
               <a:latin typeface="Cambria"/>
               <a:cs typeface="Cambria"/>
             </a:endParaRPr>
@@ -13354,39 +13669,51 @@
                 <a:spcPts val="15"/>
               </a:spcBef>
             </a:pPr>
-            <a:endParaRPr sz="3300">
+            <a:endParaRPr lang="en-US" sz="3300" dirty="0">
               <a:latin typeface="Cambria"/>
               <a:cs typeface="Cambria"/>
             </a:endParaRPr>
           </a:p>
           <a:p>
-            <a:pPr algn="ctr" marR="711835">
+            <a:pPr marR="711835" algn="ctr">
               <a:lnSpc>
                 <a:spcPct val="100000"/>
               </a:lnSpc>
             </a:pPr>
             <a:r>
-              <a:rPr dirty="0" sz="2350">
+              <a:rPr sz="2350" dirty="0" err="1">
+                <a:solidFill>
+                  <a:schemeClr val="bg1"/>
+                </a:solidFill>
                 <a:latin typeface="Segoe UI"/>
                 <a:cs typeface="Segoe UI"/>
               </a:rPr>
               <a:t>PubMedQA</a:t>
             </a:r>
             <a:r>
-              <a:rPr dirty="0" sz="2350" spc="-105">
+              <a:rPr sz="2350" spc="-105" dirty="0">
+                <a:solidFill>
+                  <a:schemeClr val="bg1"/>
+                </a:solidFill>
                 <a:latin typeface="Segoe UI"/>
                 <a:cs typeface="Segoe UI"/>
               </a:rPr>
               <a:t> </a:t>
             </a:r>
             <a:r>
-              <a:rPr dirty="0" sz="2350" spc="-10">
+              <a:rPr sz="2350" spc="-10" dirty="0">
+                <a:solidFill>
+                  <a:schemeClr val="bg1"/>
+                </a:solidFill>
                 <a:latin typeface="Segoe UI"/>
                 <a:cs typeface="Segoe UI"/>
               </a:rPr>
               <a:t>Dataset</a:t>
             </a:r>
-            <a:endParaRPr sz="2350">
+            <a:endParaRPr sz="2350" dirty="0">
+              <a:solidFill>
+                <a:schemeClr val="bg1"/>
+              </a:solidFill>
               <a:latin typeface="Segoe UI"/>
               <a:cs typeface="Segoe UI"/>
             </a:endParaRPr>
@@ -13477,7 +13804,9 @@
         <p:txBody>
           <a:bodyPr wrap="square" lIns="0" tIns="0" rIns="0" bIns="0" rtlCol="0"/>
           <a:lstStyle/>
-          <a:p/>
+          <a:p>
+            <a:endParaRPr/>
+          </a:p>
         </p:txBody>
       </p:sp>
       <p:sp>
@@ -13573,7 +13902,9 @@
         <p:txBody>
           <a:bodyPr wrap="square" lIns="0" tIns="0" rIns="0" bIns="0" rtlCol="0"/>
           <a:lstStyle/>
-          <a:p/>
+          <a:p>
+            <a:endParaRPr/>
+          </a:p>
         </p:txBody>
       </p:sp>
       <p:sp>
@@ -13651,7 +13982,9 @@
         <p:txBody>
           <a:bodyPr wrap="square" lIns="0" tIns="0" rIns="0" bIns="0" rtlCol="0"/>
           <a:lstStyle/>
-          <a:p/>
+          <a:p>
+            <a:endParaRPr/>
+          </a:p>
         </p:txBody>
       </p:sp>
       <p:sp>
@@ -13670,7 +14003,7 @@
           </a:prstGeom>
         </p:spPr>
         <p:txBody>
-          <a:bodyPr wrap="square" lIns="0" tIns="14604" rIns="0" bIns="0" rtlCol="0" vert="horz">
+          <a:bodyPr vert="horz" wrap="square" lIns="0" tIns="14604" rIns="0" bIns="0" rtlCol="0">
             <a:spAutoFit/>
           </a:bodyPr>
           <a:lstStyle/>
@@ -13684,20 +14017,29 @@
               </a:spcBef>
             </a:pPr>
             <a:r>
-              <a:rPr dirty="0" sz="3000">
+              <a:rPr sz="3000" dirty="0">
+                <a:solidFill>
+                  <a:schemeClr val="bg1"/>
+                </a:solidFill>
                 <a:latin typeface="Segoe UI"/>
                 <a:cs typeface="Segoe UI"/>
               </a:rPr>
               <a:t>Data </a:t>
             </a:r>
             <a:r>
-              <a:rPr dirty="0" sz="3000" spc="-10">
+              <a:rPr sz="3000" spc="-10" dirty="0">
+                <a:solidFill>
+                  <a:schemeClr val="bg1"/>
+                </a:solidFill>
                 <a:latin typeface="Segoe UI"/>
                 <a:cs typeface="Segoe UI"/>
               </a:rPr>
               <a:t>Preparation</a:t>
             </a:r>
-            <a:endParaRPr sz="3000">
+            <a:endParaRPr sz="3000" dirty="0">
+              <a:solidFill>
+                <a:schemeClr val="bg1"/>
+              </a:solidFill>
               <a:latin typeface="Segoe UI"/>
               <a:cs typeface="Segoe UI"/>
             </a:endParaRPr>
@@ -13720,12 +14062,12 @@
           </a:prstGeom>
         </p:spPr>
         <p:txBody>
-          <a:bodyPr wrap="square" lIns="0" tIns="11430" rIns="0" bIns="0" rtlCol="0" vert="horz">
+          <a:bodyPr vert="horz" wrap="square" lIns="0" tIns="11430" rIns="0" bIns="0" rtlCol="0">
             <a:spAutoFit/>
           </a:bodyPr>
           <a:lstStyle/>
           <a:p>
-            <a:pPr algn="ctr" marR="16510">
+            <a:pPr marR="16510" algn="ctr">
               <a:lnSpc>
                 <a:spcPct val="100000"/>
               </a:lnSpc>
@@ -13734,33 +14076,45 @@
               </a:spcBef>
             </a:pPr>
             <a:r>
-              <a:rPr dirty="0" sz="3550">
+              <a:rPr sz="3550" dirty="0">
+                <a:solidFill>
+                  <a:schemeClr val="bg1"/>
+                </a:solidFill>
                 <a:latin typeface="Segoe UI"/>
                 <a:cs typeface="Segoe UI"/>
               </a:rPr>
               <a:t>Category</a:t>
             </a:r>
             <a:r>
-              <a:rPr dirty="0" sz="3550" spc="-114">
+              <a:rPr sz="3550" spc="-114" dirty="0">
+                <a:solidFill>
+                  <a:schemeClr val="bg1"/>
+                </a:solidFill>
                 <a:latin typeface="Segoe UI"/>
                 <a:cs typeface="Segoe UI"/>
               </a:rPr>
               <a:t> </a:t>
             </a:r>
             <a:r>
-              <a:rPr dirty="0" sz="3550" spc="-10">
+              <a:rPr sz="3550" spc="-10" dirty="0">
+                <a:solidFill>
+                  <a:schemeClr val="bg1"/>
+                </a:solidFill>
                 <a:latin typeface="Segoe UI"/>
                 <a:cs typeface="Segoe UI"/>
               </a:rPr>
               <a:t>Labelling</a:t>
             </a:r>
-            <a:endParaRPr sz="3550">
+            <a:endParaRPr sz="3550" dirty="0">
+              <a:solidFill>
+                <a:schemeClr val="bg1"/>
+              </a:solidFill>
               <a:latin typeface="Segoe UI"/>
               <a:cs typeface="Segoe UI"/>
             </a:endParaRPr>
           </a:p>
           <a:p>
-            <a:pPr algn="ctr" marL="12700" marR="5080">
+            <a:pPr marL="12700" marR="5080" algn="ctr">
               <a:lnSpc>
                 <a:spcPts val="14630"/>
               </a:lnSpc>
@@ -13769,62 +14123,89 @@
               </a:spcBef>
             </a:pPr>
             <a:r>
-              <a:rPr dirty="0" sz="3550">
+              <a:rPr sz="3550" dirty="0">
+                <a:solidFill>
+                  <a:schemeClr val="bg1"/>
+                </a:solidFill>
                 <a:latin typeface="Segoe UI"/>
                 <a:cs typeface="Segoe UI"/>
               </a:rPr>
               <a:t>Embedding</a:t>
             </a:r>
             <a:r>
-              <a:rPr dirty="0" sz="3550" spc="-225">
+              <a:rPr sz="3550" spc="-225" dirty="0">
+                <a:solidFill>
+                  <a:schemeClr val="bg1"/>
+                </a:solidFill>
                 <a:latin typeface="Segoe UI"/>
                 <a:cs typeface="Segoe UI"/>
               </a:rPr>
               <a:t> </a:t>
             </a:r>
             <a:r>
-              <a:rPr dirty="0" sz="3550" spc="-10">
+              <a:rPr sz="3550" spc="-10" dirty="0">
+                <a:solidFill>
+                  <a:schemeClr val="bg1"/>
+                </a:solidFill>
                 <a:latin typeface="Segoe UI"/>
                 <a:cs typeface="Segoe UI"/>
               </a:rPr>
               <a:t>Generation </a:t>
             </a:r>
             <a:r>
-              <a:rPr dirty="0" sz="3550" spc="-20">
+              <a:rPr sz="3550" spc="-20" dirty="0">
+                <a:solidFill>
+                  <a:schemeClr val="bg1"/>
+                </a:solidFill>
                 <a:latin typeface="Segoe UI"/>
                 <a:cs typeface="Segoe UI"/>
               </a:rPr>
               <a:t>FAISS</a:t>
             </a:r>
             <a:r>
-              <a:rPr dirty="0" sz="3550" spc="-200">
+              <a:rPr sz="3550" spc="-200" dirty="0">
+                <a:solidFill>
+                  <a:schemeClr val="bg1"/>
+                </a:solidFill>
                 <a:latin typeface="Segoe UI"/>
                 <a:cs typeface="Segoe UI"/>
               </a:rPr>
               <a:t> </a:t>
             </a:r>
             <a:r>
-              <a:rPr dirty="0" sz="3550" spc="-20">
+              <a:rPr sz="3550" spc="-20" dirty="0">
+                <a:solidFill>
+                  <a:schemeClr val="bg1"/>
+                </a:solidFill>
                 <a:latin typeface="Segoe UI"/>
                 <a:cs typeface="Segoe UI"/>
               </a:rPr>
               <a:t>Vector</a:t>
             </a:r>
             <a:r>
-              <a:rPr dirty="0" sz="3550" spc="-200">
+              <a:rPr sz="3550" spc="-200" dirty="0">
+                <a:solidFill>
+                  <a:schemeClr val="bg1"/>
+                </a:solidFill>
                 <a:latin typeface="Segoe UI"/>
                 <a:cs typeface="Segoe UI"/>
               </a:rPr>
               <a:t> </a:t>
             </a:r>
             <a:r>
-              <a:rPr dirty="0" sz="3550" spc="-10">
+              <a:rPr sz="3550" spc="-10" dirty="0">
+                <a:solidFill>
+                  <a:schemeClr val="bg1"/>
+                </a:solidFill>
                 <a:latin typeface="Segoe UI"/>
                 <a:cs typeface="Segoe UI"/>
               </a:rPr>
               <a:t>Database</a:t>
             </a:r>
-            <a:endParaRPr sz="3550">
+            <a:endParaRPr sz="3550" dirty="0">
+              <a:solidFill>
+                <a:schemeClr val="bg1"/>
+              </a:solidFill>
               <a:latin typeface="Segoe UI"/>
               <a:cs typeface="Segoe UI"/>
             </a:endParaRPr>
@@ -13889,10 +14270,12 @@
           </p:nvPr>
         </p:nvSpPr>
         <p:spPr>
-          <a:prstGeom prst="rect"/>
+          <a:prstGeom prst="rect">
+            <a:avLst/>
+          </a:prstGeom>
         </p:spPr>
         <p:txBody>
-          <a:bodyPr wrap="square" lIns="0" tIns="219467" rIns="0" bIns="0" rtlCol="0" vert="horz">
+          <a:bodyPr vert="horz" wrap="square" lIns="0" tIns="219467" rIns="0" bIns="0" rtlCol="0">
             <a:spAutoFit/>
           </a:bodyPr>
           <a:lstStyle/>
@@ -13906,7 +14289,7 @@
               </a:spcBef>
             </a:pPr>
             <a:r>
-              <a:rPr dirty="0" sz="4050" spc="425" i="1">
+              <a:rPr sz="4050" i="1" spc="425" dirty="0">
                 <a:solidFill>
                   <a:srgbClr val="000000"/>
                 </a:solidFill>
@@ -13916,7 +14299,7 @@
               <a:t>What</a:t>
             </a:r>
             <a:r>
-              <a:rPr dirty="0" sz="4050" spc="660" i="1">
+              <a:rPr sz="4050" i="1" spc="660" dirty="0">
                 <a:solidFill>
                   <a:srgbClr val="000000"/>
                 </a:solidFill>
@@ -13926,7 +14309,7 @@
               <a:t> </a:t>
             </a:r>
             <a:r>
-              <a:rPr dirty="0" sz="4050" spc="425" i="1">
+              <a:rPr sz="4050" i="1" spc="425" dirty="0">
                 <a:solidFill>
                   <a:srgbClr val="000000"/>
                 </a:solidFill>
@@ -13936,7 +14319,7 @@
               <a:t>Happens</a:t>
             </a:r>
             <a:r>
-              <a:rPr dirty="0" sz="4050" spc="660" i="1">
+              <a:rPr sz="4050" i="1" spc="660" dirty="0">
                 <a:solidFill>
                   <a:srgbClr val="000000"/>
                 </a:solidFill>
@@ -13946,7 +14329,7 @@
               <a:t> </a:t>
             </a:r>
             <a:r>
-              <a:rPr dirty="0" sz="4050" spc="450" i="1">
+              <a:rPr sz="4050" i="1" spc="450" dirty="0">
                 <a:solidFill>
                   <a:srgbClr val="000000"/>
                 </a:solidFill>
@@ -13956,7 +14339,7 @@
               <a:t>When</a:t>
             </a:r>
             <a:r>
-              <a:rPr dirty="0" sz="4050" spc="665" i="1">
+              <a:rPr sz="4050" i="1" spc="665" dirty="0">
                 <a:solidFill>
                   <a:srgbClr val="000000"/>
                 </a:solidFill>
@@ -13966,7 +14349,7 @@
               <a:t> </a:t>
             </a:r>
             <a:r>
-              <a:rPr dirty="0" sz="4050" spc="170" i="1">
+              <a:rPr sz="4050" i="1" spc="170" dirty="0">
                 <a:solidFill>
                   <a:srgbClr val="000000"/>
                 </a:solidFill>
@@ -13976,7 +14359,7 @@
               <a:t>a</a:t>
             </a:r>
             <a:r>
-              <a:rPr dirty="0" sz="4050" spc="660" i="1">
+              <a:rPr sz="4050" i="1" spc="660" dirty="0">
                 <a:solidFill>
                   <a:srgbClr val="000000"/>
                 </a:solidFill>
@@ -13986,7 +14369,7 @@
               <a:t> </a:t>
             </a:r>
             <a:r>
-              <a:rPr dirty="0" sz="4050" spc="375" i="1">
+              <a:rPr sz="4050" i="1" spc="375" dirty="0">
                 <a:solidFill>
                   <a:srgbClr val="000000"/>
                 </a:solidFill>
@@ -13996,7 +14379,7 @@
               <a:t>User</a:t>
             </a:r>
             <a:r>
-              <a:rPr dirty="0" sz="4050" spc="660" i="1">
+              <a:rPr sz="4050" i="1" spc="660" dirty="0">
                 <a:solidFill>
                   <a:srgbClr val="000000"/>
                 </a:solidFill>
@@ -14006,7 +14389,7 @@
               <a:t> </a:t>
             </a:r>
             <a:r>
-              <a:rPr dirty="0" sz="4050" spc="340" i="1">
+              <a:rPr sz="4050" i="1" spc="340" dirty="0">
                 <a:solidFill>
                   <a:srgbClr val="000000"/>
                 </a:solidFill>
@@ -14016,7 +14399,7 @@
               <a:t>Asks</a:t>
             </a:r>
             <a:r>
-              <a:rPr dirty="0" sz="4050" spc="660" i="1">
+              <a:rPr sz="4050" i="1" spc="660" dirty="0">
                 <a:solidFill>
                   <a:srgbClr val="000000"/>
                 </a:solidFill>
@@ -14026,7 +14409,7 @@
               <a:t> </a:t>
             </a:r>
             <a:r>
-              <a:rPr dirty="0" sz="4050" spc="170" i="1">
+              <a:rPr sz="4050" i="1" spc="170" dirty="0">
                 <a:solidFill>
                   <a:srgbClr val="000000"/>
                 </a:solidFill>
@@ -14036,7 +14419,7 @@
               <a:t>a</a:t>
             </a:r>
             <a:r>
-              <a:rPr dirty="0" sz="4050" spc="660" i="1">
+              <a:rPr sz="4050" i="1" spc="660" dirty="0">
                 <a:solidFill>
                   <a:srgbClr val="000000"/>
                 </a:solidFill>
@@ -14046,7 +14429,7 @@
               <a:t> </a:t>
             </a:r>
             <a:r>
-              <a:rPr dirty="0" sz="4050" spc="405" i="1">
+              <a:rPr sz="4050" i="1" spc="405" dirty="0">
                 <a:solidFill>
                   <a:srgbClr val="000000"/>
                 </a:solidFill>
@@ -14158,7 +14541,9 @@
         <p:txBody>
           <a:bodyPr wrap="square" lIns="0" tIns="0" rIns="0" bIns="0" rtlCol="0"/>
           <a:lstStyle/>
-          <a:p/>
+          <a:p>
+            <a:endParaRPr/>
+          </a:p>
         </p:txBody>
       </p:sp>
       <p:sp>
@@ -14177,7 +14562,7 @@
           </a:prstGeom>
         </p:spPr>
         <p:txBody>
-          <a:bodyPr wrap="square" lIns="0" tIns="11430" rIns="0" bIns="0" rtlCol="0" vert="horz">
+          <a:bodyPr vert="horz" wrap="square" lIns="0" tIns="11430" rIns="0" bIns="0" rtlCol="0">
             <a:spAutoFit/>
           </a:bodyPr>
           <a:lstStyle/>
@@ -14191,27 +14576,39 @@
               </a:spcBef>
             </a:pPr>
             <a:r>
-              <a:rPr dirty="0" sz="2800">
+              <a:rPr sz="2800" dirty="0">
+                <a:solidFill>
+                  <a:schemeClr val="bg1"/>
+                </a:solidFill>
                 <a:latin typeface="Segoe UI"/>
                 <a:cs typeface="Segoe UI"/>
               </a:rPr>
               <a:t>User</a:t>
             </a:r>
             <a:r>
-              <a:rPr dirty="0" sz="2800" spc="-80">
+              <a:rPr sz="2800" spc="-80" dirty="0">
+                <a:solidFill>
+                  <a:schemeClr val="bg1"/>
+                </a:solidFill>
                 <a:latin typeface="Segoe UI"/>
                 <a:cs typeface="Segoe UI"/>
               </a:rPr>
               <a:t> </a:t>
             </a:r>
             <a:r>
-              <a:rPr dirty="0" sz="2800" spc="-10">
+              <a:rPr sz="2800" spc="-10" dirty="0">
+                <a:solidFill>
+                  <a:schemeClr val="bg1"/>
+                </a:solidFill>
                 <a:latin typeface="Segoe UI"/>
                 <a:cs typeface="Segoe UI"/>
               </a:rPr>
               <a:t>Question</a:t>
             </a:r>
-            <a:endParaRPr sz="2800">
+            <a:endParaRPr sz="2800" dirty="0">
+              <a:solidFill>
+                <a:schemeClr val="bg1"/>
+              </a:solidFill>
               <a:latin typeface="Segoe UI"/>
               <a:cs typeface="Segoe UI"/>
             </a:endParaRPr>
@@ -14314,7 +14711,9 @@
         <p:txBody>
           <a:bodyPr wrap="square" lIns="0" tIns="0" rIns="0" bIns="0" rtlCol="0"/>
           <a:lstStyle/>
-          <a:p/>
+          <a:p>
+            <a:endParaRPr/>
+          </a:p>
         </p:txBody>
       </p:sp>
       <p:sp>
@@ -14326,14 +14725,14 @@
         <p:spPr>
           <a:xfrm>
             <a:off x="6991345" y="2424588"/>
-            <a:ext cx="3061335" cy="1033144"/>
+            <a:ext cx="3061335" cy="984629"/>
           </a:xfrm>
           <a:prstGeom prst="rect">
             <a:avLst/>
           </a:prstGeom>
         </p:spPr>
         <p:txBody>
-          <a:bodyPr wrap="square" lIns="0" tIns="11430" rIns="0" bIns="0" rtlCol="0" vert="horz">
+          <a:bodyPr vert="horz" wrap="square" lIns="0" tIns="11430" rIns="0" bIns="0" rtlCol="0">
             <a:spAutoFit/>
           </a:bodyPr>
           <a:lstStyle/>
@@ -14347,48 +14746,69 @@
               </a:spcBef>
             </a:pPr>
             <a:r>
-              <a:rPr dirty="0" sz="2850">
+              <a:rPr sz="2850" dirty="0">
+                <a:solidFill>
+                  <a:schemeClr val="bg1"/>
+                </a:solidFill>
                 <a:latin typeface="Segoe UI"/>
                 <a:cs typeface="Segoe UI"/>
               </a:rPr>
               <a:t>Category</a:t>
             </a:r>
             <a:r>
-              <a:rPr dirty="0" sz="2850" spc="110">
+              <a:rPr sz="2850" spc="110" dirty="0">
+                <a:solidFill>
+                  <a:schemeClr val="bg1"/>
+                </a:solidFill>
                 <a:latin typeface="Segoe UI"/>
                 <a:cs typeface="Segoe UI"/>
               </a:rPr>
               <a:t> </a:t>
             </a:r>
             <a:r>
-              <a:rPr dirty="0" sz="2850" spc="-10">
+              <a:rPr sz="2850" spc="-10" dirty="0">
+                <a:solidFill>
+                  <a:schemeClr val="bg1"/>
+                </a:solidFill>
                 <a:latin typeface="Segoe UI"/>
                 <a:cs typeface="Segoe UI"/>
               </a:rPr>
               <a:t>Selection </a:t>
             </a:r>
             <a:r>
-              <a:rPr dirty="0" sz="2850">
+              <a:rPr sz="2850" dirty="0">
+                <a:solidFill>
+                  <a:schemeClr val="bg1"/>
+                </a:solidFill>
                 <a:latin typeface="Segoe UI"/>
                 <a:cs typeface="Segoe UI"/>
               </a:rPr>
               <a:t>(Or</a:t>
             </a:r>
             <a:r>
-              <a:rPr dirty="0" sz="2850" spc="45">
+              <a:rPr sz="2850" spc="45" dirty="0">
+                <a:solidFill>
+                  <a:schemeClr val="bg1"/>
+                </a:solidFill>
                 <a:latin typeface="Segoe UI"/>
                 <a:cs typeface="Segoe UI"/>
               </a:rPr>
               <a:t> </a:t>
             </a:r>
             <a:r>
-              <a:rPr dirty="0" sz="2850" spc="-10">
+              <a:rPr sz="2850" spc="-10" dirty="0">
+                <a:solidFill>
+                  <a:schemeClr val="bg1"/>
+                </a:solidFill>
                 <a:latin typeface="Segoe UI"/>
                 <a:cs typeface="Segoe UI"/>
               </a:rPr>
               <a:t>prediction)</a:t>
             </a:r>
-            <a:endParaRPr sz="2850">
+            <a:endParaRPr sz="2850" dirty="0">
+              <a:solidFill>
+                <a:schemeClr val="bg1"/>
+              </a:solidFill>
               <a:latin typeface="Segoe UI"/>
               <a:cs typeface="Segoe UI"/>
             </a:endParaRPr>
@@ -14463,7 +14883,9 @@
           <p:txBody>
             <a:bodyPr wrap="square" lIns="0" tIns="0" rIns="0" bIns="0" rtlCol="0"/>
             <a:lstStyle/>
-            <a:p/>
+            <a:p>
+              <a:endParaRPr/>
+            </a:p>
           </p:txBody>
         </p:sp>
         <p:sp>
@@ -14562,7 +14984,9 @@
           <p:txBody>
             <a:bodyPr wrap="square" lIns="0" tIns="0" rIns="0" bIns="0" rtlCol="0"/>
             <a:lstStyle/>
-            <a:p/>
+            <a:p>
+              <a:endParaRPr/>
+            </a:p>
           </p:txBody>
         </p:sp>
       </p:grpSp>
@@ -14582,7 +15006,7 @@
           </a:prstGeom>
         </p:spPr>
         <p:txBody>
-          <a:bodyPr wrap="square" lIns="0" tIns="17145" rIns="0" bIns="0" rtlCol="0" vert="horz">
+          <a:bodyPr vert="horz" wrap="square" lIns="0" tIns="17145" rIns="0" bIns="0" rtlCol="0">
             <a:spAutoFit/>
           </a:bodyPr>
           <a:lstStyle/>
@@ -14596,27 +15020,39 @@
               </a:spcBef>
             </a:pPr>
             <a:r>
-              <a:rPr dirty="0" sz="2850">
+              <a:rPr sz="2850" dirty="0">
+                <a:solidFill>
+                  <a:schemeClr val="bg1"/>
+                </a:solidFill>
                 <a:latin typeface="Segoe UI"/>
                 <a:cs typeface="Segoe UI"/>
               </a:rPr>
               <a:t>Embedding</a:t>
             </a:r>
             <a:r>
-              <a:rPr dirty="0" sz="2850" spc="114">
+              <a:rPr sz="2850" spc="114" dirty="0">
+                <a:solidFill>
+                  <a:schemeClr val="bg1"/>
+                </a:solidFill>
                 <a:latin typeface="Segoe UI"/>
                 <a:cs typeface="Segoe UI"/>
               </a:rPr>
               <a:t> </a:t>
             </a:r>
             <a:r>
-              <a:rPr dirty="0" sz="2850" spc="-10">
+              <a:rPr sz="2850" spc="-10" dirty="0">
+                <a:solidFill>
+                  <a:schemeClr val="bg1"/>
+                </a:solidFill>
                 <a:latin typeface="Segoe UI"/>
                 <a:cs typeface="Segoe UI"/>
               </a:rPr>
               <a:t>Generation</a:t>
             </a:r>
-            <a:endParaRPr sz="2850">
+            <a:endParaRPr sz="2850" dirty="0">
+              <a:solidFill>
+                <a:schemeClr val="bg1"/>
+              </a:solidFill>
               <a:latin typeface="Segoe UI"/>
               <a:cs typeface="Segoe UI"/>
             </a:endParaRPr>
@@ -14691,7 +15127,9 @@
           <p:txBody>
             <a:bodyPr wrap="square" lIns="0" tIns="0" rIns="0" bIns="0" rtlCol="0"/>
             <a:lstStyle/>
-            <a:p/>
+            <a:p>
+              <a:endParaRPr/>
+            </a:p>
           </p:txBody>
         </p:sp>
         <p:sp>
@@ -14790,7 +15228,9 @@
           <p:txBody>
             <a:bodyPr wrap="square" lIns="0" tIns="0" rIns="0" bIns="0" rtlCol="0"/>
             <a:lstStyle/>
-            <a:p/>
+            <a:p>
+              <a:endParaRPr/>
+            </a:p>
           </p:txBody>
         </p:sp>
       </p:grpSp>
@@ -14810,7 +15250,7 @@
           </a:prstGeom>
         </p:spPr>
         <p:txBody>
-          <a:bodyPr wrap="square" lIns="0" tIns="11430" rIns="0" bIns="0" rtlCol="0" vert="horz">
+          <a:bodyPr vert="horz" wrap="square" lIns="0" tIns="11430" rIns="0" bIns="0" rtlCol="0">
             <a:spAutoFit/>
           </a:bodyPr>
           <a:lstStyle/>
@@ -14824,27 +15264,39 @@
               </a:spcBef>
             </a:pPr>
             <a:r>
-              <a:rPr dirty="0" sz="3700" spc="-20">
+              <a:rPr sz="3700" spc="-20" dirty="0">
+                <a:solidFill>
+                  <a:schemeClr val="bg1"/>
+                </a:solidFill>
                 <a:latin typeface="Segoe UI"/>
                 <a:cs typeface="Segoe UI"/>
               </a:rPr>
               <a:t>FAISS</a:t>
             </a:r>
             <a:r>
-              <a:rPr dirty="0" sz="3700" spc="-220">
+              <a:rPr sz="3700" spc="-220" dirty="0">
+                <a:solidFill>
+                  <a:schemeClr val="bg1"/>
+                </a:solidFill>
                 <a:latin typeface="Segoe UI"/>
                 <a:cs typeface="Segoe UI"/>
               </a:rPr>
               <a:t> </a:t>
             </a:r>
             <a:r>
-              <a:rPr dirty="0" sz="3700" spc="-10">
+              <a:rPr sz="3700" spc="-10" dirty="0">
+                <a:solidFill>
+                  <a:schemeClr val="bg1"/>
+                </a:solidFill>
                 <a:latin typeface="Segoe UI"/>
                 <a:cs typeface="Segoe UI"/>
               </a:rPr>
               <a:t>Search</a:t>
             </a:r>
-            <a:endParaRPr sz="3700">
+            <a:endParaRPr sz="3700" dirty="0">
+              <a:solidFill>
+                <a:schemeClr val="bg1"/>
+              </a:solidFill>
               <a:latin typeface="Segoe UI"/>
               <a:cs typeface="Segoe UI"/>
             </a:endParaRPr>
@@ -14928,7 +15380,9 @@
           <p:txBody>
             <a:bodyPr wrap="square" lIns="0" tIns="0" rIns="0" bIns="0" rtlCol="0"/>
             <a:lstStyle/>
-            <a:p/>
+            <a:p>
+              <a:endParaRPr/>
+            </a:p>
           </p:txBody>
         </p:sp>
         <p:sp>
@@ -15027,7 +15481,9 @@
           <p:txBody>
             <a:bodyPr wrap="square" lIns="0" tIns="0" rIns="0" bIns="0" rtlCol="0"/>
             <a:lstStyle/>
-            <a:p/>
+            <a:p>
+              <a:endParaRPr/>
+            </a:p>
           </p:txBody>
         </p:sp>
       </p:grpSp>
@@ -15047,7 +15503,7 @@
           </a:prstGeom>
         </p:spPr>
         <p:txBody>
-          <a:bodyPr wrap="square" lIns="0" tIns="17145" rIns="0" bIns="0" rtlCol="0" vert="horz">
+          <a:bodyPr vert="horz" wrap="square" lIns="0" tIns="17145" rIns="0" bIns="0" rtlCol="0">
             <a:spAutoFit/>
           </a:bodyPr>
           <a:lstStyle/>
@@ -15061,48 +15517,69 @@
               </a:spcBef>
             </a:pPr>
             <a:r>
-              <a:rPr dirty="0" sz="2850" spc="-70">
+              <a:rPr sz="2850" spc="-70" dirty="0">
+                <a:solidFill>
+                  <a:schemeClr val="bg1"/>
+                </a:solidFill>
                 <a:latin typeface="Segoe UI"/>
                 <a:cs typeface="Segoe UI"/>
               </a:rPr>
               <a:t>Top-</a:t>
             </a:r>
             <a:r>
-              <a:rPr dirty="0" sz="2850">
+              <a:rPr sz="2850" dirty="0">
+                <a:solidFill>
+                  <a:schemeClr val="bg1"/>
+                </a:solidFill>
                 <a:latin typeface="Segoe UI"/>
                 <a:cs typeface="Segoe UI"/>
               </a:rPr>
               <a:t>k</a:t>
             </a:r>
             <a:r>
-              <a:rPr dirty="0" sz="2850" spc="80">
+              <a:rPr sz="2850" spc="80" dirty="0">
+                <a:solidFill>
+                  <a:schemeClr val="bg1"/>
+                </a:solidFill>
                 <a:latin typeface="Segoe UI"/>
                 <a:cs typeface="Segoe UI"/>
               </a:rPr>
               <a:t> </a:t>
             </a:r>
             <a:r>
-              <a:rPr dirty="0" sz="2850">
+              <a:rPr sz="2850" dirty="0">
+                <a:solidFill>
+                  <a:schemeClr val="bg1"/>
+                </a:solidFill>
                 <a:latin typeface="Segoe UI"/>
                 <a:cs typeface="Segoe UI"/>
               </a:rPr>
               <a:t>Medical</a:t>
             </a:r>
             <a:r>
-              <a:rPr dirty="0" sz="2850" spc="80">
+              <a:rPr sz="2850" spc="80" dirty="0">
+                <a:solidFill>
+                  <a:schemeClr val="bg1"/>
+                </a:solidFill>
                 <a:latin typeface="Segoe UI"/>
                 <a:cs typeface="Segoe UI"/>
               </a:rPr>
               <a:t> </a:t>
             </a:r>
             <a:r>
-              <a:rPr dirty="0" sz="2850" spc="-10">
+              <a:rPr sz="2850" spc="-10" dirty="0">
+                <a:solidFill>
+                  <a:schemeClr val="bg1"/>
+                </a:solidFill>
                 <a:latin typeface="Segoe UI"/>
                 <a:cs typeface="Segoe UI"/>
               </a:rPr>
               <a:t>Chunks</a:t>
             </a:r>
-            <a:endParaRPr sz="2850">
+            <a:endParaRPr sz="2850" dirty="0">
+              <a:solidFill>
+                <a:schemeClr val="bg1"/>
+              </a:solidFill>
               <a:latin typeface="Segoe UI"/>
               <a:cs typeface="Segoe UI"/>
             </a:endParaRPr>
@@ -15180,7 +15657,9 @@
           <p:txBody>
             <a:bodyPr wrap="square" lIns="0" tIns="0" rIns="0" bIns="0" rtlCol="0"/>
             <a:lstStyle/>
-            <a:p/>
+            <a:p>
+              <a:endParaRPr/>
+            </a:p>
           </p:txBody>
         </p:sp>
         <p:sp>
@@ -15279,7 +15758,9 @@
           <p:txBody>
             <a:bodyPr wrap="square" lIns="0" tIns="0" rIns="0" bIns="0" rtlCol="0"/>
             <a:lstStyle/>
-            <a:p/>
+            <a:p>
+              <a:endParaRPr/>
+            </a:p>
           </p:txBody>
         </p:sp>
       </p:grpSp>
@@ -15299,7 +15780,7 @@
           </a:prstGeom>
         </p:spPr>
         <p:txBody>
-          <a:bodyPr wrap="square" lIns="0" tIns="11430" rIns="0" bIns="0" rtlCol="0" vert="horz">
+          <a:bodyPr vert="horz" wrap="square" lIns="0" tIns="11430" rIns="0" bIns="0" rtlCol="0">
             <a:spAutoFit/>
           </a:bodyPr>
           <a:lstStyle/>
@@ -15313,41 +15794,59 @@
               </a:spcBef>
             </a:pPr>
             <a:r>
-              <a:rPr dirty="0" sz="2800">
+              <a:rPr sz="2800" dirty="0">
+                <a:solidFill>
+                  <a:schemeClr val="bg1"/>
+                </a:solidFill>
                 <a:latin typeface="Segoe UI"/>
                 <a:cs typeface="Segoe UI"/>
               </a:rPr>
               <a:t>Groq</a:t>
             </a:r>
             <a:r>
-              <a:rPr dirty="0" sz="2800" spc="-80">
+              <a:rPr sz="2800" spc="-80" dirty="0">
+                <a:solidFill>
+                  <a:schemeClr val="bg1"/>
+                </a:solidFill>
                 <a:latin typeface="Segoe UI"/>
                 <a:cs typeface="Segoe UI"/>
               </a:rPr>
               <a:t> </a:t>
             </a:r>
             <a:r>
-              <a:rPr dirty="0" sz="2800">
+              <a:rPr sz="2800" dirty="0">
+                <a:solidFill>
+                  <a:schemeClr val="bg1"/>
+                </a:solidFill>
                 <a:latin typeface="Segoe UI"/>
                 <a:cs typeface="Segoe UI"/>
               </a:rPr>
               <a:t>Llama</a:t>
             </a:r>
             <a:r>
-              <a:rPr dirty="0" sz="2800" spc="-80">
+              <a:rPr sz="2800" spc="-80" dirty="0">
+                <a:solidFill>
+                  <a:schemeClr val="bg1"/>
+                </a:solidFill>
                 <a:latin typeface="Segoe UI"/>
                 <a:cs typeface="Segoe UI"/>
               </a:rPr>
               <a:t> </a:t>
             </a:r>
             <a:r>
-              <a:rPr dirty="0" sz="2800" spc="-50">
+              <a:rPr sz="2800" spc="-50" dirty="0">
+                <a:solidFill>
+                  <a:schemeClr val="bg1"/>
+                </a:solidFill>
                 <a:latin typeface="Segoe UI"/>
                 <a:cs typeface="Segoe UI"/>
               </a:rPr>
               <a:t>4</a:t>
             </a:r>
-            <a:endParaRPr sz="2800">
+            <a:endParaRPr sz="2800" dirty="0">
+              <a:solidFill>
+                <a:schemeClr val="bg1"/>
+              </a:solidFill>
               <a:latin typeface="Segoe UI"/>
               <a:cs typeface="Segoe UI"/>
             </a:endParaRPr>
@@ -15452,7 +15951,9 @@
           <p:txBody>
             <a:bodyPr wrap="square" lIns="0" tIns="0" rIns="0" bIns="0" rtlCol="0"/>
             <a:lstStyle/>
-            <a:p/>
+            <a:p>
+              <a:endParaRPr/>
+            </a:p>
           </p:txBody>
         </p:sp>
         <p:sp>
@@ -15551,7 +16052,9 @@
           <p:txBody>
             <a:bodyPr wrap="square" lIns="0" tIns="0" rIns="0" bIns="0" rtlCol="0"/>
             <a:lstStyle/>
-            <a:p/>
+            <a:p>
+              <a:endParaRPr/>
+            </a:p>
           </p:txBody>
         </p:sp>
       </p:grpSp>
@@ -15571,7 +16074,7 @@
           </a:prstGeom>
         </p:spPr>
         <p:txBody>
-          <a:bodyPr wrap="square" lIns="0" tIns="17145" rIns="0" bIns="0" rtlCol="0" vert="horz">
+          <a:bodyPr vert="horz" wrap="square" lIns="0" tIns="17145" rIns="0" bIns="0" rtlCol="0">
             <a:spAutoFit/>
           </a:bodyPr>
           <a:lstStyle/>
@@ -15585,27 +16088,39 @@
               </a:spcBef>
             </a:pPr>
             <a:r>
-              <a:rPr dirty="0" sz="2850">
+              <a:rPr sz="2850" dirty="0">
+                <a:solidFill>
+                  <a:schemeClr val="bg1"/>
+                </a:solidFill>
                 <a:latin typeface="Segoe UI"/>
                 <a:cs typeface="Segoe UI"/>
               </a:rPr>
               <a:t>Final</a:t>
             </a:r>
             <a:r>
-              <a:rPr dirty="0" sz="2850" spc="50">
+              <a:rPr sz="2850" spc="50" dirty="0">
+                <a:solidFill>
+                  <a:schemeClr val="bg1"/>
+                </a:solidFill>
                 <a:latin typeface="Segoe UI"/>
                 <a:cs typeface="Segoe UI"/>
               </a:rPr>
               <a:t> </a:t>
             </a:r>
             <a:r>
-              <a:rPr dirty="0" sz="2850" spc="-10">
+              <a:rPr sz="2850" spc="-10" dirty="0">
+                <a:solidFill>
+                  <a:schemeClr val="bg1"/>
+                </a:solidFill>
                 <a:latin typeface="Segoe UI"/>
                 <a:cs typeface="Segoe UI"/>
               </a:rPr>
               <a:t>Answer</a:t>
             </a:r>
-            <a:endParaRPr sz="2850">
+            <a:endParaRPr sz="2850" dirty="0">
+              <a:solidFill>
+                <a:schemeClr val="bg1"/>
+              </a:solidFill>
               <a:latin typeface="Segoe UI"/>
               <a:cs typeface="Segoe UI"/>
             </a:endParaRPr>
@@ -15628,7 +16143,7 @@
           </a:prstGeom>
         </p:spPr>
         <p:txBody>
-          <a:bodyPr wrap="square" lIns="0" tIns="16510" rIns="0" bIns="0" rtlCol="0" vert="horz">
+          <a:bodyPr vert="horz" wrap="square" lIns="0" tIns="16510" rIns="0" bIns="0" rtlCol="0">
             <a:spAutoFit/>
           </a:bodyPr>
           <a:lstStyle/>
@@ -15642,21 +16157,21 @@
               </a:spcBef>
             </a:pPr>
             <a:r>
-              <a:rPr dirty="0" sz="5200" spc="665" i="1">
+              <a:rPr sz="5200" i="1" spc="665" dirty="0">
                 <a:latin typeface="Cambria"/>
                 <a:cs typeface="Cambria"/>
               </a:rPr>
               <a:t>Online</a:t>
             </a:r>
             <a:r>
-              <a:rPr dirty="0" sz="5200" spc="880" i="1">
+              <a:rPr sz="5200" i="1" spc="880" dirty="0">
                 <a:latin typeface="Cambria"/>
                 <a:cs typeface="Cambria"/>
               </a:rPr>
               <a:t> </a:t>
             </a:r>
             <a:r>
-              <a:rPr dirty="0" sz="5200" spc="515" i="1">
+              <a:rPr sz="5200" i="1" spc="515" dirty="0">
                 <a:latin typeface="Cambria"/>
                 <a:cs typeface="Cambria"/>
               </a:rPr>
@@ -15705,10 +16220,12 @@
           </p:nvPr>
         </p:nvSpPr>
         <p:spPr>
-          <a:prstGeom prst="rect"/>
+          <a:prstGeom prst="rect">
+            <a:avLst/>
+          </a:prstGeom>
         </p:spPr>
         <p:txBody>
-          <a:bodyPr wrap="square" lIns="0" tIns="12065" rIns="0" bIns="0" rtlCol="0" vert="horz">
+          <a:bodyPr vert="horz" wrap="square" lIns="0" tIns="12065" rIns="0" bIns="0" rtlCol="0">
             <a:spAutoFit/>
           </a:bodyPr>
           <a:lstStyle/>
@@ -15722,7 +16239,7 @@
               </a:spcBef>
             </a:pPr>
             <a:r>
-              <a:rPr dirty="0" sz="4050" spc="300" i="1">
+              <a:rPr sz="4050" i="1" spc="300" dirty="0">
                 <a:solidFill>
                   <a:srgbClr val="000000"/>
                 </a:solidFill>
@@ -15732,7 +16249,7 @@
               <a:t>Let's</a:t>
             </a:r>
             <a:r>
-              <a:rPr dirty="0" sz="4050" spc="660" i="1">
+              <a:rPr sz="4050" i="1" spc="660" dirty="0">
                 <a:solidFill>
                   <a:srgbClr val="000000"/>
                 </a:solidFill>
@@ -15742,7 +16259,7 @@
               <a:t> </a:t>
             </a:r>
             <a:r>
-              <a:rPr dirty="0" sz="4050" spc="385" i="1">
+              <a:rPr sz="4050" i="1" spc="385" dirty="0">
                 <a:solidFill>
                   <a:srgbClr val="000000"/>
                 </a:solidFill>
@@ -15752,7 +16269,7 @@
               <a:t>Ask</a:t>
             </a:r>
             <a:r>
-              <a:rPr dirty="0" sz="4050" spc="660" i="1">
+              <a:rPr sz="4050" i="1" spc="660" dirty="0">
                 <a:solidFill>
                   <a:srgbClr val="000000"/>
                 </a:solidFill>
@@ -15762,7 +16279,7 @@
               <a:t> </a:t>
             </a:r>
             <a:r>
-              <a:rPr dirty="0" sz="4050" spc="550" i="1">
+              <a:rPr sz="4050" i="1" spc="550" dirty="0">
                 <a:solidFill>
                   <a:srgbClr val="000000"/>
                 </a:solidFill>
@@ -15772,7 +16289,7 @@
               <a:t>Our</a:t>
             </a:r>
             <a:r>
-              <a:rPr dirty="0" sz="4050" spc="655" i="1">
+              <a:rPr sz="4050" i="1" spc="655" dirty="0">
                 <a:solidFill>
                   <a:srgbClr val="000000"/>
                 </a:solidFill>
@@ -15782,7 +16299,7 @@
               <a:t> </a:t>
             </a:r>
             <a:r>
-              <a:rPr dirty="0" sz="4050" spc="355" i="1">
+              <a:rPr sz="4050" i="1" spc="355" dirty="0">
                 <a:solidFill>
                   <a:srgbClr val="000000"/>
                 </a:solidFill>
@@ -15814,7 +16331,7 @@
           </a:prstGeom>
         </p:spPr>
         <p:txBody>
-          <a:bodyPr wrap="square" lIns="0" tIns="34925" rIns="0" bIns="0" rtlCol="0" vert="horz">
+          <a:bodyPr vert="horz" wrap="square" lIns="0" tIns="34925" rIns="0" bIns="0" rtlCol="0">
             <a:spAutoFit/>
           </a:bodyPr>
           <a:lstStyle/>
@@ -15828,98 +16345,98 @@
               </a:spcBef>
             </a:pPr>
             <a:r>
-              <a:rPr dirty="0" sz="2700" spc="275" i="1">
+              <a:rPr sz="2700" i="1" spc="275" dirty="0">
                 <a:latin typeface="Cambria"/>
                 <a:cs typeface="Cambria"/>
               </a:rPr>
               <a:t>What</a:t>
             </a:r>
             <a:r>
-              <a:rPr dirty="0" sz="2700" spc="450" i="1">
+              <a:rPr sz="2700" i="1" spc="450" dirty="0">
                 <a:latin typeface="Cambria"/>
                 <a:cs typeface="Cambria"/>
               </a:rPr>
               <a:t> </a:t>
             </a:r>
             <a:r>
-              <a:rPr dirty="0" sz="2700" spc="170" i="1">
+              <a:rPr sz="2700" i="1" spc="170" dirty="0">
                 <a:latin typeface="Cambria"/>
                 <a:cs typeface="Cambria"/>
               </a:rPr>
               <a:t>are</a:t>
             </a:r>
             <a:r>
-              <a:rPr dirty="0" sz="2700" spc="450" i="1">
+              <a:rPr sz="2700" i="1" spc="450" dirty="0">
                 <a:latin typeface="Cambria"/>
                 <a:cs typeface="Cambria"/>
               </a:rPr>
               <a:t> </a:t>
             </a:r>
             <a:r>
-              <a:rPr dirty="0" sz="2700" spc="135" i="1">
+              <a:rPr sz="2700" i="1" spc="135" dirty="0">
                 <a:latin typeface="Cambria"/>
                 <a:cs typeface="Cambria"/>
               </a:rPr>
               <a:t>the</a:t>
             </a:r>
             <a:r>
-              <a:rPr dirty="0" sz="2700" spc="450" i="1">
+              <a:rPr sz="2700" i="1" spc="450" dirty="0">
                 <a:latin typeface="Cambria"/>
                 <a:cs typeface="Cambria"/>
               </a:rPr>
               <a:t> </a:t>
             </a:r>
             <a:r>
-              <a:rPr dirty="0" sz="2700" spc="185" i="1">
+              <a:rPr sz="2700" i="1" spc="185" dirty="0">
                 <a:latin typeface="Cambria"/>
                 <a:cs typeface="Cambria"/>
               </a:rPr>
               <a:t>symptoms </a:t>
             </a:r>
             <a:r>
-              <a:rPr dirty="0" sz="2700" spc="145" i="1">
+              <a:rPr sz="2700" i="1" spc="145" dirty="0">
                 <a:latin typeface="Cambria"/>
                 <a:cs typeface="Cambria"/>
               </a:rPr>
               <a:t>of</a:t>
             </a:r>
             <a:r>
-              <a:rPr dirty="0" sz="2700" spc="445" i="1">
+              <a:rPr sz="2700" i="1" spc="445" dirty="0">
                 <a:latin typeface="Cambria"/>
                 <a:cs typeface="Cambria"/>
               </a:rPr>
               <a:t> </a:t>
             </a:r>
             <a:r>
-              <a:rPr dirty="0" sz="2700" spc="295" i="1">
+              <a:rPr sz="2700" i="1" spc="295" dirty="0">
                 <a:latin typeface="Cambria"/>
                 <a:cs typeface="Cambria"/>
               </a:rPr>
               <a:t>Type</a:t>
             </a:r>
             <a:r>
-              <a:rPr dirty="0" sz="2700" spc="450" i="1">
+              <a:rPr sz="2700" i="1" spc="450" dirty="0">
                 <a:latin typeface="Cambria"/>
                 <a:cs typeface="Cambria"/>
               </a:rPr>
               <a:t> </a:t>
             </a:r>
             <a:r>
-              <a:rPr dirty="0" sz="2700" spc="254" i="1">
+              <a:rPr sz="2700" i="1" spc="254" dirty="0">
                 <a:latin typeface="Cambria"/>
                 <a:cs typeface="Cambria"/>
               </a:rPr>
               <a:t>2</a:t>
             </a:r>
             <a:r>
-              <a:rPr dirty="0" sz="2700" spc="450" i="1">
+              <a:rPr sz="2700" i="1" spc="450" dirty="0">
                 <a:latin typeface="Cambria"/>
                 <a:cs typeface="Cambria"/>
               </a:rPr>
               <a:t> </a:t>
             </a:r>
             <a:r>
-              <a:rPr dirty="0" sz="2700" spc="225" i="1">
+              <a:rPr sz="2700" i="1" spc="225" dirty="0">
                 <a:latin typeface="Cambria"/>
                 <a:cs typeface="Cambria"/>
               </a:rPr>
@@ -15968,10 +16485,12 @@
           </p:nvPr>
         </p:nvSpPr>
         <p:spPr>
-          <a:prstGeom prst="rect"/>
+          <a:prstGeom prst="rect">
+            <a:avLst/>
+          </a:prstGeom>
         </p:spPr>
         <p:txBody>
-          <a:bodyPr wrap="square" lIns="0" tIns="12065" rIns="0" bIns="0" rtlCol="0" vert="horz">
+          <a:bodyPr vert="horz" wrap="square" lIns="0" tIns="12065" rIns="0" bIns="0" rtlCol="0">
             <a:spAutoFit/>
           </a:bodyPr>
           <a:lstStyle/>
@@ -15985,7 +16504,7 @@
               </a:spcBef>
             </a:pPr>
             <a:r>
-              <a:rPr dirty="0" sz="4050" spc="425" i="1">
+              <a:rPr sz="4050" i="1" spc="425" dirty="0">
                 <a:solidFill>
                   <a:srgbClr val="000000"/>
                 </a:solidFill>
@@ -15995,7 +16514,7 @@
               <a:t>What</a:t>
             </a:r>
             <a:r>
-              <a:rPr dirty="0" sz="4050" spc="650" i="1">
+              <a:rPr sz="4050" i="1" spc="650" dirty="0">
                 <a:solidFill>
                   <a:srgbClr val="000000"/>
                 </a:solidFill>
@@ -16005,7 +16524,7 @@
               <a:t> </a:t>
             </a:r>
             <a:r>
-              <a:rPr dirty="0" sz="4050" spc="580" i="1">
+              <a:rPr sz="4050" i="1" spc="580" dirty="0">
                 <a:solidFill>
                   <a:srgbClr val="000000"/>
                 </a:solidFill>
@@ -16015,7 +16534,7 @@
               <a:t>Did</a:t>
             </a:r>
             <a:r>
-              <a:rPr dirty="0" sz="4050" spc="660" i="1">
+              <a:rPr sz="4050" i="1" spc="660" dirty="0">
                 <a:solidFill>
                   <a:srgbClr val="000000"/>
                 </a:solidFill>
@@ -16025,7 +16544,7 @@
               <a:t> </a:t>
             </a:r>
             <a:r>
-              <a:rPr dirty="0" sz="4050" spc="420" i="1">
+              <a:rPr sz="4050" i="1" spc="420" dirty="0">
                 <a:solidFill>
                   <a:srgbClr val="000000"/>
                 </a:solidFill>
@@ -16035,7 +16554,7 @@
               <a:t>We</a:t>
             </a:r>
             <a:r>
-              <a:rPr dirty="0" sz="4050" spc="660" i="1">
+              <a:rPr sz="4050" i="1" spc="660" dirty="0">
                 <a:solidFill>
                   <a:srgbClr val="000000"/>
                 </a:solidFill>
@@ -16045,7 +16564,7 @@
               <a:t> </a:t>
             </a:r>
             <a:r>
-              <a:rPr dirty="0" sz="4050" spc="405" i="1">
+              <a:rPr sz="4050" i="1" spc="405" dirty="0">
                 <a:solidFill>
                   <a:srgbClr val="000000"/>
                 </a:solidFill>
@@ -16157,7 +16676,9 @@
         <p:txBody>
           <a:bodyPr wrap="square" lIns="0" tIns="0" rIns="0" bIns="0" rtlCol="0"/>
           <a:lstStyle/>
-          <a:p/>
+          <a:p>
+            <a:endParaRPr/>
+          </a:p>
         </p:txBody>
       </p:sp>
       <p:sp>
@@ -16176,7 +16697,7 @@
           </a:prstGeom>
         </p:spPr>
         <p:txBody>
-          <a:bodyPr wrap="square" lIns="0" tIns="13335" rIns="0" bIns="0" rtlCol="0" vert="horz">
+          <a:bodyPr vert="horz" wrap="square" lIns="0" tIns="13335" rIns="0" bIns="0" rtlCol="0">
             <a:spAutoFit/>
           </a:bodyPr>
           <a:lstStyle/>
@@ -16190,20 +16711,29 @@
               </a:spcBef>
             </a:pPr>
             <a:r>
-              <a:rPr dirty="0" sz="3950">
+              <a:rPr sz="3950" dirty="0">
+                <a:solidFill>
+                  <a:schemeClr val="bg1"/>
+                </a:solidFill>
                 <a:latin typeface="Segoe UI"/>
                 <a:cs typeface="Segoe UI"/>
               </a:rPr>
               <a:t>91%</a:t>
             </a:r>
             <a:r>
-              <a:rPr dirty="0" sz="3950" spc="-10">
+              <a:rPr sz="3950" spc="-10" dirty="0">
+                <a:solidFill>
+                  <a:schemeClr val="bg1"/>
+                </a:solidFill>
                 <a:latin typeface="Segoe UI"/>
                 <a:cs typeface="Segoe UI"/>
               </a:rPr>
               <a:t> Accuracy</a:t>
             </a:r>
-            <a:endParaRPr sz="3950">
+            <a:endParaRPr sz="3950" dirty="0">
+              <a:solidFill>
+                <a:schemeClr val="bg1"/>
+              </a:solidFill>
               <a:latin typeface="Segoe UI"/>
               <a:cs typeface="Segoe UI"/>
             </a:endParaRPr>
@@ -16218,8 +16748,8 @@
         </p:nvSpPr>
         <p:spPr>
           <a:xfrm>
-            <a:off x="12737606" y="2215219"/>
-            <a:ext cx="4520565" cy="1259205"/>
+            <a:off x="10210799" y="1728965"/>
+            <a:ext cx="7047372" cy="2242481"/>
           </a:xfrm>
           <a:custGeom>
             <a:avLst/>
@@ -16309,7 +16839,9 @@
         <p:txBody>
           <a:bodyPr wrap="square" lIns="0" tIns="0" rIns="0" bIns="0" rtlCol="0"/>
           <a:lstStyle/>
-          <a:p/>
+          <a:p>
+            <a:endParaRPr/>
+          </a:p>
         </p:txBody>
       </p:sp>
       <p:sp>
@@ -16320,20 +16852,20 @@
         </p:nvSpPr>
         <p:spPr>
           <a:xfrm>
-            <a:off x="13082987" y="2528369"/>
-            <a:ext cx="3830954" cy="629285"/>
+            <a:off x="10363375" y="2178751"/>
+            <a:ext cx="6742219" cy="1229824"/>
           </a:xfrm>
           <a:prstGeom prst="rect">
             <a:avLst/>
           </a:prstGeom>
         </p:spPr>
         <p:txBody>
-          <a:bodyPr wrap="square" lIns="0" tIns="13970" rIns="0" bIns="0" rtlCol="0" vert="horz">
+          <a:bodyPr vert="horz" wrap="square" lIns="0" tIns="13970" rIns="0" bIns="0" rtlCol="0">
             <a:spAutoFit/>
           </a:bodyPr>
           <a:lstStyle/>
           <a:p>
-            <a:pPr marL="12700">
+            <a:pPr marL="12700" algn="ctr">
               <a:lnSpc>
                 <a:spcPct val="100000"/>
               </a:lnSpc>
@@ -16342,34 +16874,59 @@
               </a:spcBef>
             </a:pPr>
             <a:r>
-              <a:rPr dirty="0" sz="3950">
+              <a:rPr sz="3950" dirty="0">
+                <a:solidFill>
+                  <a:schemeClr val="bg1"/>
+                </a:solidFill>
                 <a:latin typeface="Segoe UI"/>
                 <a:cs typeface="Segoe UI"/>
               </a:rPr>
               <a:t>90.66%</a:t>
             </a:r>
             <a:r>
-              <a:rPr dirty="0" sz="3950" spc="-30">
+              <a:rPr sz="3950" spc="-30" dirty="0">
+                <a:solidFill>
+                  <a:schemeClr val="bg1"/>
+                </a:solidFill>
                 <a:latin typeface="Segoe UI"/>
                 <a:cs typeface="Segoe UI"/>
               </a:rPr>
               <a:t> </a:t>
             </a:r>
             <a:r>
-              <a:rPr dirty="0" sz="3950">
+              <a:rPr sz="3950" dirty="0">
+                <a:solidFill>
+                  <a:schemeClr val="bg1"/>
+                </a:solidFill>
                 <a:latin typeface="Segoe UI"/>
                 <a:cs typeface="Segoe UI"/>
               </a:rPr>
               <a:t>Macro</a:t>
             </a:r>
             <a:r>
-              <a:rPr dirty="0" sz="3950" spc="-25">
+              <a:rPr sz="3950" spc="-25" dirty="0">
+                <a:solidFill>
+                  <a:schemeClr val="bg1"/>
+                </a:solidFill>
                 <a:latin typeface="Segoe UI"/>
                 <a:cs typeface="Segoe UI"/>
               </a:rPr>
               <a:t> F1</a:t>
             </a:r>
-            <a:endParaRPr sz="3950">
+            <a:r>
+              <a:rPr lang="en-US" sz="3950" spc="-25" dirty="0">
+                <a:solidFill>
+                  <a:schemeClr val="bg1"/>
+                </a:solidFill>
+                <a:latin typeface="Segoe UI"/>
+                <a:cs typeface="Segoe UI"/>
+              </a:rPr>
+              <a:t> for medical query classification</a:t>
+            </a:r>
+            <a:endParaRPr sz="3950" dirty="0">
+              <a:solidFill>
+                <a:schemeClr val="bg1"/>
+              </a:solidFill>
               <a:latin typeface="Segoe UI"/>
               <a:cs typeface="Segoe UI"/>
             </a:endParaRPr>
@@ -16472,7 +17029,9 @@
         <p:txBody>
           <a:bodyPr wrap="square" lIns="0" tIns="0" rIns="0" bIns="0" rtlCol="0"/>
           <a:lstStyle/>
-          <a:p/>
+          <a:p>
+            <a:endParaRPr/>
+          </a:p>
         </p:txBody>
       </p:sp>
       <p:sp>
@@ -16491,7 +17050,7 @@
           </a:prstGeom>
         </p:spPr>
         <p:txBody>
-          <a:bodyPr wrap="square" lIns="0" tIns="13970" rIns="0" bIns="0" rtlCol="0" vert="horz">
+          <a:bodyPr vert="horz" wrap="square" lIns="0" tIns="13970" rIns="0" bIns="0" rtlCol="0">
             <a:spAutoFit/>
           </a:bodyPr>
           <a:lstStyle/>
@@ -16505,41 +17064,59 @@
               </a:spcBef>
             </a:pPr>
             <a:r>
-              <a:rPr dirty="0" sz="3950">
+              <a:rPr sz="3950" dirty="0">
+                <a:solidFill>
+                  <a:schemeClr val="bg1"/>
+                </a:solidFill>
                 <a:latin typeface="Segoe UI"/>
                 <a:cs typeface="Segoe UI"/>
               </a:rPr>
               <a:t>94.2%</a:t>
             </a:r>
             <a:r>
-              <a:rPr dirty="0" sz="3950" spc="-105">
+              <a:rPr sz="3950" spc="-105" dirty="0">
+                <a:solidFill>
+                  <a:schemeClr val="bg1"/>
+                </a:solidFill>
                 <a:latin typeface="Segoe UI"/>
                 <a:cs typeface="Segoe UI"/>
               </a:rPr>
               <a:t> </a:t>
             </a:r>
             <a:r>
-              <a:rPr dirty="0" sz="3950">
+              <a:rPr sz="3950" dirty="0">
+                <a:solidFill>
+                  <a:schemeClr val="bg1"/>
+                </a:solidFill>
                 <a:latin typeface="Segoe UI"/>
                 <a:cs typeface="Segoe UI"/>
               </a:rPr>
               <a:t>Retrieval</a:t>
             </a:r>
             <a:r>
-              <a:rPr dirty="0" sz="3950" spc="-100">
+              <a:rPr sz="3950" spc="-100" dirty="0">
+                <a:solidFill>
+                  <a:schemeClr val="bg1"/>
+                </a:solidFill>
                 <a:latin typeface="Segoe UI"/>
                 <a:cs typeface="Segoe UI"/>
               </a:rPr>
               <a:t> </a:t>
             </a:r>
             <a:r>
-              <a:rPr dirty="0" sz="3950" spc="-10">
+              <a:rPr sz="3950" spc="-10" dirty="0">
+                <a:solidFill>
+                  <a:schemeClr val="bg1"/>
+                </a:solidFill>
                 <a:latin typeface="Segoe UI"/>
                 <a:cs typeface="Segoe UI"/>
               </a:rPr>
               <a:t>Precision</a:t>
             </a:r>
-            <a:endParaRPr sz="3950">
+            <a:endParaRPr sz="3950" dirty="0">
+              <a:solidFill>
+                <a:schemeClr val="bg1"/>
+              </a:solidFill>
               <a:latin typeface="Segoe UI"/>
               <a:cs typeface="Segoe UI"/>
             </a:endParaRPr>
@@ -16642,7 +17219,9 @@
         <p:txBody>
           <a:bodyPr wrap="square" lIns="0" tIns="0" rIns="0" bIns="0" rtlCol="0"/>
           <a:lstStyle/>
-          <a:p/>
+          <a:p>
+            <a:endParaRPr/>
+          </a:p>
         </p:txBody>
       </p:sp>
       <p:sp>
@@ -16661,7 +17240,7 @@
           </a:prstGeom>
         </p:spPr>
         <p:txBody>
-          <a:bodyPr wrap="square" lIns="0" tIns="13970" rIns="0" bIns="0" rtlCol="0" vert="horz">
+          <a:bodyPr vert="horz" wrap="square" lIns="0" tIns="13970" rIns="0" bIns="0" rtlCol="0">
             <a:spAutoFit/>
           </a:bodyPr>
           <a:lstStyle/>
@@ -16675,20 +17254,29 @@
               </a:spcBef>
             </a:pPr>
             <a:r>
-              <a:rPr dirty="0" sz="3950">
+              <a:rPr sz="3950" dirty="0">
+                <a:solidFill>
+                  <a:schemeClr val="bg1"/>
+                </a:solidFill>
                 <a:latin typeface="Segoe UI"/>
                 <a:cs typeface="Segoe UI"/>
               </a:rPr>
               <a:t>86%</a:t>
             </a:r>
             <a:r>
-              <a:rPr dirty="0" sz="3950" spc="-10">
+              <a:rPr sz="3950" spc="-10" dirty="0">
+                <a:solidFill>
+                  <a:schemeClr val="bg1"/>
+                </a:solidFill>
                 <a:latin typeface="Segoe UI"/>
                 <a:cs typeface="Segoe UI"/>
               </a:rPr>
               <a:t> Faithfulness</a:t>
             </a:r>
-            <a:endParaRPr sz="3950">
+            <a:endParaRPr sz="3950" dirty="0">
+              <a:solidFill>
+                <a:schemeClr val="bg1"/>
+              </a:solidFill>
               <a:latin typeface="Segoe UI"/>
               <a:cs typeface="Segoe UI"/>
             </a:endParaRPr>
@@ -16791,7 +17379,9 @@
         <p:txBody>
           <a:bodyPr wrap="square" lIns="0" tIns="0" rIns="0" bIns="0" rtlCol="0"/>
           <a:lstStyle/>
-          <a:p/>
+          <a:p>
+            <a:endParaRPr/>
+          </a:p>
         </p:txBody>
       </p:sp>
       <p:sp>
@@ -16810,7 +17400,7 @@
           </a:prstGeom>
         </p:spPr>
         <p:txBody>
-          <a:bodyPr wrap="square" lIns="0" tIns="13970" rIns="0" bIns="0" rtlCol="0" vert="horz">
+          <a:bodyPr vert="horz" wrap="square" lIns="0" tIns="13970" rIns="0" bIns="0" rtlCol="0">
             <a:spAutoFit/>
           </a:bodyPr>
           <a:lstStyle/>
@@ -16824,20 +17414,29 @@
               </a:spcBef>
             </a:pPr>
             <a:r>
-              <a:rPr dirty="0" sz="3950">
+              <a:rPr sz="3950" dirty="0">
+                <a:solidFill>
+                  <a:schemeClr val="bg1"/>
+                </a:solidFill>
                 <a:latin typeface="Segoe UI"/>
                 <a:cs typeface="Segoe UI"/>
               </a:rPr>
               <a:t>10%</a:t>
             </a:r>
             <a:r>
-              <a:rPr dirty="0" sz="3950" spc="-10">
+              <a:rPr sz="3950" spc="-10" dirty="0">
+                <a:solidFill>
+                  <a:schemeClr val="bg1"/>
+                </a:solidFill>
                 <a:latin typeface="Segoe UI"/>
                 <a:cs typeface="Segoe UI"/>
               </a:rPr>
               <a:t> Hallucination</a:t>
             </a:r>
-            <a:endParaRPr sz="3950">
+            <a:endParaRPr sz="3950" dirty="0">
+              <a:solidFill>
+                <a:schemeClr val="bg1"/>
+              </a:solidFill>
               <a:latin typeface="Segoe UI"/>
               <a:cs typeface="Segoe UI"/>
             </a:endParaRPr>
@@ -16940,7 +17539,9 @@
         <p:txBody>
           <a:bodyPr wrap="square" lIns="0" tIns="0" rIns="0" bIns="0" rtlCol="0"/>
           <a:lstStyle/>
-          <a:p/>
+          <a:p>
+            <a:endParaRPr/>
+          </a:p>
         </p:txBody>
       </p:sp>
       <p:sp>
@@ -16959,7 +17560,7 @@
           </a:prstGeom>
         </p:spPr>
         <p:txBody>
-          <a:bodyPr wrap="square" lIns="0" tIns="13970" rIns="0" bIns="0" rtlCol="0" vert="horz">
+          <a:bodyPr vert="horz" wrap="square" lIns="0" tIns="13970" rIns="0" bIns="0" rtlCol="0">
             <a:spAutoFit/>
           </a:bodyPr>
           <a:lstStyle/>
@@ -16973,41 +17574,59 @@
               </a:spcBef>
             </a:pPr>
             <a:r>
-              <a:rPr dirty="0" sz="3950">
+              <a:rPr sz="3950" dirty="0">
+                <a:solidFill>
+                  <a:schemeClr val="bg1"/>
+                </a:solidFill>
                 <a:latin typeface="Segoe UI"/>
                 <a:cs typeface="Segoe UI"/>
               </a:rPr>
               <a:t>264</a:t>
             </a:r>
             <a:r>
-              <a:rPr dirty="0" sz="3950" spc="-10">
+              <a:rPr sz="3950" spc="-10" dirty="0">
+                <a:solidFill>
+                  <a:schemeClr val="bg1"/>
+                </a:solidFill>
                 <a:latin typeface="Segoe UI"/>
                 <a:cs typeface="Segoe UI"/>
               </a:rPr>
               <a:t> </a:t>
             </a:r>
             <a:r>
-              <a:rPr dirty="0" sz="3950">
+              <a:rPr sz="3950" dirty="0">
+                <a:solidFill>
+                  <a:schemeClr val="bg1"/>
+                </a:solidFill>
                 <a:latin typeface="Segoe UI"/>
                 <a:cs typeface="Segoe UI"/>
               </a:rPr>
               <a:t>ms</a:t>
             </a:r>
             <a:r>
-              <a:rPr dirty="0" sz="3950" spc="-5">
+              <a:rPr sz="3950" spc="-5" dirty="0">
+                <a:solidFill>
+                  <a:schemeClr val="bg1"/>
+                </a:solidFill>
                 <a:latin typeface="Segoe UI"/>
                 <a:cs typeface="Segoe UI"/>
               </a:rPr>
               <a:t> </a:t>
             </a:r>
             <a:r>
-              <a:rPr dirty="0" sz="3950" spc="-10">
+              <a:rPr sz="3950" spc="-10" dirty="0">
+                <a:solidFill>
+                  <a:schemeClr val="bg1"/>
+                </a:solidFill>
                 <a:latin typeface="Segoe UI"/>
                 <a:cs typeface="Segoe UI"/>
               </a:rPr>
               <a:t>Latency</a:t>
             </a:r>
-            <a:endParaRPr sz="3950">
+            <a:endParaRPr sz="3950" dirty="0">
+              <a:solidFill>
+                <a:schemeClr val="bg1"/>
+              </a:solidFill>
               <a:latin typeface="Segoe UI"/>
               <a:cs typeface="Segoe UI"/>
             </a:endParaRPr>
@@ -17050,10 +17669,12 @@
           </p:nvPr>
         </p:nvSpPr>
         <p:spPr>
-          <a:prstGeom prst="rect"/>
+          <a:prstGeom prst="rect">
+            <a:avLst/>
+          </a:prstGeom>
         </p:spPr>
         <p:txBody>
-          <a:bodyPr wrap="square" lIns="0" tIns="219467" rIns="0" bIns="0" rtlCol="0" vert="horz">
+          <a:bodyPr vert="horz" wrap="square" lIns="0" tIns="219467" rIns="0" bIns="0" rtlCol="0">
             <a:spAutoFit/>
           </a:bodyPr>
           <a:lstStyle/>
@@ -17067,7 +17688,7 @@
               </a:spcBef>
             </a:pPr>
             <a:r>
-              <a:rPr dirty="0" sz="4050" spc="484" i="1">
+              <a:rPr sz="4050" i="1" spc="484" dirty="0">
                 <a:solidFill>
                   <a:srgbClr val="000000"/>
                 </a:solidFill>
@@ -17077,7 +17698,7 @@
               <a:t>Why</a:t>
             </a:r>
             <a:r>
-              <a:rPr dirty="0" sz="4050" spc="660" i="1">
+              <a:rPr sz="4050" i="1" spc="660" dirty="0">
                 <a:solidFill>
                   <a:srgbClr val="000000"/>
                 </a:solidFill>
@@ -17087,7 +17708,7 @@
               <a:t> </a:t>
             </a:r>
             <a:r>
-              <a:rPr dirty="0" sz="4050" spc="290" i="1">
+              <a:rPr sz="4050" i="1" spc="290" dirty="0">
                 <a:solidFill>
                   <a:srgbClr val="000000"/>
                 </a:solidFill>
@@ -17097,7 +17718,7 @@
               <a:t>Is</a:t>
             </a:r>
             <a:r>
-              <a:rPr dirty="0" sz="4050" spc="655" i="1">
+              <a:rPr sz="4050" i="1" spc="655" dirty="0">
                 <a:solidFill>
                   <a:srgbClr val="000000"/>
                 </a:solidFill>
@@ -17107,7 +17728,7 @@
               <a:t> </a:t>
             </a:r>
             <a:r>
-              <a:rPr dirty="0" sz="4050" spc="550" i="1">
+              <a:rPr sz="4050" i="1" spc="550" dirty="0">
                 <a:solidFill>
                   <a:srgbClr val="000000"/>
                 </a:solidFill>
@@ -17117,7 +17738,7 @@
               <a:t>Our</a:t>
             </a:r>
             <a:r>
-              <a:rPr dirty="0" sz="4050" spc="660" i="1">
+              <a:rPr sz="4050" i="1" spc="660" dirty="0">
                 <a:solidFill>
                   <a:srgbClr val="000000"/>
                 </a:solidFill>
@@ -17127,7 +17748,7 @@
               <a:t> </a:t>
             </a:r>
             <a:r>
-              <a:rPr dirty="0" sz="4050" spc="340" i="1">
+              <a:rPr sz="4050" i="1" spc="340" dirty="0">
                 <a:solidFill>
                   <a:srgbClr val="000000"/>
                 </a:solidFill>
@@ -17137,7 +17758,7 @@
               <a:t>System</a:t>
             </a:r>
             <a:r>
-              <a:rPr dirty="0" sz="4050" spc="655" i="1">
+              <a:rPr sz="4050" i="1" spc="655" dirty="0">
                 <a:solidFill>
                   <a:srgbClr val="000000"/>
                 </a:solidFill>
@@ -17147,7 +17768,7 @@
               <a:t> </a:t>
             </a:r>
             <a:r>
-              <a:rPr dirty="0" sz="4050" spc="330" i="1">
+              <a:rPr sz="4050" i="1" spc="330" dirty="0">
                 <a:solidFill>
                   <a:srgbClr val="000000"/>
                 </a:solidFill>
